--- a/schools-presentations/A Gymnasiou/A5.1 Μ3 - Εντοπισμός Πληροφοριών από το Διαδίκτυο.pptx
+++ b/schools-presentations/A Gymnasiou/A5.1 Μ3 - Εντοπισμός Πληροφοριών από το Διαδίκτυο.pptx
@@ -1,31 +1,218 @@
 
 <file path=ppt/presentation.xml><?xml version="1.0" encoding="utf-8"?>
-<p:presentation xmlns:p="http://schemas.openxmlformats.org/presentationml/2006/main">
+<p:presentation xmlns:a="http://schemas.openxmlformats.org/drawingml/2006/main" xmlns:r="http://schemas.openxmlformats.org/officeDocument/2006/relationships" xmlns:p="http://schemas.openxmlformats.org/presentationml/2006/main">
   <p:sldMasterIdLst>
-    <p:sldMasterId xmlns:r="http://schemas.openxmlformats.org/officeDocument/2006/relationships" id="2147483648" r:id="R0f548dd01ec54b42"/>
+    <p:sldMasterId id="2147483648" r:id="rId1"/>
   </p:sldMasterIdLst>
   <p:notesMasterIdLst>
-    <p:notesMasterId xmlns:r="http://schemas.openxmlformats.org/officeDocument/2006/relationships" r:id="R2f4b6fb71dc04007"/>
+    <p:notesMasterId r:id="rId8"/>
   </p:notesMasterIdLst>
   <p:sldIdLst>
-    <p:sldId xmlns:r="http://schemas.openxmlformats.org/officeDocument/2006/relationships" id="256" r:id="R9f45cc724507412d"/>
-    <p:sldId xmlns:r="http://schemas.openxmlformats.org/officeDocument/2006/relationships" id="257" r:id="Rb61145f62faa4b00"/>
-    <p:sldId xmlns:r="http://schemas.openxmlformats.org/officeDocument/2006/relationships" id="258" r:id="R393c31e751174bdb"/>
-    <p:sldId xmlns:r="http://schemas.openxmlformats.org/officeDocument/2006/relationships" id="259" r:id="R6e16ec8f74934a95"/>
-    <p:sldId xmlns:r="http://schemas.openxmlformats.org/officeDocument/2006/relationships" id="260" r:id="R7587b420d05a4078"/>
-    <p:sldId xmlns:r="http://schemas.openxmlformats.org/officeDocument/2006/relationships" id="261" r:id="Ra1dcb8a4401b4688"/>
+    <p:sldId id="256" r:id="rId2"/>
+    <p:sldId id="257" r:id="rId3"/>
+    <p:sldId id="258" r:id="rId4"/>
+    <p:sldId id="259" r:id="rId5"/>
+    <p:sldId id="260" r:id="rId6"/>
+    <p:sldId id="261" r:id="rId7"/>
   </p:sldIdLst>
   <p:sldSz cx="12192000" cy="6858000"/>
   <p:notesSz cx="6858000" cy="9144000"/>
+  <p:defaultTextStyle>
+    <a:defPPr>
+      <a:defRPr lang="en-US"/>
+    </a:defPPr>
+    <a:lvl1pPr marL="0" algn="l" defTabSz="914400" rtl="0" eaLnBrk="1" latinLnBrk="0" hangingPunct="1">
+      <a:defRPr sz="1800" kern="1200">
+        <a:solidFill>
+          <a:schemeClr val="tx1"/>
+        </a:solidFill>
+        <a:latin typeface="+mn-lt"/>
+        <a:ea typeface="+mn-ea"/>
+        <a:cs typeface="+mn-cs"/>
+      </a:defRPr>
+    </a:lvl1pPr>
+    <a:lvl2pPr marL="457200" algn="l" defTabSz="914400" rtl="0" eaLnBrk="1" latinLnBrk="0" hangingPunct="1">
+      <a:defRPr sz="1800" kern="1200">
+        <a:solidFill>
+          <a:schemeClr val="tx1"/>
+        </a:solidFill>
+        <a:latin typeface="+mn-lt"/>
+        <a:ea typeface="+mn-ea"/>
+        <a:cs typeface="+mn-cs"/>
+      </a:defRPr>
+    </a:lvl2pPr>
+    <a:lvl3pPr marL="914400" algn="l" defTabSz="914400" rtl="0" eaLnBrk="1" latinLnBrk="0" hangingPunct="1">
+      <a:defRPr sz="1800" kern="1200">
+        <a:solidFill>
+          <a:schemeClr val="tx1"/>
+        </a:solidFill>
+        <a:latin typeface="+mn-lt"/>
+        <a:ea typeface="+mn-ea"/>
+        <a:cs typeface="+mn-cs"/>
+      </a:defRPr>
+    </a:lvl3pPr>
+    <a:lvl4pPr marL="1371600" algn="l" defTabSz="914400" rtl="0" eaLnBrk="1" latinLnBrk="0" hangingPunct="1">
+      <a:defRPr sz="1800" kern="1200">
+        <a:solidFill>
+          <a:schemeClr val="tx1"/>
+        </a:solidFill>
+        <a:latin typeface="+mn-lt"/>
+        <a:ea typeface="+mn-ea"/>
+        <a:cs typeface="+mn-cs"/>
+      </a:defRPr>
+    </a:lvl4pPr>
+    <a:lvl5pPr marL="1828800" algn="l" defTabSz="914400" rtl="0" eaLnBrk="1" latinLnBrk="0" hangingPunct="1">
+      <a:defRPr sz="1800" kern="1200">
+        <a:solidFill>
+          <a:schemeClr val="tx1"/>
+        </a:solidFill>
+        <a:latin typeface="+mn-lt"/>
+        <a:ea typeface="+mn-ea"/>
+        <a:cs typeface="+mn-cs"/>
+      </a:defRPr>
+    </a:lvl5pPr>
+    <a:lvl6pPr marL="2286000" algn="l" defTabSz="914400" rtl="0" eaLnBrk="1" latinLnBrk="0" hangingPunct="1">
+      <a:defRPr sz="1800" kern="1200">
+        <a:solidFill>
+          <a:schemeClr val="tx1"/>
+        </a:solidFill>
+        <a:latin typeface="+mn-lt"/>
+        <a:ea typeface="+mn-ea"/>
+        <a:cs typeface="+mn-cs"/>
+      </a:defRPr>
+    </a:lvl6pPr>
+    <a:lvl7pPr marL="2743200" algn="l" defTabSz="914400" rtl="0" eaLnBrk="1" latinLnBrk="0" hangingPunct="1">
+      <a:defRPr sz="1800" kern="1200">
+        <a:solidFill>
+          <a:schemeClr val="tx1"/>
+        </a:solidFill>
+        <a:latin typeface="+mn-lt"/>
+        <a:ea typeface="+mn-ea"/>
+        <a:cs typeface="+mn-cs"/>
+      </a:defRPr>
+    </a:lvl7pPr>
+    <a:lvl8pPr marL="3200400" algn="l" defTabSz="914400" rtl="0" eaLnBrk="1" latinLnBrk="0" hangingPunct="1">
+      <a:defRPr sz="1800" kern="1200">
+        <a:solidFill>
+          <a:schemeClr val="tx1"/>
+        </a:solidFill>
+        <a:latin typeface="+mn-lt"/>
+        <a:ea typeface="+mn-ea"/>
+        <a:cs typeface="+mn-cs"/>
+      </a:defRPr>
+    </a:lvl8pPr>
+    <a:lvl9pPr marL="3657600" algn="l" defTabSz="914400" rtl="0" eaLnBrk="1" latinLnBrk="0" hangingPunct="1">
+      <a:defRPr sz="1800" kern="1200">
+        <a:solidFill>
+          <a:schemeClr val="tx1"/>
+        </a:solidFill>
+        <a:latin typeface="+mn-lt"/>
+        <a:ea typeface="+mn-ea"/>
+        <a:cs typeface="+mn-cs"/>
+      </a:defRPr>
+    </a:lvl9pPr>
+  </p:defaultTextStyle>
 </p:presentation>
 </file>
 
+<file path=ppt/changesInfos/changesInfo1.xml><?xml version="1.0" encoding="utf-8"?>
+<pc:chgInfo xmlns:a="http://schemas.openxmlformats.org/drawingml/2006/main" xmlns:r="http://schemas.openxmlformats.org/officeDocument/2006/relationships" xmlns:ac="http://schemas.microsoft.com/office/drawing/2013/main/command" xmlns:pc="http://schemas.microsoft.com/office/powerpoint/2013/main/command">
+  <pc:docChgLst>
+    <pc:chgData name="Άριστος Αρέστη" userId="813aa191-2d4c-464f-9d05-0a7e494d859f" providerId="ADAL" clId="{49C7B61D-1ACF-4AFF-A04E-A3B433E32474}"/>
+    <pc:docChg chg="custSel modSld">
+      <pc:chgData name="Άριστος Αρέστη" userId="813aa191-2d4c-464f-9d05-0a7e494d859f" providerId="ADAL" clId="{49C7B61D-1ACF-4AFF-A04E-A3B433E32474}" dt="2026-10-03T06:46:25.149" v="13" actId="478"/>
+      <pc:docMkLst>
+        <pc:docMk/>
+      </pc:docMkLst>
+      <pc:sldChg chg="addSp delSp modSp mod">
+        <pc:chgData name="Άριστος Αρέστη" userId="813aa191-2d4c-464f-9d05-0a7e494d859f" providerId="ADAL" clId="{49C7B61D-1ACF-4AFF-A04E-A3B433E32474}" dt="2026-10-03T06:02:22.192" v="11" actId="1076"/>
+        <pc:sldMkLst>
+          <pc:docMk/>
+          <pc:sldMk cId="1751851059" sldId="260"/>
+        </pc:sldMkLst>
+        <pc:spChg chg="mod">
+          <ac:chgData name="Άριστος Αρέστη" userId="813aa191-2d4c-464f-9d05-0a7e494d859f" providerId="ADAL" clId="{49C7B61D-1ACF-4AFF-A04E-A3B433E32474}" dt="2026-10-03T06:02:16.312" v="9" actId="14100"/>
+          <ac:spMkLst>
+            <pc:docMk/>
+            <pc:sldMk cId="1751851059" sldId="260"/>
+            <ac:spMk id="2" creationId="{B05E293B-CC71-4C59-AC6C-1AD3D5C69AD9}"/>
+          </ac:spMkLst>
+        </pc:spChg>
+        <pc:spChg chg="del">
+          <ac:chgData name="Άριστος Αρέστη" userId="813aa191-2d4c-464f-9d05-0a7e494d859f" providerId="ADAL" clId="{49C7B61D-1ACF-4AFF-A04E-A3B433E32474}" dt="2026-10-03T06:01:54.700" v="2" actId="478"/>
+          <ac:spMkLst>
+            <pc:docMk/>
+            <pc:sldMk cId="1751851059" sldId="260"/>
+            <ac:spMk id="4" creationId="{7D79C285-28C6-4B01-8D43-387F88432D71}"/>
+          </ac:spMkLst>
+        </pc:spChg>
+        <pc:spChg chg="del">
+          <ac:chgData name="Άριστος Αρέστη" userId="813aa191-2d4c-464f-9d05-0a7e494d859f" providerId="ADAL" clId="{49C7B61D-1ACF-4AFF-A04E-A3B433E32474}" dt="2026-10-03T06:01:57.401" v="3" actId="478"/>
+          <ac:spMkLst>
+            <pc:docMk/>
+            <pc:sldMk cId="1751851059" sldId="260"/>
+            <ac:spMk id="5" creationId="{194F3C58-D72A-4E22-8A6E-455918DC4055}"/>
+          </ac:spMkLst>
+        </pc:spChg>
+        <pc:picChg chg="add mod">
+          <ac:chgData name="Άριστος Αρέστη" userId="813aa191-2d4c-464f-9d05-0a7e494d859f" providerId="ADAL" clId="{49C7B61D-1ACF-4AFF-A04E-A3B433E32474}" dt="2026-10-03T06:02:22.192" v="11" actId="1076"/>
+          <ac:picMkLst>
+            <pc:docMk/>
+            <pc:sldMk cId="1751851059" sldId="260"/>
+            <ac:picMk id="7" creationId="{4547B794-9E8B-DC10-F2EA-2213E6395F55}"/>
+          </ac:picMkLst>
+        </pc:picChg>
+        <pc:picChg chg="del">
+          <ac:chgData name="Άριστος Αρέστη" userId="813aa191-2d4c-464f-9d05-0a7e494d859f" providerId="ADAL" clId="{49C7B61D-1ACF-4AFF-A04E-A3B433E32474}" dt="2026-10-03T06:01:40.224" v="0" actId="478"/>
+          <ac:picMkLst>
+            <pc:docMk/>
+            <pc:sldMk cId="1751851059" sldId="260"/>
+            <ac:picMk id="15" creationId="{00000000-0000-0000-0000-000000000000}"/>
+          </ac:picMkLst>
+        </pc:picChg>
+        <pc:picChg chg="del">
+          <ac:chgData name="Άριστος Αρέστη" userId="813aa191-2d4c-464f-9d05-0a7e494d859f" providerId="ADAL" clId="{49C7B61D-1ACF-4AFF-A04E-A3B433E32474}" dt="2026-10-03T06:01:49.090" v="1" actId="478"/>
+          <ac:picMkLst>
+            <pc:docMk/>
+            <pc:sldMk cId="1751851059" sldId="260"/>
+            <ac:picMk id="16" creationId="{00000000-0000-0000-0000-000000000000}"/>
+          </ac:picMkLst>
+        </pc:picChg>
+      </pc:sldChg>
+      <pc:sldChg chg="delSp mod">
+        <pc:chgData name="Άριστος Αρέστη" userId="813aa191-2d4c-464f-9d05-0a7e494d859f" providerId="ADAL" clId="{49C7B61D-1ACF-4AFF-A04E-A3B433E32474}" dt="2026-10-03T06:46:25.149" v="13" actId="478"/>
+        <pc:sldMkLst>
+          <pc:docMk/>
+          <pc:sldMk cId="1154500895" sldId="261"/>
+        </pc:sldMkLst>
+        <pc:picChg chg="del">
+          <ac:chgData name="Άριστος Αρέστη" userId="813aa191-2d4c-464f-9d05-0a7e494d859f" providerId="ADAL" clId="{49C7B61D-1ACF-4AFF-A04E-A3B433E32474}" dt="2026-10-03T06:46:22.264" v="12" actId="478"/>
+          <ac:picMkLst>
+            <pc:docMk/>
+            <pc:sldMk cId="1154500895" sldId="261"/>
+            <ac:picMk id="13" creationId="{00000000-0000-0000-0000-000000000000}"/>
+          </ac:picMkLst>
+        </pc:picChg>
+        <pc:picChg chg="del">
+          <ac:chgData name="Άριστος Αρέστη" userId="813aa191-2d4c-464f-9d05-0a7e494d859f" providerId="ADAL" clId="{49C7B61D-1ACF-4AFF-A04E-A3B433E32474}" dt="2026-10-03T06:46:25.149" v="13" actId="478"/>
+          <ac:picMkLst>
+            <pc:docMk/>
+            <pc:sldMk cId="1154500895" sldId="261"/>
+            <ac:picMk id="14" creationId="{00000000-0000-0000-0000-000000000000}"/>
+          </ac:picMkLst>
+        </pc:picChg>
+      </pc:sldChg>
+    </pc:docChg>
+  </pc:docChgLst>
+</pc:chgInfo>
+</file>
+
 <file path=ppt/notesMasters/notesMaster1.xml><?xml version="1.0" encoding="utf-8"?>
-<p:notesMaster xmlns:p="http://schemas.openxmlformats.org/presentationml/2006/main">
+<p:notesMaster xmlns:a="http://schemas.openxmlformats.org/drawingml/2006/main" xmlns:r="http://schemas.openxmlformats.org/officeDocument/2006/relationships" xmlns:p="http://schemas.openxmlformats.org/presentationml/2006/main">
   <p:cSld>
     <p:bg>
       <p:bgRef idx="1001">
-        <a:schemeClr xmlns:a="http://schemas.openxmlformats.org/drawingml/2006/main" val="bg1"/>
+        <a:schemeClr val="bg1"/>
       </p:bgRef>
     </p:bg>
     <p:spTree>
@@ -35,380 +222,164 @@
         <p:nvPr/>
       </p:nvGrpSpPr>
       <p:grpSpPr>
-        <a:xfrm xmlns:a="http://schemas.openxmlformats.org/drawingml/2006/main"/>
+        <a:xfrm>
+          <a:off x="0" y="0"/>
+          <a:ext cx="0" cy="0"/>
+          <a:chOff x="0" y="0"/>
+          <a:chExt cx="0" cy="0"/>
+        </a:xfrm>
       </p:grpSpPr>
       <p:sp>
         <p:nvSpPr>
           <p:cNvPr id="2" name="Header Placeholder"/>
-          <p:cNvSpPr/>
+          <p:cNvSpPr>
+            <a:spLocks noGrp="1"/>
+          </p:cNvSpPr>
           <p:nvPr>
             <p:ph type="hdr" sz="quarter"/>
           </p:nvPr>
         </p:nvSpPr>
         <p:spPr>
-          <a:prstGeom xmlns:a="http://schemas.openxmlformats.org/drawingml/2006/main" prst="rect">
-            <a:avLst/>
-          </a:prstGeom>
-        </p:spPr>
-        <p:txBody>
-          <a:bodyPr xmlns:a="http://schemas.openxmlformats.org/drawingml/2006/main"/>
-          <a:lstStyle xmlns:a="http://schemas.openxmlformats.org/drawingml/2006/main"/>
-          <a:p xmlns:a="http://schemas.openxmlformats.org/drawingml/2006/main"/>
+          <a:prstGeom prst="rect">
+            <a:avLst/>
+          </a:prstGeom>
+        </p:spPr>
+        <p:txBody>
+          <a:bodyPr/>
+          <a:lstStyle/>
+          <a:p>
+            <a:endParaRPr/>
+          </a:p>
         </p:txBody>
       </p:sp>
       <p:sp>
         <p:nvSpPr>
           <p:cNvPr id="3" name="Date Placeholder"/>
-          <p:cNvSpPr/>
+          <p:cNvSpPr>
+            <a:spLocks noGrp="1"/>
+          </p:cNvSpPr>
           <p:nvPr>
             <p:ph type="dt" sz="quarter" idx="1"/>
           </p:nvPr>
         </p:nvSpPr>
         <p:spPr>
-          <a:prstGeom xmlns:a="http://schemas.openxmlformats.org/drawingml/2006/main" prst="rect">
-            <a:avLst/>
-          </a:prstGeom>
-        </p:spPr>
-        <p:txBody>
-          <a:bodyPr xmlns:a="http://schemas.openxmlformats.org/drawingml/2006/main"/>
-          <a:lstStyle xmlns:a="http://schemas.openxmlformats.org/drawingml/2006/main"/>
-          <a:p xmlns:a="http://schemas.openxmlformats.org/drawingml/2006/main"/>
+          <a:prstGeom prst="rect">
+            <a:avLst/>
+          </a:prstGeom>
+        </p:spPr>
+        <p:txBody>
+          <a:bodyPr/>
+          <a:lstStyle/>
+          <a:p>
+            <a:endParaRPr/>
+          </a:p>
         </p:txBody>
       </p:sp>
       <p:sp>
         <p:nvSpPr>
           <p:cNvPr id="4" name="Slide Image Placeholder"/>
-          <p:cNvSpPr/>
+          <p:cNvSpPr>
+            <a:spLocks noGrp="1" noRot="1" noChangeAspect="1"/>
+          </p:cNvSpPr>
           <p:nvPr>
             <p:ph type="sldImg" idx="2"/>
           </p:nvPr>
         </p:nvSpPr>
         <p:spPr>
-          <a:prstGeom xmlns:a="http://schemas.openxmlformats.org/drawingml/2006/main" prst="rect">
-            <a:avLst/>
-          </a:prstGeom>
-        </p:spPr>
-        <p:txBody>
-          <a:bodyPr xmlns:a="http://schemas.openxmlformats.org/drawingml/2006/main"/>
-          <a:lstStyle xmlns:a="http://schemas.openxmlformats.org/drawingml/2006/main"/>
-          <a:p xmlns:a="http://schemas.openxmlformats.org/drawingml/2006/main"/>
+          <a:prstGeom prst="rect">
+            <a:avLst/>
+          </a:prstGeom>
+        </p:spPr>
+        <p:txBody>
+          <a:bodyPr/>
+          <a:lstStyle/>
+          <a:p>
+            <a:endParaRPr/>
+          </a:p>
         </p:txBody>
       </p:sp>
       <p:sp>
         <p:nvSpPr>
           <p:cNvPr id="5" name="Notes Placeholder"/>
-          <p:cNvSpPr/>
+          <p:cNvSpPr>
+            <a:spLocks noGrp="1"/>
+          </p:cNvSpPr>
           <p:nvPr>
             <p:ph type="body" sz="quarter" idx="3"/>
           </p:nvPr>
         </p:nvSpPr>
         <p:spPr>
-          <a:prstGeom xmlns:a="http://schemas.openxmlformats.org/drawingml/2006/main" prst="rect">
-            <a:avLst/>
-          </a:prstGeom>
-        </p:spPr>
-        <p:txBody>
-          <a:bodyPr xmlns:a="http://schemas.openxmlformats.org/drawingml/2006/main"/>
-          <a:lstStyle xmlns:a="http://schemas.openxmlformats.org/drawingml/2006/main"/>
-          <a:p xmlns:a="http://schemas.openxmlformats.org/drawingml/2006/main"/>
+          <a:prstGeom prst="rect">
+            <a:avLst/>
+          </a:prstGeom>
+        </p:spPr>
+        <p:txBody>
+          <a:bodyPr/>
+          <a:lstStyle/>
+          <a:p>
+            <a:endParaRPr/>
+          </a:p>
         </p:txBody>
       </p:sp>
       <p:sp>
         <p:nvSpPr>
           <p:cNvPr id="6" name="Footer Placeholder"/>
-          <p:cNvSpPr/>
+          <p:cNvSpPr>
+            <a:spLocks noGrp="1"/>
+          </p:cNvSpPr>
           <p:nvPr>
             <p:ph type="ftr" sz="quarter" idx="4"/>
           </p:nvPr>
         </p:nvSpPr>
         <p:spPr>
-          <a:prstGeom xmlns:a="http://schemas.openxmlformats.org/drawingml/2006/main" prst="rect">
-            <a:avLst/>
-          </a:prstGeom>
-        </p:spPr>
-        <p:txBody>
-          <a:bodyPr xmlns:a="http://schemas.openxmlformats.org/drawingml/2006/main"/>
-          <a:lstStyle xmlns:a="http://schemas.openxmlformats.org/drawingml/2006/main"/>
-          <a:p xmlns:a="http://schemas.openxmlformats.org/drawingml/2006/main"/>
+          <a:prstGeom prst="rect">
+            <a:avLst/>
+          </a:prstGeom>
+        </p:spPr>
+        <p:txBody>
+          <a:bodyPr/>
+          <a:lstStyle/>
+          <a:p>
+            <a:endParaRPr/>
+          </a:p>
         </p:txBody>
       </p:sp>
       <p:sp>
         <p:nvSpPr>
           <p:cNvPr id="7" name="Slide Number Placeholder"/>
-          <p:cNvSpPr/>
+          <p:cNvSpPr>
+            <a:spLocks noGrp="1"/>
+          </p:cNvSpPr>
           <p:nvPr>
             <p:ph type="sldNum" sz="quarter" idx="5"/>
           </p:nvPr>
         </p:nvSpPr>
         <p:spPr>
-          <a:prstGeom xmlns:a="http://schemas.openxmlformats.org/drawingml/2006/main" prst="rect">
-            <a:avLst/>
-          </a:prstGeom>
-        </p:spPr>
-        <p:txBody>
-          <a:bodyPr xmlns:a="http://schemas.openxmlformats.org/drawingml/2006/main"/>
-          <a:lstStyle xmlns:a="http://schemas.openxmlformats.org/drawingml/2006/main"/>
-          <a:p xmlns:a="http://schemas.openxmlformats.org/drawingml/2006/main"/>
+          <a:prstGeom prst="rect">
+            <a:avLst/>
+          </a:prstGeom>
+        </p:spPr>
+        <p:txBody>
+          <a:bodyPr/>
+          <a:lstStyle/>
+          <a:p>
+            <a:endParaRPr/>
+          </a:p>
         </p:txBody>
       </p:sp>
     </p:spTree>
   </p:cSld>
   <p:clrMap bg1="lt1" tx1="dk1" bg2="lt2" tx2="dk2" accent1="accent1" accent2="accent2" accent3="accent3" accent4="accent4" accent5="accent5" accent6="accent6" hlink="hlink" folHlink="folHlink"/>
   <p:notesStyle>
-    <a:lvl1pPr xmlns:a="http://schemas.openxmlformats.org/drawingml/2006/main" marL="0" algn="l" defTabSz="914400" rtl="0" eaLnBrk="1" latinLnBrk="0" hangingPunct="1">
+    <a:lvl1pPr marL="0" algn="l" defTabSz="914400" rtl="0" eaLnBrk="1" latinLnBrk="0" hangingPunct="1">
       <a:defRPr sz="1200" kern="1200"/>
     </a:lvl1pPr>
   </p:notesStyle>
 </p:notesMaster>
 </file>
 
-<file path=ppt/notesMasters/theme/theme3.xml><?xml version="1.0" encoding="utf-8"?>
-<a:theme xmlns:a="http://schemas.openxmlformats.org/drawingml/2006/main" name="ChatGPT">
-  <a:themeElements>
-    <a:clrScheme name="ChatGPT">
-      <a:dk1>
-        <a:srgbClr val="000000"/>
-      </a:dk1>
-      <a:lt1>
-        <a:srgbClr val="FFFFFF"/>
-      </a:lt1>
-      <a:dk2>
-        <a:srgbClr val="0E2841"/>
-      </a:dk2>
-      <a:lt2>
-        <a:srgbClr val="E8E8E8"/>
-      </a:lt2>
-      <a:accent1>
-        <a:srgbClr val="156082"/>
-      </a:accent1>
-      <a:accent2>
-        <a:srgbClr val="E97132"/>
-      </a:accent2>
-      <a:accent3>
-        <a:srgbClr val="196B24"/>
-      </a:accent3>
-      <a:accent4>
-        <a:srgbClr val="0F9ED5"/>
-      </a:accent4>
-      <a:accent5>
-        <a:srgbClr val="A02B93"/>
-      </a:accent5>
-      <a:accent6>
-        <a:srgbClr val="4EA72E"/>
-      </a:accent6>
-      <a:hlink>
-        <a:srgbClr val="467886"/>
-      </a:hlink>
-      <a:folHlink>
-        <a:srgbClr val="96607D"/>
-      </a:folHlink>
-    </a:clrScheme>
-    <a:fontScheme name="Office">
-      <a:majorFont>
-        <a:latin typeface="Calibri Light"/>
-        <a:ea typeface="Calibri Light"/>
-        <a:cs typeface="Calibri Light"/>
-      </a:majorFont>
-      <a:minorFont>
-        <a:latin typeface="Calibri"/>
-        <a:ea typeface="Calibri"/>
-        <a:cs typeface="Calibri"/>
-      </a:minorFont>
-    </a:fontScheme>
-    <a:fmtScheme name="ChatGPT">
-      <a:fillStyleLst>
-        <a:solidFill>
-          <a:schemeClr val="phClr"/>
-        </a:solidFill>
-        <a:gradFill>
-          <a:gsLst>
-            <a:gs pos="0">
-              <a:schemeClr val="phClr">
-                <a:tint val="67000"/>
-                <a:lumMod val="110000"/>
-                <a:satMod val="105000"/>
-              </a:schemeClr>
-            </a:gs>
-            <a:gs pos="50000">
-              <a:schemeClr val="phClr">
-                <a:tint val="73000"/>
-                <a:lumMod val="105000"/>
-                <a:satMod val="103000"/>
-              </a:schemeClr>
-            </a:gs>
-            <a:gs pos="100000">
-              <a:schemeClr val="phClr">
-                <a:tint val="81000"/>
-                <a:lumMod val="105000"/>
-                <a:satMod val="109000"/>
-              </a:schemeClr>
-            </a:gs>
-          </a:gsLst>
-          <a:lin ang="5400000" scaled="0"/>
-        </a:gradFill>
-        <a:gradFill>
-          <a:gsLst>
-            <a:gs pos="0">
-              <a:schemeClr val="phClr">
-                <a:tint val="94000"/>
-                <a:lumMod val="102000"/>
-                <a:satMod val="103000"/>
-              </a:schemeClr>
-            </a:gs>
-            <a:gs pos="50000">
-              <a:schemeClr val="phClr">
-                <a:shade val="100000"/>
-                <a:lumMod val="100000"/>
-                <a:satMod val="110000"/>
-              </a:schemeClr>
-            </a:gs>
-            <a:gs pos="100000">
-              <a:schemeClr val="phClr">
-                <a:shade val="78000"/>
-                <a:lumMod val="99000"/>
-                <a:satMod val="120000"/>
-              </a:schemeClr>
-            </a:gs>
-          </a:gsLst>
-          <a:lin ang="5400000" scaled="0"/>
-        </a:gradFill>
-      </a:fillStyleLst>
-      <a:lnStyleLst>
-        <a:ln w="12700">
-          <a:solidFill>
-            <a:schemeClr val="phClr"/>
-          </a:solidFill>
-          <a:prstDash val="solid"/>
-        </a:ln>
-        <a:ln w="19050">
-          <a:solidFill>
-            <a:schemeClr val="phClr"/>
-          </a:solidFill>
-          <a:prstDash val="solid"/>
-        </a:ln>
-        <a:ln w="25400">
-          <a:solidFill>
-            <a:schemeClr val="phClr"/>
-          </a:solidFill>
-          <a:prstDash val="solid"/>
-        </a:ln>
-      </a:lnStyleLst>
-      <a:effectStyleLst>
-        <a:effectStyle>
-          <a:effectLst/>
-        </a:effectStyle>
-        <a:effectStyle>
-          <a:effectLst/>
-        </a:effectStyle>
-        <a:effectStyle>
-          <a:effectLst>
-            <a:outerShdw blurRad="57150" dist="19050" dir="5400000">
-              <a:srgbClr val="000000">
-                <a:alpha val="16000"/>
-              </a:srgbClr>
-            </a:outerShdw>
-          </a:effectLst>
-        </a:effectStyle>
-        <a:effectStyle>
-          <a:effectLst>
-            <a:outerShdw blurRad="19050" dist="9525" dir="5400000">
-              <a:srgbClr val="000000">
-                <a:alpha val="6000"/>
-              </a:srgbClr>
-            </a:outerShdw>
-          </a:effectLst>
-        </a:effectStyle>
-        <a:effectStyle>
-          <a:effectLst>
-            <a:outerShdw blurRad="28575" dist="9525" dir="5400000">
-              <a:srgbClr val="000000">
-                <a:alpha val="8000"/>
-              </a:srgbClr>
-            </a:outerShdw>
-          </a:effectLst>
-        </a:effectStyle>
-        <a:effectStyle>
-          <a:effectLst>
-            <a:outerShdw blurRad="57150" dist="19050" dir="5400000">
-              <a:srgbClr val="000000">
-                <a:alpha val="10000"/>
-              </a:srgbClr>
-            </a:outerShdw>
-          </a:effectLst>
-        </a:effectStyle>
-        <a:effectStyle>
-          <a:effectLst>
-            <a:outerShdw blurRad="114300" dist="38100" dir="5400000">
-              <a:srgbClr val="000000">
-                <a:alpha val="12000"/>
-              </a:srgbClr>
-            </a:outerShdw>
-          </a:effectLst>
-        </a:effectStyle>
-        <a:effectStyle>
-          <a:effectLst>
-            <a:outerShdw blurRad="171450" dist="57150" dir="5400000">
-              <a:srgbClr val="000000">
-                <a:alpha val="16000"/>
-              </a:srgbClr>
-            </a:outerShdw>
-          </a:effectLst>
-        </a:effectStyle>
-        <a:effectStyle>
-          <a:effectLst>
-            <a:outerShdw blurRad="266700" dist="95250" dir="5400000">
-              <a:srgbClr val="000000">
-                <a:alpha val="24000"/>
-              </a:srgbClr>
-            </a:outerShdw>
-          </a:effectLst>
-        </a:effectStyle>
-      </a:effectStyleLst>
-      <a:bgFillStyleLst>
-        <a:solidFill>
-          <a:schemeClr val="phClr"/>
-        </a:solidFill>
-        <a:solidFill>
-          <a:schemeClr val="phClr">
-            <a:tint val="95000"/>
-            <a:satMod val="170000"/>
-          </a:schemeClr>
-        </a:solidFill>
-        <a:gradFill>
-          <a:gsLst>
-            <a:gs pos="0">
-              <a:schemeClr val="phClr">
-                <a:tint val="93000"/>
-                <a:shade val="98000"/>
-                <a:lumMod val="102000"/>
-                <a:satMod val="150000"/>
-              </a:schemeClr>
-            </a:gs>
-            <a:gs pos="50000">
-              <a:schemeClr val="phClr">
-                <a:tint val="98000"/>
-                <a:shade val="90000"/>
-                <a:lumMod val="103000"/>
-                <a:satMod val="130000"/>
-              </a:schemeClr>
-            </a:gs>
-            <a:gs pos="100000">
-              <a:schemeClr val="phClr">
-                <a:shade val="63000"/>
-                <a:satMod val="120000"/>
-              </a:schemeClr>
-            </a:gs>
-          </a:gsLst>
-          <a:lin ang="5400000" scaled="0"/>
-        </a:gradFill>
-      </a:bgFillStyleLst>
-    </a:fmtScheme>
-  </a:themeElements>
-</a:theme>
-</file>
-
 <file path=ppt/notesSlides/notesSlide1.xml><?xml version="1.0" encoding="utf-8"?>
-<p:notes xmlns:p="http://schemas.openxmlformats.org/presentationml/2006/main">
+<p:notes xmlns:a="http://schemas.openxmlformats.org/drawingml/2006/main" xmlns:r="http://schemas.openxmlformats.org/officeDocument/2006/relationships" xmlns:p="http://schemas.openxmlformats.org/presentationml/2006/main">
   <p:cSld>
     <p:spTree>
       <p:nvGrpSpPr>
@@ -417,16 +388,21 @@
         <p:nvPr/>
       </p:nvGrpSpPr>
       <p:grpSpPr>
-        <a:xfrm xmlns:a="http://schemas.openxmlformats.org/drawingml/2006/main"/>
+        <a:xfrm>
+          <a:off x="0" y="0"/>
+          <a:ext cx="0" cy="0"/>
+          <a:chOff x="0" y="0"/>
+          <a:chExt cx="0" cy="0"/>
+        </a:xfrm>
       </p:grpSpPr>
       <p:sp>
         <p:nvSpPr>
           <p:cNvPr id="2" name="Slide Image Placeholder 1"/>
           <p:cNvSpPr>
-            <a:spLocks xmlns:a="http://schemas.openxmlformats.org/drawingml/2006/main" noGrp="1"/>
+            <a:spLocks noGrp="1" noRot="1" noChangeAspect="1"/>
           </p:cNvSpPr>
           <p:nvPr>
-            <p:ph type="sldImg" idx="0"/>
+            <p:ph type="sldImg"/>
           </p:nvPr>
         </p:nvSpPr>
         <p:spPr/>
@@ -435,7 +411,7 @@
         <p:nvSpPr>
           <p:cNvPr id="3" name="Notes Placeholder 2"/>
           <p:cNvSpPr>
-            <a:spLocks xmlns:a="http://schemas.openxmlformats.org/drawingml/2006/main" noGrp="1"/>
+            <a:spLocks noGrp="1"/>
           </p:cNvSpPr>
           <p:nvPr>
             <p:ph type="body" idx="1"/>
@@ -443,9 +419,9 @@
         </p:nvSpPr>
         <p:spPr/>
         <p:txBody>
-          <a:bodyPr xmlns:a="http://schemas.openxmlformats.org/drawingml/2006/main"/>
-          <a:lstStyle xmlns:a="http://schemas.openxmlformats.org/drawingml/2006/main"/>
-          <a:p xmlns:a="http://schemas.openxmlformats.org/drawingml/2006/main">
+          <a:bodyPr/>
+          <a:lstStyle/>
+          <a:p>
             <a:r>
               <a:t>Πηγή: Σημειώσεις και Τετράδιο Εργασιών Πληροφορικής Α΄ Γυμνασίου, ενότητα Α.5.1.Μ3.</a:t>
             </a:r>
@@ -456,7 +432,7 @@
         <p:nvSpPr>
           <p:cNvPr id="4" name="Slide Number Placeholder 3"/>
           <p:cNvSpPr>
-            <a:spLocks xmlns:a="http://schemas.openxmlformats.org/drawingml/2006/main" noGrp="1"/>
+            <a:spLocks noGrp="1"/>
           </p:cNvSpPr>
           <p:nvPr>
             <p:ph type="sldNum" idx="5"/>
@@ -464,21 +440,23 @@
         </p:nvSpPr>
         <p:spPr/>
         <p:txBody>
-          <a:bodyPr xmlns:a="http://schemas.openxmlformats.org/drawingml/2006/main"/>
-          <a:lstStyle xmlns:a="http://schemas.openxmlformats.org/drawingml/2006/main"/>
-          <a:p xmlns:a="http://schemas.openxmlformats.org/drawingml/2006/main"/>
+          <a:bodyPr/>
+          <a:lstStyle/>
+          <a:p>
+            <a:endParaRPr/>
+          </a:p>
         </p:txBody>
       </p:sp>
     </p:spTree>
   </p:cSld>
   <p:clrMapOvr>
-    <a:masterClrMapping xmlns:a="http://schemas.openxmlformats.org/drawingml/2006/main"/>
+    <a:masterClrMapping/>
   </p:clrMapOvr>
 </p:notes>
 </file>
 
 <file path=ppt/notesSlides/notesSlide2.xml><?xml version="1.0" encoding="utf-8"?>
-<p:notes xmlns:p="http://schemas.openxmlformats.org/presentationml/2006/main">
+<p:notes xmlns:a="http://schemas.openxmlformats.org/drawingml/2006/main" xmlns:r="http://schemas.openxmlformats.org/officeDocument/2006/relationships" xmlns:p="http://schemas.openxmlformats.org/presentationml/2006/main">
   <p:cSld>
     <p:spTree>
       <p:nvGrpSpPr>
@@ -487,16 +465,21 @@
         <p:nvPr/>
       </p:nvGrpSpPr>
       <p:grpSpPr>
-        <a:xfrm xmlns:a="http://schemas.openxmlformats.org/drawingml/2006/main"/>
+        <a:xfrm>
+          <a:off x="0" y="0"/>
+          <a:ext cx="0" cy="0"/>
+          <a:chOff x="0" y="0"/>
+          <a:chExt cx="0" cy="0"/>
+        </a:xfrm>
       </p:grpSpPr>
       <p:sp>
         <p:nvSpPr>
           <p:cNvPr id="2" name="Slide Image Placeholder 1"/>
           <p:cNvSpPr>
-            <a:spLocks xmlns:a="http://schemas.openxmlformats.org/drawingml/2006/main" noGrp="1"/>
+            <a:spLocks noGrp="1" noRot="1" noChangeAspect="1"/>
           </p:cNvSpPr>
           <p:nvPr>
-            <p:ph type="sldImg" idx="0"/>
+            <p:ph type="sldImg"/>
           </p:nvPr>
         </p:nvSpPr>
         <p:spPr/>
@@ -505,7 +488,7 @@
         <p:nvSpPr>
           <p:cNvPr id="3" name="Notes Placeholder 2"/>
           <p:cNvSpPr>
-            <a:spLocks xmlns:a="http://schemas.openxmlformats.org/drawingml/2006/main" noGrp="1"/>
+            <a:spLocks noGrp="1"/>
           </p:cNvSpPr>
           <p:nvPr>
             <p:ph type="body" idx="1"/>
@@ -513,9 +496,9 @@
         </p:nvSpPr>
         <p:spPr/>
         <p:txBody>
-          <a:bodyPr xmlns:a="http://schemas.openxmlformats.org/drawingml/2006/main"/>
-          <a:lstStyle xmlns:a="http://schemas.openxmlformats.org/drawingml/2006/main"/>
-          <a:p xmlns:a="http://schemas.openxmlformats.org/drawingml/2006/main">
+          <a:bodyPr/>
+          <a:lstStyle/>
+          <a:p>
             <a:r>
               <a:t>Πηγή: Σημειώσεις και Τετράδιο Εργασιών Πληροφορικής Α΄ Γυμνασίου, ενότητα Α.5.1.Μ3.</a:t>
             </a:r>
@@ -526,7 +509,7 @@
         <p:nvSpPr>
           <p:cNvPr id="4" name="Slide Number Placeholder 3"/>
           <p:cNvSpPr>
-            <a:spLocks xmlns:a="http://schemas.openxmlformats.org/drawingml/2006/main" noGrp="1"/>
+            <a:spLocks noGrp="1"/>
           </p:cNvSpPr>
           <p:nvPr>
             <p:ph type="sldNum" idx="5"/>
@@ -534,21 +517,23 @@
         </p:nvSpPr>
         <p:spPr/>
         <p:txBody>
-          <a:bodyPr xmlns:a="http://schemas.openxmlformats.org/drawingml/2006/main"/>
-          <a:lstStyle xmlns:a="http://schemas.openxmlformats.org/drawingml/2006/main"/>
-          <a:p xmlns:a="http://schemas.openxmlformats.org/drawingml/2006/main"/>
+          <a:bodyPr/>
+          <a:lstStyle/>
+          <a:p>
+            <a:endParaRPr/>
+          </a:p>
         </p:txBody>
       </p:sp>
     </p:spTree>
   </p:cSld>
   <p:clrMapOvr>
-    <a:masterClrMapping xmlns:a="http://schemas.openxmlformats.org/drawingml/2006/main"/>
+    <a:masterClrMapping/>
   </p:clrMapOvr>
 </p:notes>
 </file>
 
 <file path=ppt/notesSlides/notesSlide3.xml><?xml version="1.0" encoding="utf-8"?>
-<p:notes xmlns:p="http://schemas.openxmlformats.org/presentationml/2006/main">
+<p:notes xmlns:a="http://schemas.openxmlformats.org/drawingml/2006/main" xmlns:r="http://schemas.openxmlformats.org/officeDocument/2006/relationships" xmlns:p="http://schemas.openxmlformats.org/presentationml/2006/main">
   <p:cSld>
     <p:spTree>
       <p:nvGrpSpPr>
@@ -557,16 +542,21 @@
         <p:nvPr/>
       </p:nvGrpSpPr>
       <p:grpSpPr>
-        <a:xfrm xmlns:a="http://schemas.openxmlformats.org/drawingml/2006/main"/>
+        <a:xfrm>
+          <a:off x="0" y="0"/>
+          <a:ext cx="0" cy="0"/>
+          <a:chOff x="0" y="0"/>
+          <a:chExt cx="0" cy="0"/>
+        </a:xfrm>
       </p:grpSpPr>
       <p:sp>
         <p:nvSpPr>
           <p:cNvPr id="2" name="Slide Image Placeholder 1"/>
           <p:cNvSpPr>
-            <a:spLocks xmlns:a="http://schemas.openxmlformats.org/drawingml/2006/main" noGrp="1"/>
+            <a:spLocks noGrp="1" noRot="1" noChangeAspect="1"/>
           </p:cNvSpPr>
           <p:nvPr>
-            <p:ph type="sldImg" idx="0"/>
+            <p:ph type="sldImg"/>
           </p:nvPr>
         </p:nvSpPr>
         <p:spPr/>
@@ -575,7 +565,7 @@
         <p:nvSpPr>
           <p:cNvPr id="3" name="Notes Placeholder 2"/>
           <p:cNvSpPr>
-            <a:spLocks xmlns:a="http://schemas.openxmlformats.org/drawingml/2006/main" noGrp="1"/>
+            <a:spLocks noGrp="1"/>
           </p:cNvSpPr>
           <p:nvPr>
             <p:ph type="body" idx="1"/>
@@ -583,9 +573,9 @@
         </p:nvSpPr>
         <p:spPr/>
         <p:txBody>
-          <a:bodyPr xmlns:a="http://schemas.openxmlformats.org/drawingml/2006/main"/>
-          <a:lstStyle xmlns:a="http://schemas.openxmlformats.org/drawingml/2006/main"/>
-          <a:p xmlns:a="http://schemas.openxmlformats.org/drawingml/2006/main">
+          <a:bodyPr/>
+          <a:lstStyle/>
+          <a:p>
             <a:r>
               <a:t>Πηγή: Σημειώσεις και Τετράδιο Εργασιών Πληροφορικής Α΄ Γυμνασίου, ενότητα Α.5.1.Μ3.</a:t>
             </a:r>
@@ -596,7 +586,7 @@
         <p:nvSpPr>
           <p:cNvPr id="4" name="Slide Number Placeholder 3"/>
           <p:cNvSpPr>
-            <a:spLocks xmlns:a="http://schemas.openxmlformats.org/drawingml/2006/main" noGrp="1"/>
+            <a:spLocks noGrp="1"/>
           </p:cNvSpPr>
           <p:nvPr>
             <p:ph type="sldNum" idx="5"/>
@@ -604,21 +594,23 @@
         </p:nvSpPr>
         <p:spPr/>
         <p:txBody>
-          <a:bodyPr xmlns:a="http://schemas.openxmlformats.org/drawingml/2006/main"/>
-          <a:lstStyle xmlns:a="http://schemas.openxmlformats.org/drawingml/2006/main"/>
-          <a:p xmlns:a="http://schemas.openxmlformats.org/drawingml/2006/main"/>
+          <a:bodyPr/>
+          <a:lstStyle/>
+          <a:p>
+            <a:endParaRPr/>
+          </a:p>
         </p:txBody>
       </p:sp>
     </p:spTree>
   </p:cSld>
   <p:clrMapOvr>
-    <a:masterClrMapping xmlns:a="http://schemas.openxmlformats.org/drawingml/2006/main"/>
+    <a:masterClrMapping/>
   </p:clrMapOvr>
 </p:notes>
 </file>
 
 <file path=ppt/notesSlides/notesSlide4.xml><?xml version="1.0" encoding="utf-8"?>
-<p:notes xmlns:p="http://schemas.openxmlformats.org/presentationml/2006/main">
+<p:notes xmlns:a="http://schemas.openxmlformats.org/drawingml/2006/main" xmlns:r="http://schemas.openxmlformats.org/officeDocument/2006/relationships" xmlns:p="http://schemas.openxmlformats.org/presentationml/2006/main">
   <p:cSld>
     <p:spTree>
       <p:nvGrpSpPr>
@@ -627,16 +619,21 @@
         <p:nvPr/>
       </p:nvGrpSpPr>
       <p:grpSpPr>
-        <a:xfrm xmlns:a="http://schemas.openxmlformats.org/drawingml/2006/main"/>
+        <a:xfrm>
+          <a:off x="0" y="0"/>
+          <a:ext cx="0" cy="0"/>
+          <a:chOff x="0" y="0"/>
+          <a:chExt cx="0" cy="0"/>
+        </a:xfrm>
       </p:grpSpPr>
       <p:sp>
         <p:nvSpPr>
           <p:cNvPr id="2" name="Slide Image Placeholder 1"/>
           <p:cNvSpPr>
-            <a:spLocks xmlns:a="http://schemas.openxmlformats.org/drawingml/2006/main" noGrp="1"/>
+            <a:spLocks noGrp="1" noRot="1" noChangeAspect="1"/>
           </p:cNvSpPr>
           <p:nvPr>
-            <p:ph type="sldImg" idx="0"/>
+            <p:ph type="sldImg"/>
           </p:nvPr>
         </p:nvSpPr>
         <p:spPr/>
@@ -645,7 +642,7 @@
         <p:nvSpPr>
           <p:cNvPr id="3" name="Notes Placeholder 2"/>
           <p:cNvSpPr>
-            <a:spLocks xmlns:a="http://schemas.openxmlformats.org/drawingml/2006/main" noGrp="1"/>
+            <a:spLocks noGrp="1"/>
           </p:cNvSpPr>
           <p:nvPr>
             <p:ph type="body" idx="1"/>
@@ -653,9 +650,9 @@
         </p:nvSpPr>
         <p:spPr/>
         <p:txBody>
-          <a:bodyPr xmlns:a="http://schemas.openxmlformats.org/drawingml/2006/main"/>
-          <a:lstStyle xmlns:a="http://schemas.openxmlformats.org/drawingml/2006/main"/>
-          <a:p xmlns:a="http://schemas.openxmlformats.org/drawingml/2006/main">
+          <a:bodyPr/>
+          <a:lstStyle/>
+          <a:p>
             <a:r>
               <a:t>Πηγή: Σημειώσεις και Τετράδιο Εργασιών Πληροφορικής Α΄ Γυμνασίου, ενότητα Α.5.1.Μ3.</a:t>
             </a:r>
@@ -666,7 +663,7 @@
         <p:nvSpPr>
           <p:cNvPr id="4" name="Slide Number Placeholder 3"/>
           <p:cNvSpPr>
-            <a:spLocks xmlns:a="http://schemas.openxmlformats.org/drawingml/2006/main" noGrp="1"/>
+            <a:spLocks noGrp="1"/>
           </p:cNvSpPr>
           <p:nvPr>
             <p:ph type="sldNum" idx="5"/>
@@ -674,21 +671,23 @@
         </p:nvSpPr>
         <p:spPr/>
         <p:txBody>
-          <a:bodyPr xmlns:a="http://schemas.openxmlformats.org/drawingml/2006/main"/>
-          <a:lstStyle xmlns:a="http://schemas.openxmlformats.org/drawingml/2006/main"/>
-          <a:p xmlns:a="http://schemas.openxmlformats.org/drawingml/2006/main"/>
+          <a:bodyPr/>
+          <a:lstStyle/>
+          <a:p>
+            <a:endParaRPr/>
+          </a:p>
         </p:txBody>
       </p:sp>
     </p:spTree>
   </p:cSld>
   <p:clrMapOvr>
-    <a:masterClrMapping xmlns:a="http://schemas.openxmlformats.org/drawingml/2006/main"/>
+    <a:masterClrMapping/>
   </p:clrMapOvr>
 </p:notes>
 </file>
 
 <file path=ppt/notesSlides/notesSlide5.xml><?xml version="1.0" encoding="utf-8"?>
-<p:notes xmlns:p="http://schemas.openxmlformats.org/presentationml/2006/main">
+<p:notes xmlns:a="http://schemas.openxmlformats.org/drawingml/2006/main" xmlns:r="http://schemas.openxmlformats.org/officeDocument/2006/relationships" xmlns:p="http://schemas.openxmlformats.org/presentationml/2006/main">
   <p:cSld>
     <p:spTree>
       <p:nvGrpSpPr>
@@ -697,16 +696,21 @@
         <p:nvPr/>
       </p:nvGrpSpPr>
       <p:grpSpPr>
-        <a:xfrm xmlns:a="http://schemas.openxmlformats.org/drawingml/2006/main"/>
+        <a:xfrm>
+          <a:off x="0" y="0"/>
+          <a:ext cx="0" cy="0"/>
+          <a:chOff x="0" y="0"/>
+          <a:chExt cx="0" cy="0"/>
+        </a:xfrm>
       </p:grpSpPr>
       <p:sp>
         <p:nvSpPr>
           <p:cNvPr id="2" name="Slide Image Placeholder 1"/>
           <p:cNvSpPr>
-            <a:spLocks xmlns:a="http://schemas.openxmlformats.org/drawingml/2006/main" noGrp="1"/>
+            <a:spLocks noGrp="1" noRot="1" noChangeAspect="1"/>
           </p:cNvSpPr>
           <p:nvPr>
-            <p:ph type="sldImg" idx="0"/>
+            <p:ph type="sldImg"/>
           </p:nvPr>
         </p:nvSpPr>
         <p:spPr/>
@@ -715,7 +719,7 @@
         <p:nvSpPr>
           <p:cNvPr id="3" name="Notes Placeholder 2"/>
           <p:cNvSpPr>
-            <a:spLocks xmlns:a="http://schemas.openxmlformats.org/drawingml/2006/main" noGrp="1"/>
+            <a:spLocks noGrp="1"/>
           </p:cNvSpPr>
           <p:nvPr>
             <p:ph type="body" idx="1"/>
@@ -723,9 +727,9 @@
         </p:nvSpPr>
         <p:spPr/>
         <p:txBody>
-          <a:bodyPr xmlns:a="http://schemas.openxmlformats.org/drawingml/2006/main"/>
-          <a:lstStyle xmlns:a="http://schemas.openxmlformats.org/drawingml/2006/main"/>
-          <a:p xmlns:a="http://schemas.openxmlformats.org/drawingml/2006/main">
+          <a:bodyPr/>
+          <a:lstStyle/>
+          <a:p>
             <a:r>
               <a:t>Πηγή: Σημειώσεις και Τετράδιο Εργασιών Πληροφορικής Α΄ Γυμνασίου, ενότητα Α.5.1.Μ3.</a:t>
             </a:r>
@@ -736,7 +740,7 @@
         <p:nvSpPr>
           <p:cNvPr id="4" name="Slide Number Placeholder 3"/>
           <p:cNvSpPr>
-            <a:spLocks xmlns:a="http://schemas.openxmlformats.org/drawingml/2006/main" noGrp="1"/>
+            <a:spLocks noGrp="1"/>
           </p:cNvSpPr>
           <p:nvPr>
             <p:ph type="sldNum" idx="5"/>
@@ -744,21 +748,23 @@
         </p:nvSpPr>
         <p:spPr/>
         <p:txBody>
-          <a:bodyPr xmlns:a="http://schemas.openxmlformats.org/drawingml/2006/main"/>
-          <a:lstStyle xmlns:a="http://schemas.openxmlformats.org/drawingml/2006/main"/>
-          <a:p xmlns:a="http://schemas.openxmlformats.org/drawingml/2006/main"/>
+          <a:bodyPr/>
+          <a:lstStyle/>
+          <a:p>
+            <a:endParaRPr/>
+          </a:p>
         </p:txBody>
       </p:sp>
     </p:spTree>
   </p:cSld>
   <p:clrMapOvr>
-    <a:masterClrMapping xmlns:a="http://schemas.openxmlformats.org/drawingml/2006/main"/>
+    <a:masterClrMapping/>
   </p:clrMapOvr>
 </p:notes>
 </file>
 
 <file path=ppt/notesSlides/notesSlide6.xml><?xml version="1.0" encoding="utf-8"?>
-<p:notes xmlns:p="http://schemas.openxmlformats.org/presentationml/2006/main">
+<p:notes xmlns:a="http://schemas.openxmlformats.org/drawingml/2006/main" xmlns:r="http://schemas.openxmlformats.org/officeDocument/2006/relationships" xmlns:p="http://schemas.openxmlformats.org/presentationml/2006/main">
   <p:cSld>
     <p:spTree>
       <p:nvGrpSpPr>
@@ -767,16 +773,21 @@
         <p:nvPr/>
       </p:nvGrpSpPr>
       <p:grpSpPr>
-        <a:xfrm xmlns:a="http://schemas.openxmlformats.org/drawingml/2006/main"/>
+        <a:xfrm>
+          <a:off x="0" y="0"/>
+          <a:ext cx="0" cy="0"/>
+          <a:chOff x="0" y="0"/>
+          <a:chExt cx="0" cy="0"/>
+        </a:xfrm>
       </p:grpSpPr>
       <p:sp>
         <p:nvSpPr>
           <p:cNvPr id="2" name="Slide Image Placeholder 1"/>
           <p:cNvSpPr>
-            <a:spLocks xmlns:a="http://schemas.openxmlformats.org/drawingml/2006/main" noGrp="1"/>
+            <a:spLocks noGrp="1" noRot="1" noChangeAspect="1"/>
           </p:cNvSpPr>
           <p:nvPr>
-            <p:ph type="sldImg" idx="0"/>
+            <p:ph type="sldImg"/>
           </p:nvPr>
         </p:nvSpPr>
         <p:spPr/>
@@ -785,7 +796,7 @@
         <p:nvSpPr>
           <p:cNvPr id="3" name="Notes Placeholder 2"/>
           <p:cNvSpPr>
-            <a:spLocks xmlns:a="http://schemas.openxmlformats.org/drawingml/2006/main" noGrp="1"/>
+            <a:spLocks noGrp="1"/>
           </p:cNvSpPr>
           <p:nvPr>
             <p:ph type="body" idx="1"/>
@@ -793,9 +804,9 @@
         </p:nvSpPr>
         <p:spPr/>
         <p:txBody>
-          <a:bodyPr xmlns:a="http://schemas.openxmlformats.org/drawingml/2006/main"/>
-          <a:lstStyle xmlns:a="http://schemas.openxmlformats.org/drawingml/2006/main"/>
-          <a:p xmlns:a="http://schemas.openxmlformats.org/drawingml/2006/main">
+          <a:bodyPr/>
+          <a:lstStyle/>
+          <a:p>
             <a:r>
               <a:t>Πηγή: Σημειώσεις και Τετράδιο Εργασιών Πληροφορικής Α΄ Γυμνασίου, ενότητα Α.5.1.Μ3.</a:t>
             </a:r>
@@ -806,7 +817,7 @@
         <p:nvSpPr>
           <p:cNvPr id="4" name="Slide Number Placeholder 3"/>
           <p:cNvSpPr>
-            <a:spLocks xmlns:a="http://schemas.openxmlformats.org/drawingml/2006/main" noGrp="1"/>
+            <a:spLocks noGrp="1"/>
           </p:cNvSpPr>
           <p:nvPr>
             <p:ph type="sldNum" idx="5"/>
@@ -814,21 +825,23 @@
         </p:nvSpPr>
         <p:spPr/>
         <p:txBody>
-          <a:bodyPr xmlns:a="http://schemas.openxmlformats.org/drawingml/2006/main"/>
-          <a:lstStyle xmlns:a="http://schemas.openxmlformats.org/drawingml/2006/main"/>
-          <a:p xmlns:a="http://schemas.openxmlformats.org/drawingml/2006/main"/>
+          <a:bodyPr/>
+          <a:lstStyle/>
+          <a:p>
+            <a:endParaRPr/>
+          </a:p>
         </p:txBody>
       </p:sp>
     </p:spTree>
   </p:cSld>
   <p:clrMapOvr>
-    <a:masterClrMapping xmlns:a="http://schemas.openxmlformats.org/drawingml/2006/main"/>
+    <a:masterClrMapping/>
   </p:clrMapOvr>
 </p:notes>
 </file>
 
 <file path=ppt/slideLayouts/slideLayout1.xml><?xml version="1.0" encoding="utf-8"?>
-<p:sldLayout xmlns:p="http://schemas.openxmlformats.org/presentationml/2006/main" type="title">
+<p:sldLayout xmlns:a="http://schemas.openxmlformats.org/drawingml/2006/main" xmlns:r="http://schemas.openxmlformats.org/officeDocument/2006/relationships" xmlns:p="http://schemas.openxmlformats.org/presentationml/2006/main" type="title">
   <p:cSld name="Title Slide">
     <p:spTree>
       <p:nvGrpSpPr>
@@ -837,19 +850,27 @@
         <p:nvPr/>
       </p:nvGrpSpPr>
       <p:grpSpPr>
-        <a:xfrm xmlns:a="http://schemas.openxmlformats.org/drawingml/2006/main"/>
+        <a:xfrm>
+          <a:off x="0" y="0"/>
+          <a:ext cx="0" cy="0"/>
+          <a:chOff x="0" y="0"/>
+          <a:chExt cx="0" cy="0"/>
+        </a:xfrm>
       </p:grpSpPr>
     </p:spTree>
   </p:cSld>
+  <p:clrMapOvr>
+    <a:masterClrMapping/>
+  </p:clrMapOvr>
 </p:sldLayout>
 </file>
 
 <file path=ppt/slideMasters/slideMaster1.xml><?xml version="1.0" encoding="utf-8"?>
-<p:sldMaster xmlns:p="http://schemas.openxmlformats.org/presentationml/2006/main">
+<p:sldMaster xmlns:a="http://schemas.openxmlformats.org/drawingml/2006/main" xmlns:r="http://schemas.openxmlformats.org/officeDocument/2006/relationships" xmlns:p="http://schemas.openxmlformats.org/presentationml/2006/main">
   <p:cSld name="Master">
     <p:bg>
       <p:bgRef idx="1001">
-        <a:schemeClr xmlns:a="http://schemas.openxmlformats.org/drawingml/2006/main" val="bg1"/>
+        <a:schemeClr val="bg1"/>
       </p:bgRef>
     </p:bg>
     <p:spTree>
@@ -859,17 +880,22 @@
         <p:nvPr/>
       </p:nvGrpSpPr>
       <p:grpSpPr>
-        <a:xfrm xmlns:a="http://schemas.openxmlformats.org/drawingml/2006/main"/>
+        <a:xfrm>
+          <a:off x="0" y="0"/>
+          <a:ext cx="0" cy="0"/>
+          <a:chOff x="0" y="0"/>
+          <a:chExt cx="0" cy="0"/>
+        </a:xfrm>
       </p:grpSpPr>
     </p:spTree>
   </p:cSld>
   <p:clrMap bg1="lt1" tx1="dk1" bg2="lt2" tx2="dk2" accent1="accent1" accent2="accent2" accent3="accent3" accent4="accent4" accent5="accent5" accent6="accent6" hlink="hlink" folHlink="folHlink"/>
   <p:sldLayoutIdLst>
-    <p:sldLayoutId xmlns:r="http://schemas.openxmlformats.org/officeDocument/2006/relationships" id="2147483649" r:id="Rcb78e37ac62f4dc7"/>
+    <p:sldLayoutId id="2147483649" r:id="rId1"/>
   </p:sldLayoutIdLst>
   <p:txStyles>
     <p:titleStyle>
-      <a:lvl1pPr xmlns:a="http://schemas.openxmlformats.org/drawingml/2006/main" algn="l">
+      <a:lvl1pPr algn="l">
         <a:lnSpc>
           <a:spcPct val="90000"/>
         </a:lnSpc>
@@ -888,7 +914,7 @@
       </a:lvl1pPr>
     </p:titleStyle>
     <p:bodyStyle>
-      <a:lvl1pPr xmlns:a="http://schemas.openxmlformats.org/drawingml/2006/main" marL="228600" indent="-228600" algn="l">
+      <a:lvl1pPr marL="228600" indent="-228600" algn="l">
         <a:lnSpc>
           <a:spcPct val="90000"/>
         </a:lnSpc>
@@ -905,7 +931,7 @@
           <a:cs typeface="+mn-lt"/>
         </a:defRPr>
       </a:lvl1pPr>
-      <a:lvl2pPr xmlns:a="http://schemas.openxmlformats.org/drawingml/2006/main" marL="685800" indent="-228600" algn="l">
+      <a:lvl2pPr marL="685800" indent="-228600" algn="l">
         <a:lnSpc>
           <a:spcPct val="90000"/>
         </a:lnSpc>
@@ -922,7 +948,7 @@
           <a:cs typeface="+mn-lt"/>
         </a:defRPr>
       </a:lvl2pPr>
-      <a:lvl3pPr xmlns:a="http://schemas.openxmlformats.org/drawingml/2006/main" marL="1143000" indent="-228600" algn="l">
+      <a:lvl3pPr marL="1143000" indent="-228600" algn="l">
         <a:lnSpc>
           <a:spcPct val="90000"/>
         </a:lnSpc>
@@ -939,7 +965,7 @@
           <a:cs typeface="+mn-lt"/>
         </a:defRPr>
       </a:lvl3pPr>
-      <a:lvl4pPr xmlns:a="http://schemas.openxmlformats.org/drawingml/2006/main" marL="1600200" indent="-228600" algn="l">
+      <a:lvl4pPr marL="1600200" indent="-228600" algn="l">
         <a:lnSpc>
           <a:spcPct val="90000"/>
         </a:lnSpc>
@@ -956,7 +982,7 @@
           <a:cs typeface="+mn-lt"/>
         </a:defRPr>
       </a:lvl4pPr>
-      <a:lvl5pPr xmlns:a="http://schemas.openxmlformats.org/drawingml/2006/main" marL="2057400" indent="-228600" algn="l">
+      <a:lvl5pPr marL="2057400" indent="-228600" algn="l">
         <a:lnSpc>
           <a:spcPct val="90000"/>
         </a:lnSpc>
@@ -973,7 +999,7 @@
           <a:cs typeface="+mn-lt"/>
         </a:defRPr>
       </a:lvl5pPr>
-      <a:lvl6pPr xmlns:a="http://schemas.openxmlformats.org/drawingml/2006/main" marL="2514600" indent="-228600" algn="l">
+      <a:lvl6pPr marL="2514600" indent="-228600" algn="l">
         <a:lnSpc>
           <a:spcPct val="90000"/>
         </a:lnSpc>
@@ -990,7 +1016,7 @@
           <a:cs typeface="+mn-lt"/>
         </a:defRPr>
       </a:lvl6pPr>
-      <a:lvl7pPr xmlns:a="http://schemas.openxmlformats.org/drawingml/2006/main" marL="2971800" indent="-228600" algn="l">
+      <a:lvl7pPr marL="2971800" indent="-228600" algn="l">
         <a:lnSpc>
           <a:spcPct val="90000"/>
         </a:lnSpc>
@@ -1007,7 +1033,7 @@
           <a:cs typeface="+mn-lt"/>
         </a:defRPr>
       </a:lvl7pPr>
-      <a:lvl8pPr xmlns:a="http://schemas.openxmlformats.org/drawingml/2006/main" marL="3429000" indent="-228600" algn="l">
+      <a:lvl8pPr marL="3429000" indent="-228600" algn="l">
         <a:lnSpc>
           <a:spcPct val="90000"/>
         </a:lnSpc>
@@ -1024,7 +1050,7 @@
           <a:cs typeface="+mn-lt"/>
         </a:defRPr>
       </a:lvl8pPr>
-      <a:lvl9pPr xmlns:a="http://schemas.openxmlformats.org/drawingml/2006/main" marL="3886200" indent="-228600" algn="l">
+      <a:lvl9pPr marL="3886200" indent="-228600" algn="l">
         <a:lnSpc>
           <a:spcPct val="90000"/>
         </a:lnSpc>
@@ -1043,7 +1069,7 @@
       </a:lvl9pPr>
     </p:bodyStyle>
     <p:otherStyle>
-      <a:lvl1pPr xmlns:a="http://schemas.openxmlformats.org/drawingml/2006/main" marL="0" algn="l">
+      <a:lvl1pPr marL="0" algn="l">
         <a:buNone/>
         <a:defRPr sz="1800">
           <a:solidFill>
@@ -1054,7 +1080,7 @@
           <a:cs typeface="+mn-lt"/>
         </a:defRPr>
       </a:lvl1pPr>
-      <a:lvl2pPr xmlns:a="http://schemas.openxmlformats.org/drawingml/2006/main" marL="457200" algn="l">
+      <a:lvl2pPr marL="457200" algn="l">
         <a:buNone/>
         <a:defRPr sz="1800">
           <a:solidFill>
@@ -1065,7 +1091,7 @@
           <a:cs typeface="+mn-lt"/>
         </a:defRPr>
       </a:lvl2pPr>
-      <a:lvl3pPr xmlns:a="http://schemas.openxmlformats.org/drawingml/2006/main" marL="914400" algn="l">
+      <a:lvl3pPr marL="914400" algn="l">
         <a:buNone/>
         <a:defRPr sz="1800">
           <a:solidFill>
@@ -1076,7 +1102,7 @@
           <a:cs typeface="+mn-lt"/>
         </a:defRPr>
       </a:lvl3pPr>
-      <a:lvl4pPr xmlns:a="http://schemas.openxmlformats.org/drawingml/2006/main" marL="1371600" algn="l">
+      <a:lvl4pPr marL="1371600" algn="l">
         <a:buNone/>
         <a:defRPr sz="1800">
           <a:solidFill>
@@ -1087,7 +1113,7 @@
           <a:cs typeface="+mn-lt"/>
         </a:defRPr>
       </a:lvl4pPr>
-      <a:lvl5pPr xmlns:a="http://schemas.openxmlformats.org/drawingml/2006/main" marL="1828800" algn="l">
+      <a:lvl5pPr marL="1828800" algn="l">
         <a:buNone/>
         <a:defRPr sz="1800">
           <a:solidFill>
@@ -1098,7 +1124,7 @@
           <a:cs typeface="+mn-lt"/>
         </a:defRPr>
       </a:lvl5pPr>
-      <a:lvl6pPr xmlns:a="http://schemas.openxmlformats.org/drawingml/2006/main" marL="2286000" algn="l">
+      <a:lvl6pPr marL="2286000" algn="l">
         <a:buNone/>
         <a:defRPr sz="1800">
           <a:solidFill>
@@ -1109,7 +1135,7 @@
           <a:cs typeface="+mn-lt"/>
         </a:defRPr>
       </a:lvl6pPr>
-      <a:lvl7pPr xmlns:a="http://schemas.openxmlformats.org/drawingml/2006/main" marL="2743200" algn="l">
+      <a:lvl7pPr marL="2743200" algn="l">
         <a:buNone/>
         <a:defRPr sz="1800">
           <a:solidFill>
@@ -1120,7 +1146,7 @@
           <a:cs typeface="+mn-lt"/>
         </a:defRPr>
       </a:lvl7pPr>
-      <a:lvl8pPr xmlns:a="http://schemas.openxmlformats.org/drawingml/2006/main" marL="3200400" algn="l">
+      <a:lvl8pPr marL="3200400" algn="l">
         <a:buNone/>
         <a:defRPr sz="1800">
           <a:solidFill>
@@ -1131,7 +1157,7 @@
           <a:cs typeface="+mn-lt"/>
         </a:defRPr>
       </a:lvl8pPr>
-      <a:lvl9pPr xmlns:a="http://schemas.openxmlformats.org/drawingml/2006/main" marL="3657600" algn="l">
+      <a:lvl9pPr marL="3657600" algn="l">
         <a:buNone/>
         <a:defRPr sz="1800">
           <a:solidFill>
@@ -1147,259 +1173,15 @@
 </p:sldMaster>
 </file>
 
-<file path=ppt/slideMasters/theme/theme2.xml><?xml version="1.0" encoding="utf-8"?>
-<a:theme xmlns:a="http://schemas.openxmlformats.org/drawingml/2006/main" name="ChatGPT">
-  <a:themeElements>
-    <a:clrScheme name="ChatGPT">
-      <a:dk1>
-        <a:srgbClr val="000000"/>
-      </a:dk1>
-      <a:lt1>
-        <a:srgbClr val="FFFFFF"/>
-      </a:lt1>
-      <a:dk2>
-        <a:srgbClr val="0E2841"/>
-      </a:dk2>
-      <a:lt2>
-        <a:srgbClr val="E8E8E8"/>
-      </a:lt2>
-      <a:accent1>
-        <a:srgbClr val="156082"/>
-      </a:accent1>
-      <a:accent2>
-        <a:srgbClr val="E97132"/>
-      </a:accent2>
-      <a:accent3>
-        <a:srgbClr val="196B24"/>
-      </a:accent3>
-      <a:accent4>
-        <a:srgbClr val="0F9ED5"/>
-      </a:accent4>
-      <a:accent5>
-        <a:srgbClr val="A02B93"/>
-      </a:accent5>
-      <a:accent6>
-        <a:srgbClr val="4EA72E"/>
-      </a:accent6>
-      <a:hlink>
-        <a:srgbClr val="467886"/>
-      </a:hlink>
-      <a:folHlink>
-        <a:srgbClr val="96607D"/>
-      </a:folHlink>
-    </a:clrScheme>
-    <a:fontScheme name="Office">
-      <a:majorFont>
-        <a:latin typeface="Calibri Light"/>
-        <a:ea typeface="Calibri Light"/>
-        <a:cs typeface="Calibri Light"/>
-      </a:majorFont>
-      <a:minorFont>
-        <a:latin typeface="Calibri"/>
-        <a:ea typeface="Calibri"/>
-        <a:cs typeface="Calibri"/>
-      </a:minorFont>
-    </a:fontScheme>
-    <a:fmtScheme name="ChatGPT">
-      <a:fillStyleLst>
-        <a:solidFill>
-          <a:schemeClr val="phClr"/>
-        </a:solidFill>
-        <a:gradFill>
-          <a:gsLst>
-            <a:gs pos="0">
-              <a:schemeClr val="phClr">
-                <a:tint val="67000"/>
-                <a:lumMod val="110000"/>
-                <a:satMod val="105000"/>
-              </a:schemeClr>
-            </a:gs>
-            <a:gs pos="50000">
-              <a:schemeClr val="phClr">
-                <a:tint val="73000"/>
-                <a:lumMod val="105000"/>
-                <a:satMod val="103000"/>
-              </a:schemeClr>
-            </a:gs>
-            <a:gs pos="100000">
-              <a:schemeClr val="phClr">
-                <a:tint val="81000"/>
-                <a:lumMod val="105000"/>
-                <a:satMod val="109000"/>
-              </a:schemeClr>
-            </a:gs>
-          </a:gsLst>
-          <a:lin ang="5400000" scaled="0"/>
-        </a:gradFill>
-        <a:gradFill>
-          <a:gsLst>
-            <a:gs pos="0">
-              <a:schemeClr val="phClr">
-                <a:tint val="94000"/>
-                <a:lumMod val="102000"/>
-                <a:satMod val="103000"/>
-              </a:schemeClr>
-            </a:gs>
-            <a:gs pos="50000">
-              <a:schemeClr val="phClr">
-                <a:shade val="100000"/>
-                <a:lumMod val="100000"/>
-                <a:satMod val="110000"/>
-              </a:schemeClr>
-            </a:gs>
-            <a:gs pos="100000">
-              <a:schemeClr val="phClr">
-                <a:shade val="78000"/>
-                <a:lumMod val="99000"/>
-                <a:satMod val="120000"/>
-              </a:schemeClr>
-            </a:gs>
-          </a:gsLst>
-          <a:lin ang="5400000" scaled="0"/>
-        </a:gradFill>
-      </a:fillStyleLst>
-      <a:lnStyleLst>
-        <a:ln w="12700">
-          <a:solidFill>
-            <a:schemeClr val="phClr"/>
-          </a:solidFill>
-          <a:prstDash val="solid"/>
-        </a:ln>
-        <a:ln w="19050">
-          <a:solidFill>
-            <a:schemeClr val="phClr"/>
-          </a:solidFill>
-          <a:prstDash val="solid"/>
-        </a:ln>
-        <a:ln w="25400">
-          <a:solidFill>
-            <a:schemeClr val="phClr"/>
-          </a:solidFill>
-          <a:prstDash val="solid"/>
-        </a:ln>
-      </a:lnStyleLst>
-      <a:effectStyleLst>
-        <a:effectStyle>
-          <a:effectLst/>
-        </a:effectStyle>
-        <a:effectStyle>
-          <a:effectLst/>
-        </a:effectStyle>
-        <a:effectStyle>
-          <a:effectLst>
-            <a:outerShdw blurRad="57150" dist="19050" dir="5400000">
-              <a:srgbClr val="000000">
-                <a:alpha val="16000"/>
-              </a:srgbClr>
-            </a:outerShdw>
-          </a:effectLst>
-        </a:effectStyle>
-        <a:effectStyle>
-          <a:effectLst>
-            <a:outerShdw blurRad="19050" dist="9525" dir="5400000">
-              <a:srgbClr val="000000">
-                <a:alpha val="6000"/>
-              </a:srgbClr>
-            </a:outerShdw>
-          </a:effectLst>
-        </a:effectStyle>
-        <a:effectStyle>
-          <a:effectLst>
-            <a:outerShdw blurRad="28575" dist="9525" dir="5400000">
-              <a:srgbClr val="000000">
-                <a:alpha val="8000"/>
-              </a:srgbClr>
-            </a:outerShdw>
-          </a:effectLst>
-        </a:effectStyle>
-        <a:effectStyle>
-          <a:effectLst>
-            <a:outerShdw blurRad="57150" dist="19050" dir="5400000">
-              <a:srgbClr val="000000">
-                <a:alpha val="10000"/>
-              </a:srgbClr>
-            </a:outerShdw>
-          </a:effectLst>
-        </a:effectStyle>
-        <a:effectStyle>
-          <a:effectLst>
-            <a:outerShdw blurRad="114300" dist="38100" dir="5400000">
-              <a:srgbClr val="000000">
-                <a:alpha val="12000"/>
-              </a:srgbClr>
-            </a:outerShdw>
-          </a:effectLst>
-        </a:effectStyle>
-        <a:effectStyle>
-          <a:effectLst>
-            <a:outerShdw blurRad="171450" dist="57150" dir="5400000">
-              <a:srgbClr val="000000">
-                <a:alpha val="16000"/>
-              </a:srgbClr>
-            </a:outerShdw>
-          </a:effectLst>
-        </a:effectStyle>
-        <a:effectStyle>
-          <a:effectLst>
-            <a:outerShdw blurRad="266700" dist="95250" dir="5400000">
-              <a:srgbClr val="000000">
-                <a:alpha val="24000"/>
-              </a:srgbClr>
-            </a:outerShdw>
-          </a:effectLst>
-        </a:effectStyle>
-      </a:effectStyleLst>
-      <a:bgFillStyleLst>
-        <a:solidFill>
-          <a:schemeClr val="phClr"/>
-        </a:solidFill>
-        <a:solidFill>
-          <a:schemeClr val="phClr">
-            <a:tint val="95000"/>
-            <a:satMod val="170000"/>
-          </a:schemeClr>
-        </a:solidFill>
-        <a:gradFill>
-          <a:gsLst>
-            <a:gs pos="0">
-              <a:schemeClr val="phClr">
-                <a:tint val="93000"/>
-                <a:shade val="98000"/>
-                <a:lumMod val="102000"/>
-                <a:satMod val="150000"/>
-              </a:schemeClr>
-            </a:gs>
-            <a:gs pos="50000">
-              <a:schemeClr val="phClr">
-                <a:tint val="98000"/>
-                <a:shade val="90000"/>
-                <a:lumMod val="103000"/>
-                <a:satMod val="130000"/>
-              </a:schemeClr>
-            </a:gs>
-            <a:gs pos="100000">
-              <a:schemeClr val="phClr">
-                <a:shade val="63000"/>
-                <a:satMod val="120000"/>
-              </a:schemeClr>
-            </a:gs>
-          </a:gsLst>
-          <a:lin ang="5400000" scaled="0"/>
-        </a:gradFill>
-      </a:bgFillStyleLst>
-    </a:fmtScheme>
-  </a:themeElements>
-</a:theme>
-</file>
-
 <file path=ppt/slides/slide1.xml><?xml version="1.0" encoding="utf-8"?>
-<p:sld xmlns:p="http://schemas.openxmlformats.org/presentationml/2006/main">
+<p:sld xmlns:a="http://schemas.openxmlformats.org/drawingml/2006/main" xmlns:r="http://schemas.openxmlformats.org/officeDocument/2006/relationships" xmlns:p="http://schemas.openxmlformats.org/presentationml/2006/main">
   <p:cSld>
     <p:bg>
       <p:bgPr>
-        <a:solidFill xmlns:a="http://schemas.openxmlformats.org/drawingml/2006/main">
+        <a:solidFill>
           <a:srgbClr val="000000"/>
         </a:solidFill>
+        <a:effectLst/>
       </p:bgPr>
     </p:bg>
     <p:spTree>
@@ -1409,71 +1191,83 @@
         <p:nvPr/>
       </p:nvGrpSpPr>
       <p:grpSpPr>
-        <a:xfrm xmlns:a="http://schemas.openxmlformats.org/drawingml/2006/main"/>
+        <a:xfrm>
+          <a:off x="0" y="0"/>
+          <a:ext cx="0" cy="0"/>
+          <a:chOff x="0" y="0"/>
+          <a:chExt cx="0" cy="0"/>
+        </a:xfrm>
       </p:grpSpPr>
       <p:sp>
         <p:nvSpPr>
-          <p:cNvPr id="4" name="">
-            <a:extLst xmlns:a="http://schemas.openxmlformats.org/drawingml/2006/main">
+          <p:cNvPr id="4" name="Rectangle 3">
+            <a:extLst>
               <a:ext uri="{FF2B5EF4-FFF2-40B4-BE49-F238E27FC236}">
                 <a16:creationId xmlns:a16="http://schemas.microsoft.com/office/drawing/2014/main" id="{8B6CA9F5-FFA1-49C0-A3F5-8B2075E3DE20}"/>
               </a:ext>
             </a:extLst>
           </p:cNvPr>
           <p:cNvSpPr>
-            <a:spLocks xmlns:a="http://schemas.openxmlformats.org/drawingml/2006/main" noGrp="1"/>
-          </p:cNvSpPr>
-          <p:nvPr/>
-        </p:nvSpPr>
-        <p:spPr>
-          <a:xfrm xmlns:a="http://schemas.openxmlformats.org/drawingml/2006/main">
+            <a:spLocks noGrp="1"/>
+          </p:cNvSpPr>
+          <p:nvPr/>
+        </p:nvSpPr>
+        <p:spPr>
+          <a:xfrm>
             <a:off x="533400" y="704850"/>
             <a:ext cx="552450" cy="76200"/>
           </a:xfrm>
-          <a:prstGeom xmlns:a="http://schemas.openxmlformats.org/drawingml/2006/main" prst="rect">
-            <a:avLst/>
-          </a:prstGeom>
-          <a:solidFill xmlns:a="http://schemas.openxmlformats.org/drawingml/2006/main">
+          <a:prstGeom prst="rect">
+            <a:avLst/>
+          </a:prstGeom>
+          <a:solidFill>
             <a:srgbClr val="F57C24"/>
           </a:solidFill>
-          <a:ln xmlns:a="http://schemas.openxmlformats.org/drawingml/2006/main" w="0">
+          <a:ln w="0">
             <a:noFill/>
           </a:ln>
         </p:spPr>
-      </p:sp>
-      <p:sp>
-        <p:nvSpPr>
-          <p:cNvPr id="2" name="">
-            <a:extLst xmlns:a="http://schemas.openxmlformats.org/drawingml/2006/main">
+        <p:txBody>
+          <a:bodyPr/>
+          <a:lstStyle/>
+          <a:p>
+            <a:endParaRPr lang="en-GB"/>
+          </a:p>
+        </p:txBody>
+      </p:sp>
+      <p:sp>
+        <p:nvSpPr>
+          <p:cNvPr id="2" name="Rectangle 1">
+            <a:extLst>
               <a:ext uri="{FF2B5EF4-FFF2-40B4-BE49-F238E27FC236}">
                 <a16:creationId xmlns:a16="http://schemas.microsoft.com/office/drawing/2014/main" id="{0F3E0093-4AB1-4D41-964A-2BEB40B95D60}"/>
               </a:ext>
             </a:extLst>
           </p:cNvPr>
           <p:cNvSpPr>
-            <a:spLocks xmlns:a="http://schemas.openxmlformats.org/drawingml/2006/main" noGrp="1"/>
-          </p:cNvSpPr>
-          <p:nvPr/>
-        </p:nvSpPr>
-        <p:spPr>
-          <a:xfrm xmlns:a="http://schemas.openxmlformats.org/drawingml/2006/main">
+            <a:spLocks noGrp="1"/>
+          </p:cNvSpPr>
+          <p:nvPr/>
+        </p:nvSpPr>
+        <p:spPr>
+          <a:xfrm>
             <a:off x="590550" y="1028700"/>
             <a:ext cx="3905250" cy="4095750"/>
           </a:xfrm>
-          <a:prstGeom xmlns:a="http://schemas.openxmlformats.org/drawingml/2006/main" prst="rect">
-            <a:avLst/>
-          </a:prstGeom>
-          <a:noFill xmlns:a="http://schemas.openxmlformats.org/drawingml/2006/main"/>
-          <a:ln xmlns:a="http://schemas.openxmlformats.org/drawingml/2006/main" w="0">
+          <a:prstGeom prst="rect">
+            <a:avLst/>
+          </a:prstGeom>
+          <a:noFill/>
+          <a:ln w="0">
             <a:noFill/>
           </a:ln>
         </p:spPr>
         <p:txBody>
-          <a:bodyPr xmlns:a="http://schemas.openxmlformats.org/drawingml/2006/main" lIns="38100" tIns="19050" rIns="38100" bIns="19050" anchor="t">
-            <a:normAutofit fontScale="100000"/>
+          <a:bodyPr lIns="38100" tIns="19050" rIns="38100" bIns="19050" anchor="t">
+            <a:normAutofit/>
           </a:bodyPr>
-          <a:lstStyle xmlns:a="http://schemas.openxmlformats.org/drawingml/2006/main"/>
-          <a:p xmlns:a="http://schemas.openxmlformats.org/drawingml/2006/main">
+          <a:lstStyle/>
+          <a:p>
             <a:pPr algn="l">
               <a:defRPr sz="2850" b="0">
                 <a:solidFill>
@@ -1496,7 +1290,7 @@
               <a:t>Α5.1 Μ3</a:t>
             </a:r>
           </a:p>
-          <a:p xmlns:a="http://schemas.openxmlformats.org/drawingml/2006/main">
+          <a:p>
             <a:pPr algn="l">
               <a:defRPr sz="2850" b="0">
                 <a:solidFill>
@@ -1519,7 +1313,7 @@
               <a:t>Εντοπισμός</a:t>
             </a:r>
           </a:p>
-          <a:p xmlns:a="http://schemas.openxmlformats.org/drawingml/2006/main">
+          <a:p>
             <a:pPr algn="l">
               <a:defRPr sz="2850" b="0">
                 <a:solidFill>
@@ -1542,7 +1336,7 @@
               <a:t>Πληροφοριών από</a:t>
             </a:r>
           </a:p>
-          <a:p xmlns:a="http://schemas.openxmlformats.org/drawingml/2006/main">
+          <a:p>
             <a:pPr algn="l">
               <a:defRPr sz="2850" b="0">
                 <a:solidFill>
@@ -1569,25 +1363,25 @@
       </p:sp>
       <p:pic>
         <p:nvPicPr>
-          <p:cNvPr id="6" name=""/>
+          <p:cNvPr id="6" name="Picture 5"/>
           <p:cNvPicPr>
-            <a:picLocks xmlns:a="http://schemas.openxmlformats.org/drawingml/2006/main" noChangeAspect="1"/>
+            <a:picLocks noChangeAspect="1"/>
           </p:cNvPicPr>
           <p:nvPr/>
         </p:nvPicPr>
         <p:blipFill>
-          <a:blip xmlns:r="http://schemas.openxmlformats.org/officeDocument/2006/relationships" xmlns:a="http://schemas.openxmlformats.org/drawingml/2006/main" r:embed="R438af3118d014143"/>
-          <a:srcRect xmlns:a="http://schemas.openxmlformats.org/drawingml/2006/main" l="16667" t="0" r="16667" b="0"/>
-          <a:stretch xmlns:a="http://schemas.openxmlformats.org/drawingml/2006/main">
-            <a:fillRect l="0" t="0" r="0" b="0"/>
+          <a:blip r:embed="rId3"/>
+          <a:srcRect l="16667" r="16667"/>
+          <a:stretch>
+            <a:fillRect/>
           </a:stretch>
         </p:blipFill>
         <p:spPr>
-          <a:xfrm xmlns:a="http://schemas.openxmlformats.org/drawingml/2006/main">
+          <a:xfrm>
             <a:off x="4762500" y="0"/>
             <a:ext cx="7429500" cy="6858000"/>
           </a:xfrm>
-          <a:prstGeom xmlns:a="http://schemas.openxmlformats.org/drawingml/2006/main" prst="rect">
+          <a:prstGeom prst="rect">
             <a:avLst/>
           </a:prstGeom>
         </p:spPr>
@@ -1599,17 +1393,21 @@
       </p:ext>
     </p:extLst>
   </p:cSld>
+  <p:clrMapOvr>
+    <a:masterClrMapping/>
+  </p:clrMapOvr>
 </p:sld>
 </file>
 
 <file path=ppt/slides/slide2.xml><?xml version="1.0" encoding="utf-8"?>
-<p:sld xmlns:p="http://schemas.openxmlformats.org/presentationml/2006/main">
+<p:sld xmlns:a="http://schemas.openxmlformats.org/drawingml/2006/main" xmlns:r="http://schemas.openxmlformats.org/officeDocument/2006/relationships" xmlns:p="http://schemas.openxmlformats.org/presentationml/2006/main">
   <p:cSld>
     <p:bg>
       <p:bgPr>
-        <a:solidFill xmlns:a="http://schemas.openxmlformats.org/drawingml/2006/main">
+        <a:solidFill>
           <a:srgbClr val="FFFFFF"/>
         </a:solidFill>
+        <a:effectLst/>
       </p:bgPr>
     </p:bg>
     <p:spTree>
@@ -1619,41 +1417,46 @@
         <p:nvPr/>
       </p:nvGrpSpPr>
       <p:grpSpPr>
-        <a:xfrm xmlns:a="http://schemas.openxmlformats.org/drawingml/2006/main"/>
+        <a:xfrm>
+          <a:off x="0" y="0"/>
+          <a:ext cx="0" cy="0"/>
+          <a:chOff x="0" y="0"/>
+          <a:chExt cx="0" cy="0"/>
+        </a:xfrm>
       </p:grpSpPr>
       <p:sp>
         <p:nvSpPr>
-          <p:cNvPr id="18" name="">
-            <a:extLst xmlns:a="http://schemas.openxmlformats.org/drawingml/2006/main">
+          <p:cNvPr id="18" name="Rectangle 17">
+            <a:extLst>
               <a:ext uri="{FF2B5EF4-FFF2-40B4-BE49-F238E27FC236}">
                 <a16:creationId xmlns:a16="http://schemas.microsoft.com/office/drawing/2014/main" id="{255C53AA-6C36-4BC4-B2D4-0A15931975B0}"/>
               </a:ext>
             </a:extLst>
           </p:cNvPr>
           <p:cNvSpPr>
-            <a:spLocks xmlns:a="http://schemas.openxmlformats.org/drawingml/2006/main" noGrp="1"/>
-          </p:cNvSpPr>
-          <p:nvPr/>
-        </p:nvSpPr>
-        <p:spPr>
-          <a:xfrm xmlns:a="http://schemas.openxmlformats.org/drawingml/2006/main">
+            <a:spLocks noGrp="1"/>
+          </p:cNvSpPr>
+          <p:nvPr/>
+        </p:nvSpPr>
+        <p:spPr>
+          <a:xfrm>
             <a:off x="552450" y="333375"/>
             <a:ext cx="11087100" cy="704850"/>
           </a:xfrm>
-          <a:prstGeom xmlns:a="http://schemas.openxmlformats.org/drawingml/2006/main" prst="rect">
-            <a:avLst/>
-          </a:prstGeom>
-          <a:noFill xmlns:a="http://schemas.openxmlformats.org/drawingml/2006/main"/>
-          <a:ln xmlns:a="http://schemas.openxmlformats.org/drawingml/2006/main" w="0">
+          <a:prstGeom prst="rect">
+            <a:avLst/>
+          </a:prstGeom>
+          <a:noFill/>
+          <a:ln w="0">
             <a:noFill/>
           </a:ln>
         </p:spPr>
         <p:txBody>
-          <a:bodyPr xmlns:a="http://schemas.openxmlformats.org/drawingml/2006/main" lIns="38100" tIns="19050" rIns="38100" bIns="19050" anchor="t">
-            <a:normAutofit fontScale="100000"/>
+          <a:bodyPr lIns="38100" tIns="19050" rIns="38100" bIns="19050" anchor="t">
+            <a:normAutofit/>
           </a:bodyPr>
-          <a:lstStyle xmlns:a="http://schemas.openxmlformats.org/drawingml/2006/main"/>
-          <a:p xmlns:a="http://schemas.openxmlformats.org/drawingml/2006/main">
+          <a:lstStyle/>
+          <a:p>
             <a:pPr algn="l">
               <a:defRPr sz="2550" b="0">
                 <a:solidFill>
@@ -1680,37 +1483,37 @@
       </p:sp>
       <p:sp>
         <p:nvSpPr>
-          <p:cNvPr id="2" name="">
-            <a:extLst xmlns:a="http://schemas.openxmlformats.org/drawingml/2006/main">
+          <p:cNvPr id="2" name="Rectangle 1">
+            <a:extLst>
               <a:ext uri="{FF2B5EF4-FFF2-40B4-BE49-F238E27FC236}">
                 <a16:creationId xmlns:a16="http://schemas.microsoft.com/office/drawing/2014/main" id="{A70828A8-C842-4F83-8CED-7506DEA86C88}"/>
               </a:ext>
             </a:extLst>
           </p:cNvPr>
           <p:cNvSpPr>
-            <a:spLocks xmlns:a="http://schemas.openxmlformats.org/drawingml/2006/main" noGrp="1"/>
-          </p:cNvSpPr>
-          <p:nvPr/>
-        </p:nvSpPr>
-        <p:spPr>
-          <a:xfrm xmlns:a="http://schemas.openxmlformats.org/drawingml/2006/main">
+            <a:spLocks noGrp="1"/>
+          </p:cNvSpPr>
+          <p:nvPr/>
+        </p:nvSpPr>
+        <p:spPr>
+          <a:xfrm>
             <a:off x="609600" y="1257300"/>
             <a:ext cx="10572750" cy="781050"/>
           </a:xfrm>
-          <a:prstGeom xmlns:a="http://schemas.openxmlformats.org/drawingml/2006/main" prst="rect">
-            <a:avLst/>
-          </a:prstGeom>
-          <a:noFill xmlns:a="http://schemas.openxmlformats.org/drawingml/2006/main"/>
-          <a:ln xmlns:a="http://schemas.openxmlformats.org/drawingml/2006/main" w="0">
+          <a:prstGeom prst="rect">
+            <a:avLst/>
+          </a:prstGeom>
+          <a:noFill/>
+          <a:ln w="0">
             <a:noFill/>
           </a:ln>
         </p:spPr>
         <p:txBody>
-          <a:bodyPr xmlns:a="http://schemas.openxmlformats.org/drawingml/2006/main" lIns="38100" tIns="19050" rIns="38100" bIns="19050" anchor="t">
-            <a:normAutofit fontScale="100000"/>
+          <a:bodyPr lIns="38100" tIns="19050" rIns="38100" bIns="19050" anchor="t">
+            <a:normAutofit/>
           </a:bodyPr>
-          <a:lstStyle xmlns:a="http://schemas.openxmlformats.org/drawingml/2006/main"/>
-          <a:p xmlns:a="http://schemas.openxmlformats.org/drawingml/2006/main">
+          <a:lstStyle/>
+          <a:p>
             <a:pPr algn="l">
               <a:defRPr sz="2025" b="1">
                 <a:solidFill>
@@ -1737,101 +1540,115 @@
       </p:sp>
       <p:sp>
         <p:nvSpPr>
-          <p:cNvPr id="3" name="">
-            <a:extLst xmlns:a="http://schemas.openxmlformats.org/drawingml/2006/main">
+          <p:cNvPr id="3" name="Rectangle: Rounded Corners 2">
+            <a:extLst>
               <a:ext uri="{FF2B5EF4-FFF2-40B4-BE49-F238E27FC236}">
                 <a16:creationId xmlns:a16="http://schemas.microsoft.com/office/drawing/2014/main" id="{3DA92798-AB2A-405E-A22D-D0A4E93D5F3E}"/>
               </a:ext>
             </a:extLst>
           </p:cNvPr>
           <p:cNvSpPr>
-            <a:spLocks xmlns:a="http://schemas.openxmlformats.org/drawingml/2006/main" noGrp="1"/>
-          </p:cNvSpPr>
-          <p:nvPr/>
-        </p:nvSpPr>
-        <p:spPr>
-          <a:xfrm xmlns:a="http://schemas.openxmlformats.org/drawingml/2006/main">
+            <a:spLocks noGrp="1"/>
+          </p:cNvSpPr>
+          <p:nvPr/>
+        </p:nvSpPr>
+        <p:spPr>
+          <a:xfrm>
             <a:off x="609600" y="2457450"/>
             <a:ext cx="3333750" cy="1809750"/>
           </a:xfrm>
-          <a:prstGeom xmlns:a="http://schemas.openxmlformats.org/drawingml/2006/main" prst="roundRect">
+          <a:prstGeom prst="roundRect">
             <a:avLst>
               <a:gd name="adj" fmla="val 4211"/>
             </a:avLst>
           </a:prstGeom>
-          <a:solidFill xmlns:a="http://schemas.openxmlformats.org/drawingml/2006/main">
+          <a:solidFill>
             <a:srgbClr val="F2F5F8"/>
           </a:solidFill>
-          <a:ln xmlns:a="http://schemas.openxmlformats.org/drawingml/2006/main" w="9525">
+          <a:ln w="9525">
             <a:solidFill>
               <a:srgbClr val="D5DCE3"/>
             </a:solidFill>
           </a:ln>
         </p:spPr>
-      </p:sp>
-      <p:sp>
-        <p:nvSpPr>
-          <p:cNvPr id="4" name="">
-            <a:extLst xmlns:a="http://schemas.openxmlformats.org/drawingml/2006/main">
+        <p:txBody>
+          <a:bodyPr/>
+          <a:lstStyle/>
+          <a:p>
+            <a:endParaRPr lang="en-GB"/>
+          </a:p>
+        </p:txBody>
+      </p:sp>
+      <p:sp>
+        <p:nvSpPr>
+          <p:cNvPr id="4" name="Rectangle 3">
+            <a:extLst>
               <a:ext uri="{FF2B5EF4-FFF2-40B4-BE49-F238E27FC236}">
                 <a16:creationId xmlns:a16="http://schemas.microsoft.com/office/drawing/2014/main" id="{977D8E01-EC1F-4A19-983D-95BC07564963}"/>
               </a:ext>
             </a:extLst>
           </p:cNvPr>
           <p:cNvSpPr>
-            <a:spLocks xmlns:a="http://schemas.openxmlformats.org/drawingml/2006/main" noGrp="1"/>
-          </p:cNvSpPr>
-          <p:nvPr/>
-        </p:nvSpPr>
-        <p:spPr>
-          <a:xfrm xmlns:a="http://schemas.openxmlformats.org/drawingml/2006/main">
+            <a:spLocks noGrp="1"/>
+          </p:cNvSpPr>
+          <p:nvPr/>
+        </p:nvSpPr>
+        <p:spPr>
+          <a:xfrm>
             <a:off x="609600" y="2457450"/>
             <a:ext cx="3333750" cy="133350"/>
           </a:xfrm>
-          <a:prstGeom xmlns:a="http://schemas.openxmlformats.org/drawingml/2006/main" prst="rect">
-            <a:avLst/>
-          </a:prstGeom>
-          <a:solidFill xmlns:a="http://schemas.openxmlformats.org/drawingml/2006/main">
+          <a:prstGeom prst="rect">
+            <a:avLst/>
+          </a:prstGeom>
+          <a:solidFill>
             <a:srgbClr val="4285F4"/>
           </a:solidFill>
-          <a:ln xmlns:a="http://schemas.openxmlformats.org/drawingml/2006/main" w="0">
+          <a:ln w="0">
             <a:noFill/>
           </a:ln>
         </p:spPr>
-      </p:sp>
-      <p:sp>
-        <p:nvSpPr>
-          <p:cNvPr id="5" name="">
-            <a:extLst xmlns:a="http://schemas.openxmlformats.org/drawingml/2006/main">
+        <p:txBody>
+          <a:bodyPr/>
+          <a:lstStyle/>
+          <a:p>
+            <a:endParaRPr lang="en-GB"/>
+          </a:p>
+        </p:txBody>
+      </p:sp>
+      <p:sp>
+        <p:nvSpPr>
+          <p:cNvPr id="5" name="Rectangle 4">
+            <a:extLst>
               <a:ext uri="{FF2B5EF4-FFF2-40B4-BE49-F238E27FC236}">
                 <a16:creationId xmlns:a16="http://schemas.microsoft.com/office/drawing/2014/main" id="{E640CADE-F1A5-4F7B-B7BA-A61D6B4FE86E}"/>
               </a:ext>
             </a:extLst>
           </p:cNvPr>
           <p:cNvSpPr>
-            <a:spLocks xmlns:a="http://schemas.openxmlformats.org/drawingml/2006/main" noGrp="1"/>
-          </p:cNvSpPr>
-          <p:nvPr/>
-        </p:nvSpPr>
-        <p:spPr>
-          <a:xfrm xmlns:a="http://schemas.openxmlformats.org/drawingml/2006/main">
+            <a:spLocks noGrp="1"/>
+          </p:cNvSpPr>
+          <p:nvPr/>
+        </p:nvSpPr>
+        <p:spPr>
+          <a:xfrm>
             <a:off x="838200" y="2838450"/>
             <a:ext cx="2876550" cy="476250"/>
           </a:xfrm>
-          <a:prstGeom xmlns:a="http://schemas.openxmlformats.org/drawingml/2006/main" prst="rect">
-            <a:avLst/>
-          </a:prstGeom>
-          <a:noFill xmlns:a="http://schemas.openxmlformats.org/drawingml/2006/main"/>
-          <a:ln xmlns:a="http://schemas.openxmlformats.org/drawingml/2006/main" w="0">
+          <a:prstGeom prst="rect">
+            <a:avLst/>
+          </a:prstGeom>
+          <a:noFill/>
+          <a:ln w="0">
             <a:noFill/>
           </a:ln>
         </p:spPr>
         <p:txBody>
-          <a:bodyPr xmlns:a="http://schemas.openxmlformats.org/drawingml/2006/main" lIns="38100" tIns="19050" rIns="38100" bIns="19050" anchor="t">
-            <a:normAutofit fontScale="100000"/>
+          <a:bodyPr lIns="38100" tIns="19050" rIns="38100" bIns="19050" anchor="t">
+            <a:normAutofit/>
           </a:bodyPr>
-          <a:lstStyle xmlns:a="http://schemas.openxmlformats.org/drawingml/2006/main"/>
-          <a:p xmlns:a="http://schemas.openxmlformats.org/drawingml/2006/main">
+          <a:lstStyle/>
+          <a:p>
             <a:pPr algn="ctr">
               <a:defRPr sz="2250" b="1">
                 <a:solidFill>
@@ -1858,37 +1675,37 @@
       </p:sp>
       <p:sp>
         <p:nvSpPr>
-          <p:cNvPr id="6" name="">
-            <a:extLst xmlns:a="http://schemas.openxmlformats.org/drawingml/2006/main">
+          <p:cNvPr id="6" name="Rectangle 5">
+            <a:extLst>
               <a:ext uri="{FF2B5EF4-FFF2-40B4-BE49-F238E27FC236}">
                 <a16:creationId xmlns:a16="http://schemas.microsoft.com/office/drawing/2014/main" id="{999E491D-FE13-45E1-B5D8-9DE48FC957D6}"/>
               </a:ext>
             </a:extLst>
           </p:cNvPr>
           <p:cNvSpPr>
-            <a:spLocks xmlns:a="http://schemas.openxmlformats.org/drawingml/2006/main" noGrp="1"/>
-          </p:cNvSpPr>
-          <p:nvPr/>
-        </p:nvSpPr>
-        <p:spPr>
-          <a:xfrm xmlns:a="http://schemas.openxmlformats.org/drawingml/2006/main">
+            <a:spLocks noGrp="1"/>
+          </p:cNvSpPr>
+          <p:nvPr/>
+        </p:nvSpPr>
+        <p:spPr>
+          <a:xfrm>
             <a:off x="838200" y="3457575"/>
             <a:ext cx="2876550" cy="400050"/>
           </a:xfrm>
-          <a:prstGeom xmlns:a="http://schemas.openxmlformats.org/drawingml/2006/main" prst="rect">
-            <a:avLst/>
-          </a:prstGeom>
-          <a:noFill xmlns:a="http://schemas.openxmlformats.org/drawingml/2006/main"/>
-          <a:ln xmlns:a="http://schemas.openxmlformats.org/drawingml/2006/main" w="0">
+          <a:prstGeom prst="rect">
+            <a:avLst/>
+          </a:prstGeom>
+          <a:noFill/>
+          <a:ln w="0">
             <a:noFill/>
           </a:ln>
         </p:spPr>
         <p:txBody>
-          <a:bodyPr xmlns:a="http://schemas.openxmlformats.org/drawingml/2006/main" lIns="38100" tIns="19050" rIns="38100" bIns="19050" anchor="t">
-            <a:normAutofit fontScale="100000"/>
+          <a:bodyPr lIns="38100" tIns="19050" rIns="38100" bIns="19050" anchor="t">
+            <a:normAutofit/>
           </a:bodyPr>
-          <a:lstStyle xmlns:a="http://schemas.openxmlformats.org/drawingml/2006/main"/>
-          <a:p xmlns:a="http://schemas.openxmlformats.org/drawingml/2006/main">
+          <a:lstStyle/>
+          <a:p>
             <a:pPr algn="ctr">
               <a:defRPr sz="1575" b="0">
                 <a:solidFill>
@@ -1915,101 +1732,115 @@
       </p:sp>
       <p:sp>
         <p:nvSpPr>
-          <p:cNvPr id="7" name="">
-            <a:extLst xmlns:a="http://schemas.openxmlformats.org/drawingml/2006/main">
+          <p:cNvPr id="7" name="Rectangle: Rounded Corners 6">
+            <a:extLst>
               <a:ext uri="{FF2B5EF4-FFF2-40B4-BE49-F238E27FC236}">
                 <a16:creationId xmlns:a16="http://schemas.microsoft.com/office/drawing/2014/main" id="{7245735A-A9EB-4FED-A086-1B33EEDA7DB5}"/>
               </a:ext>
             </a:extLst>
           </p:cNvPr>
           <p:cNvSpPr>
-            <a:spLocks xmlns:a="http://schemas.openxmlformats.org/drawingml/2006/main" noGrp="1"/>
-          </p:cNvSpPr>
-          <p:nvPr/>
-        </p:nvSpPr>
-        <p:spPr>
-          <a:xfrm xmlns:a="http://schemas.openxmlformats.org/drawingml/2006/main">
+            <a:spLocks noGrp="1"/>
+          </p:cNvSpPr>
+          <p:nvPr/>
+        </p:nvSpPr>
+        <p:spPr>
+          <a:xfrm>
             <a:off x="4324350" y="2457450"/>
             <a:ext cx="3333750" cy="1809750"/>
           </a:xfrm>
-          <a:prstGeom xmlns:a="http://schemas.openxmlformats.org/drawingml/2006/main" prst="roundRect">
+          <a:prstGeom prst="roundRect">
             <a:avLst>
               <a:gd name="adj" fmla="val 4211"/>
             </a:avLst>
           </a:prstGeom>
-          <a:solidFill xmlns:a="http://schemas.openxmlformats.org/drawingml/2006/main">
+          <a:solidFill>
             <a:srgbClr val="F2F5F8"/>
           </a:solidFill>
-          <a:ln xmlns:a="http://schemas.openxmlformats.org/drawingml/2006/main" w="9525">
+          <a:ln w="9525">
             <a:solidFill>
               <a:srgbClr val="D5DCE3"/>
             </a:solidFill>
           </a:ln>
         </p:spPr>
-      </p:sp>
-      <p:sp>
-        <p:nvSpPr>
-          <p:cNvPr id="8" name="">
-            <a:extLst xmlns:a="http://schemas.openxmlformats.org/drawingml/2006/main">
+        <p:txBody>
+          <a:bodyPr/>
+          <a:lstStyle/>
+          <a:p>
+            <a:endParaRPr lang="en-GB"/>
+          </a:p>
+        </p:txBody>
+      </p:sp>
+      <p:sp>
+        <p:nvSpPr>
+          <p:cNvPr id="8" name="Rectangle 7">
+            <a:extLst>
               <a:ext uri="{FF2B5EF4-FFF2-40B4-BE49-F238E27FC236}">
                 <a16:creationId xmlns:a16="http://schemas.microsoft.com/office/drawing/2014/main" id="{1E025FBF-DE40-42B4-89B0-F62B469E51DB}"/>
               </a:ext>
             </a:extLst>
           </p:cNvPr>
           <p:cNvSpPr>
-            <a:spLocks xmlns:a="http://schemas.openxmlformats.org/drawingml/2006/main" noGrp="1"/>
-          </p:cNvSpPr>
-          <p:nvPr/>
-        </p:nvSpPr>
-        <p:spPr>
-          <a:xfrm xmlns:a="http://schemas.openxmlformats.org/drawingml/2006/main">
+            <a:spLocks noGrp="1"/>
+          </p:cNvSpPr>
+          <p:nvPr/>
+        </p:nvSpPr>
+        <p:spPr>
+          <a:xfrm>
             <a:off x="4324350" y="2457450"/>
             <a:ext cx="3333750" cy="133350"/>
           </a:xfrm>
-          <a:prstGeom xmlns:a="http://schemas.openxmlformats.org/drawingml/2006/main" prst="rect">
-            <a:avLst/>
-          </a:prstGeom>
-          <a:solidFill xmlns:a="http://schemas.openxmlformats.org/drawingml/2006/main">
+          <a:prstGeom prst="rect">
+            <a:avLst/>
+          </a:prstGeom>
+          <a:solidFill>
             <a:srgbClr val="7B4AAC"/>
           </a:solidFill>
-          <a:ln xmlns:a="http://schemas.openxmlformats.org/drawingml/2006/main" w="0">
+          <a:ln w="0">
             <a:noFill/>
           </a:ln>
         </p:spPr>
-      </p:sp>
-      <p:sp>
-        <p:nvSpPr>
-          <p:cNvPr id="9" name="">
-            <a:extLst xmlns:a="http://schemas.openxmlformats.org/drawingml/2006/main">
+        <p:txBody>
+          <a:bodyPr/>
+          <a:lstStyle/>
+          <a:p>
+            <a:endParaRPr lang="en-GB"/>
+          </a:p>
+        </p:txBody>
+      </p:sp>
+      <p:sp>
+        <p:nvSpPr>
+          <p:cNvPr id="9" name="Rectangle 8">
+            <a:extLst>
               <a:ext uri="{FF2B5EF4-FFF2-40B4-BE49-F238E27FC236}">
                 <a16:creationId xmlns:a16="http://schemas.microsoft.com/office/drawing/2014/main" id="{EF2CA5DC-2C78-4A60-9D2C-42D4CBB286E1}"/>
               </a:ext>
             </a:extLst>
           </p:cNvPr>
           <p:cNvSpPr>
-            <a:spLocks xmlns:a="http://schemas.openxmlformats.org/drawingml/2006/main" noGrp="1"/>
-          </p:cNvSpPr>
-          <p:nvPr/>
-        </p:nvSpPr>
-        <p:spPr>
-          <a:xfrm xmlns:a="http://schemas.openxmlformats.org/drawingml/2006/main">
+            <a:spLocks noGrp="1"/>
+          </p:cNvSpPr>
+          <p:nvPr/>
+        </p:nvSpPr>
+        <p:spPr>
+          <a:xfrm>
             <a:off x="4552950" y="2838450"/>
             <a:ext cx="2876550" cy="476250"/>
           </a:xfrm>
-          <a:prstGeom xmlns:a="http://schemas.openxmlformats.org/drawingml/2006/main" prst="rect">
-            <a:avLst/>
-          </a:prstGeom>
-          <a:noFill xmlns:a="http://schemas.openxmlformats.org/drawingml/2006/main"/>
-          <a:ln xmlns:a="http://schemas.openxmlformats.org/drawingml/2006/main" w="0">
+          <a:prstGeom prst="rect">
+            <a:avLst/>
+          </a:prstGeom>
+          <a:noFill/>
+          <a:ln w="0">
             <a:noFill/>
           </a:ln>
         </p:spPr>
         <p:txBody>
-          <a:bodyPr xmlns:a="http://schemas.openxmlformats.org/drawingml/2006/main" lIns="38100" tIns="19050" rIns="38100" bIns="19050" anchor="t">
-            <a:normAutofit fontScale="100000"/>
+          <a:bodyPr lIns="38100" tIns="19050" rIns="38100" bIns="19050" anchor="t">
+            <a:normAutofit/>
           </a:bodyPr>
-          <a:lstStyle xmlns:a="http://schemas.openxmlformats.org/drawingml/2006/main"/>
-          <a:p xmlns:a="http://schemas.openxmlformats.org/drawingml/2006/main">
+          <a:lstStyle/>
+          <a:p>
             <a:pPr algn="ctr">
               <a:defRPr sz="2250" b="1">
                 <a:solidFill>
@@ -2036,37 +1867,37 @@
       </p:sp>
       <p:sp>
         <p:nvSpPr>
-          <p:cNvPr id="10" name="">
-            <a:extLst xmlns:a="http://schemas.openxmlformats.org/drawingml/2006/main">
+          <p:cNvPr id="10" name="Rectangle 9">
+            <a:extLst>
               <a:ext uri="{FF2B5EF4-FFF2-40B4-BE49-F238E27FC236}">
                 <a16:creationId xmlns:a16="http://schemas.microsoft.com/office/drawing/2014/main" id="{888F93D3-2F8F-4B45-8315-E289CB0F2123}"/>
               </a:ext>
             </a:extLst>
           </p:cNvPr>
           <p:cNvSpPr>
-            <a:spLocks xmlns:a="http://schemas.openxmlformats.org/drawingml/2006/main" noGrp="1"/>
-          </p:cNvSpPr>
-          <p:nvPr/>
-        </p:nvSpPr>
-        <p:spPr>
-          <a:xfrm xmlns:a="http://schemas.openxmlformats.org/drawingml/2006/main">
+            <a:spLocks noGrp="1"/>
+          </p:cNvSpPr>
+          <p:nvPr/>
+        </p:nvSpPr>
+        <p:spPr>
+          <a:xfrm>
             <a:off x="4552950" y="3457575"/>
             <a:ext cx="2876550" cy="400050"/>
           </a:xfrm>
-          <a:prstGeom xmlns:a="http://schemas.openxmlformats.org/drawingml/2006/main" prst="rect">
-            <a:avLst/>
-          </a:prstGeom>
-          <a:noFill xmlns:a="http://schemas.openxmlformats.org/drawingml/2006/main"/>
-          <a:ln xmlns:a="http://schemas.openxmlformats.org/drawingml/2006/main" w="0">
+          <a:prstGeom prst="rect">
+            <a:avLst/>
+          </a:prstGeom>
+          <a:noFill/>
+          <a:ln w="0">
             <a:noFill/>
           </a:ln>
         </p:spPr>
         <p:txBody>
-          <a:bodyPr xmlns:a="http://schemas.openxmlformats.org/drawingml/2006/main" lIns="38100" tIns="19050" rIns="38100" bIns="19050" anchor="t">
-            <a:normAutofit fontScale="100000"/>
+          <a:bodyPr lIns="38100" tIns="19050" rIns="38100" bIns="19050" anchor="t">
+            <a:normAutofit/>
           </a:bodyPr>
-          <a:lstStyle xmlns:a="http://schemas.openxmlformats.org/drawingml/2006/main"/>
-          <a:p xmlns:a="http://schemas.openxmlformats.org/drawingml/2006/main">
+          <a:lstStyle/>
+          <a:p>
             <a:pPr algn="ctr">
               <a:defRPr sz="1575" b="0">
                 <a:solidFill>
@@ -2093,101 +1924,115 @@
       </p:sp>
       <p:sp>
         <p:nvSpPr>
-          <p:cNvPr id="11" name="">
-            <a:extLst xmlns:a="http://schemas.openxmlformats.org/drawingml/2006/main">
+          <p:cNvPr id="11" name="Rectangle: Rounded Corners 10">
+            <a:extLst>
               <a:ext uri="{FF2B5EF4-FFF2-40B4-BE49-F238E27FC236}">
                 <a16:creationId xmlns:a16="http://schemas.microsoft.com/office/drawing/2014/main" id="{2495170A-82B7-4752-B56E-59F16B1DF06C}"/>
               </a:ext>
             </a:extLst>
           </p:cNvPr>
           <p:cNvSpPr>
-            <a:spLocks xmlns:a="http://schemas.openxmlformats.org/drawingml/2006/main" noGrp="1"/>
-          </p:cNvSpPr>
-          <p:nvPr/>
-        </p:nvSpPr>
-        <p:spPr>
-          <a:xfrm xmlns:a="http://schemas.openxmlformats.org/drawingml/2006/main">
+            <a:spLocks noGrp="1"/>
+          </p:cNvSpPr>
+          <p:nvPr/>
+        </p:nvSpPr>
+        <p:spPr>
+          <a:xfrm>
             <a:off x="8039100" y="2457450"/>
             <a:ext cx="3333750" cy="1809750"/>
           </a:xfrm>
-          <a:prstGeom xmlns:a="http://schemas.openxmlformats.org/drawingml/2006/main" prst="roundRect">
+          <a:prstGeom prst="roundRect">
             <a:avLst>
               <a:gd name="adj" fmla="val 4211"/>
             </a:avLst>
           </a:prstGeom>
-          <a:solidFill xmlns:a="http://schemas.openxmlformats.org/drawingml/2006/main">
+          <a:solidFill>
             <a:srgbClr val="F2F5F8"/>
           </a:solidFill>
-          <a:ln xmlns:a="http://schemas.openxmlformats.org/drawingml/2006/main" w="9525">
+          <a:ln w="9525">
             <a:solidFill>
               <a:srgbClr val="D5DCE3"/>
             </a:solidFill>
           </a:ln>
         </p:spPr>
-      </p:sp>
-      <p:sp>
-        <p:nvSpPr>
-          <p:cNvPr id="12" name="">
-            <a:extLst xmlns:a="http://schemas.openxmlformats.org/drawingml/2006/main">
+        <p:txBody>
+          <a:bodyPr/>
+          <a:lstStyle/>
+          <a:p>
+            <a:endParaRPr lang="en-GB"/>
+          </a:p>
+        </p:txBody>
+      </p:sp>
+      <p:sp>
+        <p:nvSpPr>
+          <p:cNvPr id="12" name="Rectangle 11">
+            <a:extLst>
               <a:ext uri="{FF2B5EF4-FFF2-40B4-BE49-F238E27FC236}">
                 <a16:creationId xmlns:a16="http://schemas.microsoft.com/office/drawing/2014/main" id="{B6A2E8A8-21AA-4570-8FC5-2559BD3B31DB}"/>
               </a:ext>
             </a:extLst>
           </p:cNvPr>
           <p:cNvSpPr>
-            <a:spLocks xmlns:a="http://schemas.openxmlformats.org/drawingml/2006/main" noGrp="1"/>
-          </p:cNvSpPr>
-          <p:nvPr/>
-        </p:nvSpPr>
-        <p:spPr>
-          <a:xfrm xmlns:a="http://schemas.openxmlformats.org/drawingml/2006/main">
+            <a:spLocks noGrp="1"/>
+          </p:cNvSpPr>
+          <p:nvPr/>
+        </p:nvSpPr>
+        <p:spPr>
+          <a:xfrm>
             <a:off x="8039100" y="2457450"/>
             <a:ext cx="3333750" cy="133350"/>
           </a:xfrm>
-          <a:prstGeom xmlns:a="http://schemas.openxmlformats.org/drawingml/2006/main" prst="rect">
-            <a:avLst/>
-          </a:prstGeom>
-          <a:solidFill xmlns:a="http://schemas.openxmlformats.org/drawingml/2006/main">
+          <a:prstGeom prst="rect">
+            <a:avLst/>
+          </a:prstGeom>
+          <a:solidFill>
             <a:srgbClr val="1A9F8A"/>
           </a:solidFill>
-          <a:ln xmlns:a="http://schemas.openxmlformats.org/drawingml/2006/main" w="0">
+          <a:ln w="0">
             <a:noFill/>
           </a:ln>
         </p:spPr>
-      </p:sp>
-      <p:sp>
-        <p:nvSpPr>
-          <p:cNvPr id="13" name="">
-            <a:extLst xmlns:a="http://schemas.openxmlformats.org/drawingml/2006/main">
+        <p:txBody>
+          <a:bodyPr/>
+          <a:lstStyle/>
+          <a:p>
+            <a:endParaRPr lang="en-GB"/>
+          </a:p>
+        </p:txBody>
+      </p:sp>
+      <p:sp>
+        <p:nvSpPr>
+          <p:cNvPr id="13" name="Rectangle 12">
+            <a:extLst>
               <a:ext uri="{FF2B5EF4-FFF2-40B4-BE49-F238E27FC236}">
                 <a16:creationId xmlns:a16="http://schemas.microsoft.com/office/drawing/2014/main" id="{E83FBFAD-1DB7-4916-A6EA-0247EC80DB6A}"/>
               </a:ext>
             </a:extLst>
           </p:cNvPr>
           <p:cNvSpPr>
-            <a:spLocks xmlns:a="http://schemas.openxmlformats.org/drawingml/2006/main" noGrp="1"/>
-          </p:cNvSpPr>
-          <p:nvPr/>
-        </p:nvSpPr>
-        <p:spPr>
-          <a:xfrm xmlns:a="http://schemas.openxmlformats.org/drawingml/2006/main">
+            <a:spLocks noGrp="1"/>
+          </p:cNvSpPr>
+          <p:nvPr/>
+        </p:nvSpPr>
+        <p:spPr>
+          <a:xfrm>
             <a:off x="8267700" y="2838450"/>
             <a:ext cx="2876550" cy="476250"/>
           </a:xfrm>
-          <a:prstGeom xmlns:a="http://schemas.openxmlformats.org/drawingml/2006/main" prst="rect">
-            <a:avLst/>
-          </a:prstGeom>
-          <a:noFill xmlns:a="http://schemas.openxmlformats.org/drawingml/2006/main"/>
-          <a:ln xmlns:a="http://schemas.openxmlformats.org/drawingml/2006/main" w="0">
+          <a:prstGeom prst="rect">
+            <a:avLst/>
+          </a:prstGeom>
+          <a:noFill/>
+          <a:ln w="0">
             <a:noFill/>
           </a:ln>
         </p:spPr>
         <p:txBody>
-          <a:bodyPr xmlns:a="http://schemas.openxmlformats.org/drawingml/2006/main" lIns="38100" tIns="19050" rIns="38100" bIns="19050" anchor="t">
-            <a:normAutofit fontScale="100000"/>
+          <a:bodyPr lIns="38100" tIns="19050" rIns="38100" bIns="19050" anchor="t">
+            <a:normAutofit/>
           </a:bodyPr>
-          <a:lstStyle xmlns:a="http://schemas.openxmlformats.org/drawingml/2006/main"/>
-          <a:p xmlns:a="http://schemas.openxmlformats.org/drawingml/2006/main">
+          <a:lstStyle/>
+          <a:p>
             <a:pPr algn="ctr">
               <a:defRPr sz="2250" b="1">
                 <a:solidFill>
@@ -2214,37 +2059,37 @@
       </p:sp>
       <p:sp>
         <p:nvSpPr>
-          <p:cNvPr id="14" name="">
-            <a:extLst xmlns:a="http://schemas.openxmlformats.org/drawingml/2006/main">
+          <p:cNvPr id="14" name="Rectangle 13">
+            <a:extLst>
               <a:ext uri="{FF2B5EF4-FFF2-40B4-BE49-F238E27FC236}">
                 <a16:creationId xmlns:a16="http://schemas.microsoft.com/office/drawing/2014/main" id="{1958598F-CD51-4C83-A8D3-99424CBAD91D}"/>
               </a:ext>
             </a:extLst>
           </p:cNvPr>
           <p:cNvSpPr>
-            <a:spLocks xmlns:a="http://schemas.openxmlformats.org/drawingml/2006/main" noGrp="1"/>
-          </p:cNvSpPr>
-          <p:nvPr/>
-        </p:nvSpPr>
-        <p:spPr>
-          <a:xfrm xmlns:a="http://schemas.openxmlformats.org/drawingml/2006/main">
+            <a:spLocks noGrp="1"/>
+          </p:cNvSpPr>
+          <p:nvPr/>
+        </p:nvSpPr>
+        <p:spPr>
+          <a:xfrm>
             <a:off x="8267700" y="3457575"/>
             <a:ext cx="2876550" cy="400050"/>
           </a:xfrm>
-          <a:prstGeom xmlns:a="http://schemas.openxmlformats.org/drawingml/2006/main" prst="rect">
-            <a:avLst/>
-          </a:prstGeom>
-          <a:noFill xmlns:a="http://schemas.openxmlformats.org/drawingml/2006/main"/>
-          <a:ln xmlns:a="http://schemas.openxmlformats.org/drawingml/2006/main" w="0">
+          <a:prstGeom prst="rect">
+            <a:avLst/>
+          </a:prstGeom>
+          <a:noFill/>
+          <a:ln w="0">
             <a:noFill/>
           </a:ln>
         </p:spPr>
         <p:txBody>
-          <a:bodyPr xmlns:a="http://schemas.openxmlformats.org/drawingml/2006/main" lIns="38100" tIns="19050" rIns="38100" bIns="19050" anchor="t">
-            <a:normAutofit fontScale="100000"/>
+          <a:bodyPr lIns="38100" tIns="19050" rIns="38100" bIns="19050" anchor="t">
+            <a:normAutofit/>
           </a:bodyPr>
-          <a:lstStyle xmlns:a="http://schemas.openxmlformats.org/drawingml/2006/main"/>
-          <a:p xmlns:a="http://schemas.openxmlformats.org/drawingml/2006/main">
+          <a:lstStyle/>
+          <a:p>
             <a:pPr algn="ctr">
               <a:defRPr sz="1575" b="0">
                 <a:solidFill>
@@ -2271,37 +2116,37 @@
       </p:sp>
       <p:sp>
         <p:nvSpPr>
-          <p:cNvPr id="15" name="">
-            <a:extLst xmlns:a="http://schemas.openxmlformats.org/drawingml/2006/main">
+          <p:cNvPr id="15" name="Rectangle 14">
+            <a:extLst>
               <a:ext uri="{FF2B5EF4-FFF2-40B4-BE49-F238E27FC236}">
                 <a16:creationId xmlns:a16="http://schemas.microsoft.com/office/drawing/2014/main" id="{A036A690-5617-4C71-A4D7-7E30CEAC5C23}"/>
               </a:ext>
             </a:extLst>
           </p:cNvPr>
           <p:cNvSpPr>
-            <a:spLocks xmlns:a="http://schemas.openxmlformats.org/drawingml/2006/main" noGrp="1"/>
-          </p:cNvSpPr>
-          <p:nvPr/>
-        </p:nvSpPr>
-        <p:spPr>
-          <a:xfrm xmlns:a="http://schemas.openxmlformats.org/drawingml/2006/main">
+            <a:spLocks noGrp="1"/>
+          </p:cNvSpPr>
+          <p:nvPr/>
+        </p:nvSpPr>
+        <p:spPr>
+          <a:xfrm>
             <a:off x="609600" y="4810125"/>
             <a:ext cx="10572750" cy="619125"/>
           </a:xfrm>
-          <a:prstGeom xmlns:a="http://schemas.openxmlformats.org/drawingml/2006/main" prst="rect">
-            <a:avLst/>
-          </a:prstGeom>
-          <a:noFill xmlns:a="http://schemas.openxmlformats.org/drawingml/2006/main"/>
-          <a:ln xmlns:a="http://schemas.openxmlformats.org/drawingml/2006/main" w="0">
+          <a:prstGeom prst="rect">
+            <a:avLst/>
+          </a:prstGeom>
+          <a:noFill/>
+          <a:ln w="0">
             <a:noFill/>
           </a:ln>
         </p:spPr>
         <p:txBody>
-          <a:bodyPr xmlns:a="http://schemas.openxmlformats.org/drawingml/2006/main" lIns="38100" tIns="19050" rIns="38100" bIns="19050" anchor="t">
-            <a:normAutofit fontScale="100000"/>
+          <a:bodyPr lIns="38100" tIns="19050" rIns="38100" bIns="19050" anchor="t">
+            <a:normAutofit/>
           </a:bodyPr>
-          <a:lstStyle xmlns:a="http://schemas.openxmlformats.org/drawingml/2006/main"/>
-          <a:p xmlns:a="http://schemas.openxmlformats.org/drawingml/2006/main">
+          <a:lstStyle/>
+          <a:p>
             <a:pPr algn="ctr">
               <a:defRPr sz="1800" b="0">
                 <a:solidFill>
@@ -2328,63 +2173,77 @@
       </p:sp>
       <p:sp>
         <p:nvSpPr>
-          <p:cNvPr id="16" name="">
-            <a:extLst xmlns:a="http://schemas.openxmlformats.org/drawingml/2006/main">
+          <p:cNvPr id="16" name="Rectangle 15">
+            <a:extLst>
               <a:ext uri="{FF2B5EF4-FFF2-40B4-BE49-F238E27FC236}">
                 <a16:creationId xmlns:a16="http://schemas.microsoft.com/office/drawing/2014/main" id="{881E5B48-EF70-4445-90DE-BEB694D01459}"/>
               </a:ext>
             </a:extLst>
           </p:cNvPr>
           <p:cNvSpPr>
-            <a:spLocks xmlns:a="http://schemas.openxmlformats.org/drawingml/2006/main" noGrp="1"/>
-          </p:cNvSpPr>
-          <p:nvPr/>
-        </p:nvSpPr>
-        <p:spPr>
-          <a:xfrm xmlns:a="http://schemas.openxmlformats.org/drawingml/2006/main">
+            <a:spLocks noGrp="1"/>
+          </p:cNvSpPr>
+          <p:nvPr/>
+        </p:nvSpPr>
+        <p:spPr>
+          <a:xfrm>
             <a:off x="552450" y="6429375"/>
             <a:ext cx="11087100" cy="47625"/>
           </a:xfrm>
-          <a:prstGeom xmlns:a="http://schemas.openxmlformats.org/drawingml/2006/main" prst="rect">
-            <a:avLst/>
-          </a:prstGeom>
-          <a:solidFill xmlns:a="http://schemas.openxmlformats.org/drawingml/2006/main">
+          <a:prstGeom prst="rect">
+            <a:avLst/>
+          </a:prstGeom>
+          <a:solidFill>
             <a:srgbClr val="F57C24"/>
           </a:solidFill>
-          <a:ln xmlns:a="http://schemas.openxmlformats.org/drawingml/2006/main" w="0">
+          <a:ln w="0">
             <a:noFill/>
           </a:ln>
         </p:spPr>
-      </p:sp>
-      <p:sp>
-        <p:nvSpPr>
-          <p:cNvPr id="17" name="">
-            <a:extLst xmlns:a="http://schemas.openxmlformats.org/drawingml/2006/main">
+        <p:txBody>
+          <a:bodyPr/>
+          <a:lstStyle/>
+          <a:p>
+            <a:endParaRPr lang="en-GB"/>
+          </a:p>
+        </p:txBody>
+      </p:sp>
+      <p:sp>
+        <p:nvSpPr>
+          <p:cNvPr id="17" name="Rectangle 16">
+            <a:extLst>
               <a:ext uri="{FF2B5EF4-FFF2-40B4-BE49-F238E27FC236}">
                 <a16:creationId xmlns:a16="http://schemas.microsoft.com/office/drawing/2014/main" id="{87B06DC3-57A7-4E35-8663-51EFD594222A}"/>
               </a:ext>
             </a:extLst>
           </p:cNvPr>
           <p:cNvSpPr>
-            <a:spLocks xmlns:a="http://schemas.openxmlformats.org/drawingml/2006/main" noGrp="1"/>
-          </p:cNvSpPr>
-          <p:nvPr/>
-        </p:nvSpPr>
-        <p:spPr>
-          <a:xfrm xmlns:a="http://schemas.openxmlformats.org/drawingml/2006/main">
+            <a:spLocks noGrp="1"/>
+          </p:cNvSpPr>
+          <p:nvPr/>
+        </p:nvSpPr>
+        <p:spPr>
+          <a:xfrm>
             <a:off x="4286250" y="6429375"/>
             <a:ext cx="7353300" cy="47625"/>
           </a:xfrm>
-          <a:prstGeom xmlns:a="http://schemas.openxmlformats.org/drawingml/2006/main" prst="rect">
-            <a:avLst/>
-          </a:prstGeom>
-          <a:solidFill xmlns:a="http://schemas.openxmlformats.org/drawingml/2006/main">
+          <a:prstGeom prst="rect">
+            <a:avLst/>
+          </a:prstGeom>
+          <a:solidFill>
             <a:srgbClr val="77A9D7"/>
           </a:solidFill>
-          <a:ln xmlns:a="http://schemas.openxmlformats.org/drawingml/2006/main" w="0">
+          <a:ln w="0">
             <a:noFill/>
           </a:ln>
         </p:spPr>
+        <p:txBody>
+          <a:bodyPr/>
+          <a:lstStyle/>
+          <a:p>
+            <a:endParaRPr lang="en-GB"/>
+          </a:p>
+        </p:txBody>
       </p:sp>
     </p:spTree>
     <p:extLst>
@@ -2393,17 +2252,21 @@
       </p:ext>
     </p:extLst>
   </p:cSld>
+  <p:clrMapOvr>
+    <a:masterClrMapping/>
+  </p:clrMapOvr>
 </p:sld>
 </file>
 
 <file path=ppt/slides/slide3.xml><?xml version="1.0" encoding="utf-8"?>
-<p:sld xmlns:p="http://schemas.openxmlformats.org/presentationml/2006/main">
+<p:sld xmlns:a="http://schemas.openxmlformats.org/drawingml/2006/main" xmlns:r="http://schemas.openxmlformats.org/officeDocument/2006/relationships" xmlns:p="http://schemas.openxmlformats.org/presentationml/2006/main">
   <p:cSld>
     <p:bg>
       <p:bgPr>
-        <a:solidFill xmlns:a="http://schemas.openxmlformats.org/drawingml/2006/main">
+        <a:solidFill>
           <a:srgbClr val="FFFFFF"/>
         </a:solidFill>
+        <a:effectLst/>
       </p:bgPr>
     </p:bg>
     <p:spTree>
@@ -2413,41 +2276,46 @@
         <p:nvPr/>
       </p:nvGrpSpPr>
       <p:grpSpPr>
-        <a:xfrm xmlns:a="http://schemas.openxmlformats.org/drawingml/2006/main"/>
+        <a:xfrm>
+          <a:off x="0" y="0"/>
+          <a:ext cx="0" cy="0"/>
+          <a:chOff x="0" y="0"/>
+          <a:chExt cx="0" cy="0"/>
+        </a:xfrm>
       </p:grpSpPr>
       <p:sp>
         <p:nvSpPr>
-          <p:cNvPr id="18" name="">
-            <a:extLst xmlns:a="http://schemas.openxmlformats.org/drawingml/2006/main">
+          <p:cNvPr id="18" name="Rectangle 17">
+            <a:extLst>
               <a:ext uri="{FF2B5EF4-FFF2-40B4-BE49-F238E27FC236}">
                 <a16:creationId xmlns:a16="http://schemas.microsoft.com/office/drawing/2014/main" id="{502A71E2-5252-49BD-A189-DBCA0CDC7FC3}"/>
               </a:ext>
             </a:extLst>
           </p:cNvPr>
           <p:cNvSpPr>
-            <a:spLocks xmlns:a="http://schemas.openxmlformats.org/drawingml/2006/main" noGrp="1"/>
-          </p:cNvSpPr>
-          <p:nvPr/>
-        </p:nvSpPr>
-        <p:spPr>
-          <a:xfrm xmlns:a="http://schemas.openxmlformats.org/drawingml/2006/main">
+            <a:spLocks noGrp="1"/>
+          </p:cNvSpPr>
+          <p:nvPr/>
+        </p:nvSpPr>
+        <p:spPr>
+          <a:xfrm>
             <a:off x="552450" y="333375"/>
             <a:ext cx="11087100" cy="704850"/>
           </a:xfrm>
-          <a:prstGeom xmlns:a="http://schemas.openxmlformats.org/drawingml/2006/main" prst="rect">
-            <a:avLst/>
-          </a:prstGeom>
-          <a:noFill xmlns:a="http://schemas.openxmlformats.org/drawingml/2006/main"/>
-          <a:ln xmlns:a="http://schemas.openxmlformats.org/drawingml/2006/main" w="0">
+          <a:prstGeom prst="rect">
+            <a:avLst/>
+          </a:prstGeom>
+          <a:noFill/>
+          <a:ln w="0">
             <a:noFill/>
           </a:ln>
         </p:spPr>
         <p:txBody>
-          <a:bodyPr xmlns:a="http://schemas.openxmlformats.org/drawingml/2006/main" lIns="38100" tIns="19050" rIns="38100" bIns="19050" anchor="t">
-            <a:normAutofit fontScale="100000"/>
+          <a:bodyPr lIns="38100" tIns="19050" rIns="38100" bIns="19050" anchor="t">
+            <a:normAutofit/>
           </a:bodyPr>
-          <a:lstStyle xmlns:a="http://schemas.openxmlformats.org/drawingml/2006/main"/>
-          <a:p xmlns:a="http://schemas.openxmlformats.org/drawingml/2006/main">
+          <a:lstStyle/>
+          <a:p>
             <a:pPr algn="l">
               <a:defRPr sz="2550" b="0">
                 <a:solidFill>
@@ -2474,69 +2342,76 @@
       </p:sp>
       <p:sp>
         <p:nvSpPr>
-          <p:cNvPr id="2" name="">
-            <a:extLst xmlns:a="http://schemas.openxmlformats.org/drawingml/2006/main">
+          <p:cNvPr id="2" name="Rectangle: Rounded Corners 1">
+            <a:extLst>
               <a:ext uri="{FF2B5EF4-FFF2-40B4-BE49-F238E27FC236}">
                 <a16:creationId xmlns:a16="http://schemas.microsoft.com/office/drawing/2014/main" id="{653EAE8A-3220-4392-A1EC-91261A174162}"/>
               </a:ext>
             </a:extLst>
           </p:cNvPr>
           <p:cNvSpPr>
-            <a:spLocks xmlns:a="http://schemas.openxmlformats.org/drawingml/2006/main" noGrp="1"/>
-          </p:cNvSpPr>
-          <p:nvPr/>
-        </p:nvSpPr>
-        <p:spPr>
-          <a:xfrm xmlns:a="http://schemas.openxmlformats.org/drawingml/2006/main">
+            <a:spLocks noGrp="1"/>
+          </p:cNvSpPr>
+          <p:nvPr/>
+        </p:nvSpPr>
+        <p:spPr>
+          <a:xfrm>
             <a:off x="590550" y="1238250"/>
             <a:ext cx="514350" cy="514350"/>
           </a:xfrm>
-          <a:prstGeom xmlns:a="http://schemas.openxmlformats.org/drawingml/2006/main" prst="roundRect">
+          <a:prstGeom prst="roundRect">
             <a:avLst>
               <a:gd name="adj" fmla="val 14815"/>
             </a:avLst>
           </a:prstGeom>
-          <a:solidFill xmlns:a="http://schemas.openxmlformats.org/drawingml/2006/main">
+          <a:solidFill>
             <a:srgbClr val="F57C24"/>
           </a:solidFill>
-          <a:ln xmlns:a="http://schemas.openxmlformats.org/drawingml/2006/main" w="0">
+          <a:ln w="0">
             <a:noFill/>
           </a:ln>
         </p:spPr>
-      </p:sp>
-      <p:sp>
-        <p:nvSpPr>
-          <p:cNvPr id="3" name="">
-            <a:extLst xmlns:a="http://schemas.openxmlformats.org/drawingml/2006/main">
+        <p:txBody>
+          <a:bodyPr/>
+          <a:lstStyle/>
+          <a:p>
+            <a:endParaRPr lang="en-GB"/>
+          </a:p>
+        </p:txBody>
+      </p:sp>
+      <p:sp>
+        <p:nvSpPr>
+          <p:cNvPr id="3" name="Rectangle 2">
+            <a:extLst>
               <a:ext uri="{FF2B5EF4-FFF2-40B4-BE49-F238E27FC236}">
                 <a16:creationId xmlns:a16="http://schemas.microsoft.com/office/drawing/2014/main" id="{8880998C-FF41-43EA-AF19-50304F4BD1D5}"/>
               </a:ext>
             </a:extLst>
           </p:cNvPr>
           <p:cNvSpPr>
-            <a:spLocks xmlns:a="http://schemas.openxmlformats.org/drawingml/2006/main" noGrp="1"/>
-          </p:cNvSpPr>
-          <p:nvPr/>
-        </p:nvSpPr>
-        <p:spPr>
-          <a:xfrm xmlns:a="http://schemas.openxmlformats.org/drawingml/2006/main">
+            <a:spLocks noGrp="1"/>
+          </p:cNvSpPr>
+          <p:nvPr/>
+        </p:nvSpPr>
+        <p:spPr>
+          <a:xfrm>
             <a:off x="638175" y="1285875"/>
             <a:ext cx="419100" cy="419100"/>
           </a:xfrm>
-          <a:prstGeom xmlns:a="http://schemas.openxmlformats.org/drawingml/2006/main" prst="rect">
-            <a:avLst/>
-          </a:prstGeom>
-          <a:noFill xmlns:a="http://schemas.openxmlformats.org/drawingml/2006/main"/>
-          <a:ln xmlns:a="http://schemas.openxmlformats.org/drawingml/2006/main" w="0">
+          <a:prstGeom prst="rect">
+            <a:avLst/>
+          </a:prstGeom>
+          <a:noFill/>
+          <a:ln w="0">
             <a:noFill/>
           </a:ln>
         </p:spPr>
         <p:txBody>
-          <a:bodyPr xmlns:a="http://schemas.openxmlformats.org/drawingml/2006/main" lIns="38100" tIns="19050" rIns="38100" bIns="19050" anchor="ctr">
-            <a:normAutofit fontScale="100000"/>
+          <a:bodyPr lIns="38100" tIns="19050" rIns="38100" bIns="19050" anchor="ctr">
+            <a:normAutofit/>
           </a:bodyPr>
-          <a:lstStyle xmlns:a="http://schemas.openxmlformats.org/drawingml/2006/main"/>
-          <a:p xmlns:a="http://schemas.openxmlformats.org/drawingml/2006/main">
+          <a:lstStyle/>
+          <a:p>
             <a:pPr algn="ctr">
               <a:defRPr sz="1725" b="1">
                 <a:solidFill>
@@ -2563,37 +2438,37 @@
       </p:sp>
       <p:sp>
         <p:nvSpPr>
-          <p:cNvPr id="4" name="">
-            <a:extLst xmlns:a="http://schemas.openxmlformats.org/drawingml/2006/main">
+          <p:cNvPr id="4" name="Rectangle 3">
+            <a:extLst>
               <a:ext uri="{FF2B5EF4-FFF2-40B4-BE49-F238E27FC236}">
                 <a16:creationId xmlns:a16="http://schemas.microsoft.com/office/drawing/2014/main" id="{889C5094-2138-42F5-A0C3-08D1B1C903C1}"/>
               </a:ext>
             </a:extLst>
           </p:cNvPr>
           <p:cNvSpPr>
-            <a:spLocks xmlns:a="http://schemas.openxmlformats.org/drawingml/2006/main" noGrp="1"/>
-          </p:cNvSpPr>
-          <p:nvPr/>
-        </p:nvSpPr>
-        <p:spPr>
-          <a:xfrm xmlns:a="http://schemas.openxmlformats.org/drawingml/2006/main">
+            <a:spLocks noGrp="1"/>
+          </p:cNvSpPr>
+          <p:nvPr/>
+        </p:nvSpPr>
+        <p:spPr>
+          <a:xfrm>
             <a:off x="1257300" y="1219200"/>
             <a:ext cx="4381500" cy="361950"/>
           </a:xfrm>
-          <a:prstGeom xmlns:a="http://schemas.openxmlformats.org/drawingml/2006/main" prst="rect">
-            <a:avLst/>
-          </a:prstGeom>
-          <a:noFill xmlns:a="http://schemas.openxmlformats.org/drawingml/2006/main"/>
-          <a:ln xmlns:a="http://schemas.openxmlformats.org/drawingml/2006/main" w="0">
+          <a:prstGeom prst="rect">
+            <a:avLst/>
+          </a:prstGeom>
+          <a:noFill/>
+          <a:ln w="0">
             <a:noFill/>
           </a:ln>
         </p:spPr>
         <p:txBody>
-          <a:bodyPr xmlns:a="http://schemas.openxmlformats.org/drawingml/2006/main" lIns="38100" tIns="19050" rIns="38100" bIns="19050" anchor="t">
-            <a:normAutofit fontScale="100000"/>
+          <a:bodyPr lIns="38100" tIns="19050" rIns="38100" bIns="19050" anchor="t">
+            <a:normAutofit/>
           </a:bodyPr>
-          <a:lstStyle xmlns:a="http://schemas.openxmlformats.org/drawingml/2006/main"/>
-          <a:p xmlns:a="http://schemas.openxmlformats.org/drawingml/2006/main">
+          <a:lstStyle/>
+          <a:p>
             <a:pPr algn="l">
               <a:defRPr sz="1725" b="1">
                 <a:solidFill>
@@ -2620,37 +2495,37 @@
       </p:sp>
       <p:sp>
         <p:nvSpPr>
-          <p:cNvPr id="5" name="">
-            <a:extLst xmlns:a="http://schemas.openxmlformats.org/drawingml/2006/main">
+          <p:cNvPr id="5" name="Rectangle 4">
+            <a:extLst>
               <a:ext uri="{FF2B5EF4-FFF2-40B4-BE49-F238E27FC236}">
                 <a16:creationId xmlns:a16="http://schemas.microsoft.com/office/drawing/2014/main" id="{2FA79BE2-1C95-4075-9A3C-2AD964AC3E23}"/>
               </a:ext>
             </a:extLst>
           </p:cNvPr>
           <p:cNvSpPr>
-            <a:spLocks xmlns:a="http://schemas.openxmlformats.org/drawingml/2006/main" noGrp="1"/>
-          </p:cNvSpPr>
-          <p:nvPr/>
-        </p:nvSpPr>
-        <p:spPr>
-          <a:xfrm xmlns:a="http://schemas.openxmlformats.org/drawingml/2006/main">
+            <a:spLocks noGrp="1"/>
+          </p:cNvSpPr>
+          <p:nvPr/>
+        </p:nvSpPr>
+        <p:spPr>
+          <a:xfrm>
             <a:off x="1257300" y="1609725"/>
             <a:ext cx="4429125" cy="619125"/>
           </a:xfrm>
-          <a:prstGeom xmlns:a="http://schemas.openxmlformats.org/drawingml/2006/main" prst="rect">
-            <a:avLst/>
-          </a:prstGeom>
-          <a:noFill xmlns:a="http://schemas.openxmlformats.org/drawingml/2006/main"/>
-          <a:ln xmlns:a="http://schemas.openxmlformats.org/drawingml/2006/main" w="0">
+          <a:prstGeom prst="rect">
+            <a:avLst/>
+          </a:prstGeom>
+          <a:noFill/>
+          <a:ln w="0">
             <a:noFill/>
           </a:ln>
         </p:spPr>
         <p:txBody>
-          <a:bodyPr xmlns:a="http://schemas.openxmlformats.org/drawingml/2006/main" lIns="38100" tIns="19050" rIns="38100" bIns="19050" anchor="t">
-            <a:normAutofit fontScale="100000"/>
+          <a:bodyPr lIns="38100" tIns="19050" rIns="38100" bIns="19050" anchor="t">
+            <a:normAutofit/>
           </a:bodyPr>
-          <a:lstStyle xmlns:a="http://schemas.openxmlformats.org/drawingml/2006/main"/>
-          <a:p xmlns:a="http://schemas.openxmlformats.org/drawingml/2006/main">
+          <a:lstStyle/>
+          <a:p>
             <a:pPr algn="l">
               <a:defRPr sz="1500" b="0">
                 <a:solidFill>
@@ -2677,69 +2552,76 @@
       </p:sp>
       <p:sp>
         <p:nvSpPr>
-          <p:cNvPr id="6" name="">
-            <a:extLst xmlns:a="http://schemas.openxmlformats.org/drawingml/2006/main">
+          <p:cNvPr id="6" name="Rectangle: Rounded Corners 5">
+            <a:extLst>
               <a:ext uri="{FF2B5EF4-FFF2-40B4-BE49-F238E27FC236}">
                 <a16:creationId xmlns:a16="http://schemas.microsoft.com/office/drawing/2014/main" id="{16BA4766-0623-4849-84E6-5D4F02D487AE}"/>
               </a:ext>
             </a:extLst>
           </p:cNvPr>
           <p:cNvSpPr>
-            <a:spLocks xmlns:a="http://schemas.openxmlformats.org/drawingml/2006/main" noGrp="1"/>
-          </p:cNvSpPr>
-          <p:nvPr/>
-        </p:nvSpPr>
-        <p:spPr>
-          <a:xfrm xmlns:a="http://schemas.openxmlformats.org/drawingml/2006/main">
+            <a:spLocks noGrp="1"/>
+          </p:cNvSpPr>
+          <p:nvPr/>
+        </p:nvSpPr>
+        <p:spPr>
+          <a:xfrm>
             <a:off x="590550" y="2524125"/>
             <a:ext cx="514350" cy="514350"/>
           </a:xfrm>
-          <a:prstGeom xmlns:a="http://schemas.openxmlformats.org/drawingml/2006/main" prst="roundRect">
+          <a:prstGeom prst="roundRect">
             <a:avLst>
               <a:gd name="adj" fmla="val 14815"/>
             </a:avLst>
           </a:prstGeom>
-          <a:solidFill xmlns:a="http://schemas.openxmlformats.org/drawingml/2006/main">
+          <a:solidFill>
             <a:srgbClr val="5599D8"/>
           </a:solidFill>
-          <a:ln xmlns:a="http://schemas.openxmlformats.org/drawingml/2006/main" w="0">
+          <a:ln w="0">
             <a:noFill/>
           </a:ln>
         </p:spPr>
-      </p:sp>
-      <p:sp>
-        <p:nvSpPr>
-          <p:cNvPr id="7" name="">
-            <a:extLst xmlns:a="http://schemas.openxmlformats.org/drawingml/2006/main">
+        <p:txBody>
+          <a:bodyPr/>
+          <a:lstStyle/>
+          <a:p>
+            <a:endParaRPr lang="en-GB"/>
+          </a:p>
+        </p:txBody>
+      </p:sp>
+      <p:sp>
+        <p:nvSpPr>
+          <p:cNvPr id="7" name="Rectangle 6">
+            <a:extLst>
               <a:ext uri="{FF2B5EF4-FFF2-40B4-BE49-F238E27FC236}">
                 <a16:creationId xmlns:a16="http://schemas.microsoft.com/office/drawing/2014/main" id="{46F80F18-9078-4BD9-9703-004A05E677B9}"/>
               </a:ext>
             </a:extLst>
           </p:cNvPr>
           <p:cNvSpPr>
-            <a:spLocks xmlns:a="http://schemas.openxmlformats.org/drawingml/2006/main" noGrp="1"/>
-          </p:cNvSpPr>
-          <p:nvPr/>
-        </p:nvSpPr>
-        <p:spPr>
-          <a:xfrm xmlns:a="http://schemas.openxmlformats.org/drawingml/2006/main">
+            <a:spLocks noGrp="1"/>
+          </p:cNvSpPr>
+          <p:nvPr/>
+        </p:nvSpPr>
+        <p:spPr>
+          <a:xfrm>
             <a:off x="638175" y="2571750"/>
             <a:ext cx="419100" cy="419100"/>
           </a:xfrm>
-          <a:prstGeom xmlns:a="http://schemas.openxmlformats.org/drawingml/2006/main" prst="rect">
-            <a:avLst/>
-          </a:prstGeom>
-          <a:noFill xmlns:a="http://schemas.openxmlformats.org/drawingml/2006/main"/>
-          <a:ln xmlns:a="http://schemas.openxmlformats.org/drawingml/2006/main" w="0">
+          <a:prstGeom prst="rect">
+            <a:avLst/>
+          </a:prstGeom>
+          <a:noFill/>
+          <a:ln w="0">
             <a:noFill/>
           </a:ln>
         </p:spPr>
         <p:txBody>
-          <a:bodyPr xmlns:a="http://schemas.openxmlformats.org/drawingml/2006/main" lIns="38100" tIns="19050" rIns="38100" bIns="19050" anchor="ctr">
-            <a:normAutofit fontScale="100000"/>
+          <a:bodyPr lIns="38100" tIns="19050" rIns="38100" bIns="19050" anchor="ctr">
+            <a:normAutofit/>
           </a:bodyPr>
-          <a:lstStyle xmlns:a="http://schemas.openxmlformats.org/drawingml/2006/main"/>
-          <a:p xmlns:a="http://schemas.openxmlformats.org/drawingml/2006/main">
+          <a:lstStyle/>
+          <a:p>
             <a:pPr algn="ctr">
               <a:defRPr sz="1725" b="1">
                 <a:solidFill>
@@ -2766,37 +2648,37 @@
       </p:sp>
       <p:sp>
         <p:nvSpPr>
-          <p:cNvPr id="8" name="">
-            <a:extLst xmlns:a="http://schemas.openxmlformats.org/drawingml/2006/main">
+          <p:cNvPr id="8" name="Rectangle 7">
+            <a:extLst>
               <a:ext uri="{FF2B5EF4-FFF2-40B4-BE49-F238E27FC236}">
                 <a16:creationId xmlns:a16="http://schemas.microsoft.com/office/drawing/2014/main" id="{5A597C87-682E-4151-9D9D-D45500D1FA36}"/>
               </a:ext>
             </a:extLst>
           </p:cNvPr>
           <p:cNvSpPr>
-            <a:spLocks xmlns:a="http://schemas.openxmlformats.org/drawingml/2006/main" noGrp="1"/>
-          </p:cNvSpPr>
-          <p:nvPr/>
-        </p:nvSpPr>
-        <p:spPr>
-          <a:xfrm xmlns:a="http://schemas.openxmlformats.org/drawingml/2006/main">
+            <a:spLocks noGrp="1"/>
+          </p:cNvSpPr>
+          <p:nvPr/>
+        </p:nvSpPr>
+        <p:spPr>
+          <a:xfrm>
             <a:off x="1257300" y="2505075"/>
             <a:ext cx="4381500" cy="361950"/>
           </a:xfrm>
-          <a:prstGeom xmlns:a="http://schemas.openxmlformats.org/drawingml/2006/main" prst="rect">
-            <a:avLst/>
-          </a:prstGeom>
-          <a:noFill xmlns:a="http://schemas.openxmlformats.org/drawingml/2006/main"/>
-          <a:ln xmlns:a="http://schemas.openxmlformats.org/drawingml/2006/main" w="0">
+          <a:prstGeom prst="rect">
+            <a:avLst/>
+          </a:prstGeom>
+          <a:noFill/>
+          <a:ln w="0">
             <a:noFill/>
           </a:ln>
         </p:spPr>
         <p:txBody>
-          <a:bodyPr xmlns:a="http://schemas.openxmlformats.org/drawingml/2006/main" lIns="38100" tIns="19050" rIns="38100" bIns="19050" anchor="t">
-            <a:normAutofit fontScale="100000"/>
+          <a:bodyPr lIns="38100" tIns="19050" rIns="38100" bIns="19050" anchor="t">
+            <a:normAutofit/>
           </a:bodyPr>
-          <a:lstStyle xmlns:a="http://schemas.openxmlformats.org/drawingml/2006/main"/>
-          <a:p xmlns:a="http://schemas.openxmlformats.org/drawingml/2006/main">
+          <a:lstStyle/>
+          <a:p>
             <a:pPr algn="l">
               <a:defRPr sz="1725" b="1">
                 <a:solidFill>
@@ -2823,37 +2705,37 @@
       </p:sp>
       <p:sp>
         <p:nvSpPr>
-          <p:cNvPr id="9" name="">
-            <a:extLst xmlns:a="http://schemas.openxmlformats.org/drawingml/2006/main">
+          <p:cNvPr id="9" name="Rectangle 8">
+            <a:extLst>
               <a:ext uri="{FF2B5EF4-FFF2-40B4-BE49-F238E27FC236}">
                 <a16:creationId xmlns:a16="http://schemas.microsoft.com/office/drawing/2014/main" id="{2B6AA159-7DEB-451D-9879-054C49CDBF2E}"/>
               </a:ext>
             </a:extLst>
           </p:cNvPr>
           <p:cNvSpPr>
-            <a:spLocks xmlns:a="http://schemas.openxmlformats.org/drawingml/2006/main" noGrp="1"/>
-          </p:cNvSpPr>
-          <p:nvPr/>
-        </p:nvSpPr>
-        <p:spPr>
-          <a:xfrm xmlns:a="http://schemas.openxmlformats.org/drawingml/2006/main">
+            <a:spLocks noGrp="1"/>
+          </p:cNvSpPr>
+          <p:nvPr/>
+        </p:nvSpPr>
+        <p:spPr>
+          <a:xfrm>
             <a:off x="1257300" y="2895600"/>
             <a:ext cx="4429125" cy="619125"/>
           </a:xfrm>
-          <a:prstGeom xmlns:a="http://schemas.openxmlformats.org/drawingml/2006/main" prst="rect">
-            <a:avLst/>
-          </a:prstGeom>
-          <a:noFill xmlns:a="http://schemas.openxmlformats.org/drawingml/2006/main"/>
-          <a:ln xmlns:a="http://schemas.openxmlformats.org/drawingml/2006/main" w="0">
+          <a:prstGeom prst="rect">
+            <a:avLst/>
+          </a:prstGeom>
+          <a:noFill/>
+          <a:ln w="0">
             <a:noFill/>
           </a:ln>
         </p:spPr>
         <p:txBody>
-          <a:bodyPr xmlns:a="http://schemas.openxmlformats.org/drawingml/2006/main" lIns="38100" tIns="19050" rIns="38100" bIns="19050" anchor="t">
-            <a:normAutofit fontScale="100000"/>
+          <a:bodyPr lIns="38100" tIns="19050" rIns="38100" bIns="19050" anchor="t">
+            <a:normAutofit/>
           </a:bodyPr>
-          <a:lstStyle xmlns:a="http://schemas.openxmlformats.org/drawingml/2006/main"/>
-          <a:p xmlns:a="http://schemas.openxmlformats.org/drawingml/2006/main">
+          <a:lstStyle/>
+          <a:p>
             <a:pPr algn="l">
               <a:defRPr sz="1500" b="0">
                 <a:solidFill>
@@ -2880,69 +2762,76 @@
       </p:sp>
       <p:sp>
         <p:nvSpPr>
-          <p:cNvPr id="10" name="">
-            <a:extLst xmlns:a="http://schemas.openxmlformats.org/drawingml/2006/main">
+          <p:cNvPr id="10" name="Rectangle: Rounded Corners 9">
+            <a:extLst>
               <a:ext uri="{FF2B5EF4-FFF2-40B4-BE49-F238E27FC236}">
                 <a16:creationId xmlns:a16="http://schemas.microsoft.com/office/drawing/2014/main" id="{62AB73E4-0A27-4129-B302-A9D5603B9FCD}"/>
               </a:ext>
             </a:extLst>
           </p:cNvPr>
           <p:cNvSpPr>
-            <a:spLocks xmlns:a="http://schemas.openxmlformats.org/drawingml/2006/main" noGrp="1"/>
-          </p:cNvSpPr>
-          <p:nvPr/>
-        </p:nvSpPr>
-        <p:spPr>
-          <a:xfrm xmlns:a="http://schemas.openxmlformats.org/drawingml/2006/main">
+            <a:spLocks noGrp="1"/>
+          </p:cNvSpPr>
+          <p:nvPr/>
+        </p:nvSpPr>
+        <p:spPr>
+          <a:xfrm>
             <a:off x="590550" y="3810000"/>
             <a:ext cx="514350" cy="514350"/>
           </a:xfrm>
-          <a:prstGeom xmlns:a="http://schemas.openxmlformats.org/drawingml/2006/main" prst="roundRect">
+          <a:prstGeom prst="roundRect">
             <a:avLst>
               <a:gd name="adj" fmla="val 14815"/>
             </a:avLst>
           </a:prstGeom>
-          <a:solidFill xmlns:a="http://schemas.openxmlformats.org/drawingml/2006/main">
+          <a:solidFill>
             <a:srgbClr val="6CAB4F"/>
           </a:solidFill>
-          <a:ln xmlns:a="http://schemas.openxmlformats.org/drawingml/2006/main" w="0">
+          <a:ln w="0">
             <a:noFill/>
           </a:ln>
         </p:spPr>
-      </p:sp>
-      <p:sp>
-        <p:nvSpPr>
-          <p:cNvPr id="11" name="">
-            <a:extLst xmlns:a="http://schemas.openxmlformats.org/drawingml/2006/main">
+        <p:txBody>
+          <a:bodyPr/>
+          <a:lstStyle/>
+          <a:p>
+            <a:endParaRPr lang="en-GB"/>
+          </a:p>
+        </p:txBody>
+      </p:sp>
+      <p:sp>
+        <p:nvSpPr>
+          <p:cNvPr id="11" name="Rectangle 10">
+            <a:extLst>
               <a:ext uri="{FF2B5EF4-FFF2-40B4-BE49-F238E27FC236}">
                 <a16:creationId xmlns:a16="http://schemas.microsoft.com/office/drawing/2014/main" id="{A6A88CB2-4E5A-47AA-9CD4-E8B0ABD3FEE1}"/>
               </a:ext>
             </a:extLst>
           </p:cNvPr>
           <p:cNvSpPr>
-            <a:spLocks xmlns:a="http://schemas.openxmlformats.org/drawingml/2006/main" noGrp="1"/>
-          </p:cNvSpPr>
-          <p:nvPr/>
-        </p:nvSpPr>
-        <p:spPr>
-          <a:xfrm xmlns:a="http://schemas.openxmlformats.org/drawingml/2006/main">
+            <a:spLocks noGrp="1"/>
+          </p:cNvSpPr>
+          <p:nvPr/>
+        </p:nvSpPr>
+        <p:spPr>
+          <a:xfrm>
             <a:off x="638175" y="3857625"/>
             <a:ext cx="419100" cy="419100"/>
           </a:xfrm>
-          <a:prstGeom xmlns:a="http://schemas.openxmlformats.org/drawingml/2006/main" prst="rect">
-            <a:avLst/>
-          </a:prstGeom>
-          <a:noFill xmlns:a="http://schemas.openxmlformats.org/drawingml/2006/main"/>
-          <a:ln xmlns:a="http://schemas.openxmlformats.org/drawingml/2006/main" w="0">
+          <a:prstGeom prst="rect">
+            <a:avLst/>
+          </a:prstGeom>
+          <a:noFill/>
+          <a:ln w="0">
             <a:noFill/>
           </a:ln>
         </p:spPr>
         <p:txBody>
-          <a:bodyPr xmlns:a="http://schemas.openxmlformats.org/drawingml/2006/main" lIns="38100" tIns="19050" rIns="38100" bIns="19050" anchor="ctr">
-            <a:normAutofit fontScale="100000"/>
+          <a:bodyPr lIns="38100" tIns="19050" rIns="38100" bIns="19050" anchor="ctr">
+            <a:normAutofit/>
           </a:bodyPr>
-          <a:lstStyle xmlns:a="http://schemas.openxmlformats.org/drawingml/2006/main"/>
-          <a:p xmlns:a="http://schemas.openxmlformats.org/drawingml/2006/main">
+          <a:lstStyle/>
+          <a:p>
             <a:pPr algn="ctr">
               <a:defRPr sz="1725" b="1">
                 <a:solidFill>
@@ -2969,37 +2858,37 @@
       </p:sp>
       <p:sp>
         <p:nvSpPr>
-          <p:cNvPr id="12" name="">
-            <a:extLst xmlns:a="http://schemas.openxmlformats.org/drawingml/2006/main">
+          <p:cNvPr id="12" name="Rectangle 11">
+            <a:extLst>
               <a:ext uri="{FF2B5EF4-FFF2-40B4-BE49-F238E27FC236}">
                 <a16:creationId xmlns:a16="http://schemas.microsoft.com/office/drawing/2014/main" id="{B7432703-33D1-4772-B0CB-50746169E21D}"/>
               </a:ext>
             </a:extLst>
           </p:cNvPr>
           <p:cNvSpPr>
-            <a:spLocks xmlns:a="http://schemas.openxmlformats.org/drawingml/2006/main" noGrp="1"/>
-          </p:cNvSpPr>
-          <p:nvPr/>
-        </p:nvSpPr>
-        <p:spPr>
-          <a:xfrm xmlns:a="http://schemas.openxmlformats.org/drawingml/2006/main">
+            <a:spLocks noGrp="1"/>
+          </p:cNvSpPr>
+          <p:nvPr/>
+        </p:nvSpPr>
+        <p:spPr>
+          <a:xfrm>
             <a:off x="1257300" y="3790950"/>
             <a:ext cx="4381500" cy="361950"/>
           </a:xfrm>
-          <a:prstGeom xmlns:a="http://schemas.openxmlformats.org/drawingml/2006/main" prst="rect">
-            <a:avLst/>
-          </a:prstGeom>
-          <a:noFill xmlns:a="http://schemas.openxmlformats.org/drawingml/2006/main"/>
-          <a:ln xmlns:a="http://schemas.openxmlformats.org/drawingml/2006/main" w="0">
+          <a:prstGeom prst="rect">
+            <a:avLst/>
+          </a:prstGeom>
+          <a:noFill/>
+          <a:ln w="0">
             <a:noFill/>
           </a:ln>
         </p:spPr>
         <p:txBody>
-          <a:bodyPr xmlns:a="http://schemas.openxmlformats.org/drawingml/2006/main" lIns="38100" tIns="19050" rIns="38100" bIns="19050" anchor="t">
-            <a:normAutofit fontScale="100000"/>
+          <a:bodyPr lIns="38100" tIns="19050" rIns="38100" bIns="19050" anchor="t">
+            <a:normAutofit/>
           </a:bodyPr>
-          <a:lstStyle xmlns:a="http://schemas.openxmlformats.org/drawingml/2006/main"/>
-          <a:p xmlns:a="http://schemas.openxmlformats.org/drawingml/2006/main">
+          <a:lstStyle/>
+          <a:p>
             <a:pPr algn="l">
               <a:defRPr sz="1725" b="1">
                 <a:solidFill>
@@ -3026,37 +2915,37 @@
       </p:sp>
       <p:sp>
         <p:nvSpPr>
-          <p:cNvPr id="13" name="">
-            <a:extLst xmlns:a="http://schemas.openxmlformats.org/drawingml/2006/main">
+          <p:cNvPr id="13" name="Rectangle 12">
+            <a:extLst>
               <a:ext uri="{FF2B5EF4-FFF2-40B4-BE49-F238E27FC236}">
                 <a16:creationId xmlns:a16="http://schemas.microsoft.com/office/drawing/2014/main" id="{56BD7A57-E785-46C7-A7E9-205FFC558098}"/>
               </a:ext>
             </a:extLst>
           </p:cNvPr>
           <p:cNvSpPr>
-            <a:spLocks xmlns:a="http://schemas.openxmlformats.org/drawingml/2006/main" noGrp="1"/>
-          </p:cNvSpPr>
-          <p:nvPr/>
-        </p:nvSpPr>
-        <p:spPr>
-          <a:xfrm xmlns:a="http://schemas.openxmlformats.org/drawingml/2006/main">
+            <a:spLocks noGrp="1"/>
+          </p:cNvSpPr>
+          <p:nvPr/>
+        </p:nvSpPr>
+        <p:spPr>
+          <a:xfrm>
             <a:off x="1257300" y="4181475"/>
             <a:ext cx="4429125" cy="619125"/>
           </a:xfrm>
-          <a:prstGeom xmlns:a="http://schemas.openxmlformats.org/drawingml/2006/main" prst="rect">
-            <a:avLst/>
-          </a:prstGeom>
-          <a:noFill xmlns:a="http://schemas.openxmlformats.org/drawingml/2006/main"/>
-          <a:ln xmlns:a="http://schemas.openxmlformats.org/drawingml/2006/main" w="0">
+          <a:prstGeom prst="rect">
+            <a:avLst/>
+          </a:prstGeom>
+          <a:noFill/>
+          <a:ln w="0">
             <a:noFill/>
           </a:ln>
         </p:spPr>
         <p:txBody>
-          <a:bodyPr xmlns:a="http://schemas.openxmlformats.org/drawingml/2006/main" lIns="38100" tIns="19050" rIns="38100" bIns="19050" anchor="t">
-            <a:normAutofit fontScale="100000"/>
+          <a:bodyPr lIns="38100" tIns="19050" rIns="38100" bIns="19050" anchor="t">
+            <a:normAutofit/>
           </a:bodyPr>
-          <a:lstStyle xmlns:a="http://schemas.openxmlformats.org/drawingml/2006/main"/>
-          <a:p xmlns:a="http://schemas.openxmlformats.org/drawingml/2006/main">
+          <a:lstStyle/>
+          <a:p>
             <a:pPr algn="l">
               <a:defRPr sz="1500" b="0">
                 <a:solidFill>
@@ -3083,59 +2972,59 @@
       </p:sp>
       <p:pic>
         <p:nvPicPr>
-          <p:cNvPr id="31" name=""/>
+          <p:cNvPr id="31" name="Picture 30"/>
           <p:cNvPicPr>
-            <a:picLocks xmlns:a="http://schemas.openxmlformats.org/drawingml/2006/main" noChangeAspect="1"/>
+            <a:picLocks noChangeAspect="1"/>
           </p:cNvPicPr>
           <p:nvPr/>
         </p:nvPicPr>
         <p:blipFill>
-          <a:blip xmlns:r="http://schemas.openxmlformats.org/officeDocument/2006/relationships" xmlns:a="http://schemas.openxmlformats.org/drawingml/2006/main" r:embed="R5c4ae0d5c1964570"/>
-          <a:stretch xmlns:a="http://schemas.openxmlformats.org/drawingml/2006/main"/>
+          <a:blip r:embed="rId3"/>
+          <a:stretch/>
         </p:blipFill>
         <p:spPr>
-          <a:xfrm xmlns:a="http://schemas.openxmlformats.org/drawingml/2006/main">
+          <a:xfrm>
             <a:off x="6572250" y="1520598"/>
             <a:ext cx="4762500" cy="2721429"/>
           </a:xfrm>
-          <a:prstGeom xmlns:a="http://schemas.openxmlformats.org/drawingml/2006/main" prst="rect">
+          <a:prstGeom prst="rect">
             <a:avLst/>
           </a:prstGeom>
         </p:spPr>
       </p:pic>
       <p:sp>
         <p:nvSpPr>
-          <p:cNvPr id="15" name="">
-            <a:extLst xmlns:a="http://schemas.openxmlformats.org/drawingml/2006/main">
+          <p:cNvPr id="15" name="Rectangle 14">
+            <a:extLst>
               <a:ext uri="{FF2B5EF4-FFF2-40B4-BE49-F238E27FC236}">
                 <a16:creationId xmlns:a16="http://schemas.microsoft.com/office/drawing/2014/main" id="{FE858D13-4991-4AFE-9E8A-DEFB3864B9BC}"/>
               </a:ext>
             </a:extLst>
           </p:cNvPr>
           <p:cNvSpPr>
-            <a:spLocks xmlns:a="http://schemas.openxmlformats.org/drawingml/2006/main" noGrp="1"/>
-          </p:cNvSpPr>
-          <p:nvPr/>
-        </p:nvSpPr>
-        <p:spPr>
-          <a:xfrm xmlns:a="http://schemas.openxmlformats.org/drawingml/2006/main">
+            <a:spLocks noGrp="1"/>
+          </p:cNvSpPr>
+          <p:nvPr/>
+        </p:nvSpPr>
+        <p:spPr>
+          <a:xfrm>
             <a:off x="6667500" y="4686300"/>
             <a:ext cx="4572000" cy="781050"/>
           </a:xfrm>
-          <a:prstGeom xmlns:a="http://schemas.openxmlformats.org/drawingml/2006/main" prst="rect">
-            <a:avLst/>
-          </a:prstGeom>
-          <a:noFill xmlns:a="http://schemas.openxmlformats.org/drawingml/2006/main"/>
-          <a:ln xmlns:a="http://schemas.openxmlformats.org/drawingml/2006/main" w="0">
+          <a:prstGeom prst="rect">
+            <a:avLst/>
+          </a:prstGeom>
+          <a:noFill/>
+          <a:ln w="0">
             <a:noFill/>
           </a:ln>
         </p:spPr>
         <p:txBody>
-          <a:bodyPr xmlns:a="http://schemas.openxmlformats.org/drawingml/2006/main" lIns="38100" tIns="19050" rIns="38100" bIns="19050" anchor="t">
-            <a:normAutofit fontScale="100000"/>
+          <a:bodyPr lIns="38100" tIns="19050" rIns="38100" bIns="19050" anchor="t">
+            <a:normAutofit/>
           </a:bodyPr>
-          <a:lstStyle xmlns:a="http://schemas.openxmlformats.org/drawingml/2006/main"/>
-          <a:p xmlns:a="http://schemas.openxmlformats.org/drawingml/2006/main">
+          <a:lstStyle/>
+          <a:p>
             <a:pPr algn="ctr">
               <a:defRPr sz="1500" b="0">
                 <a:solidFill>
@@ -3162,63 +3051,77 @@
       </p:sp>
       <p:sp>
         <p:nvSpPr>
-          <p:cNvPr id="16" name="">
-            <a:extLst xmlns:a="http://schemas.openxmlformats.org/drawingml/2006/main">
+          <p:cNvPr id="16" name="Rectangle 15">
+            <a:extLst>
               <a:ext uri="{FF2B5EF4-FFF2-40B4-BE49-F238E27FC236}">
                 <a16:creationId xmlns:a16="http://schemas.microsoft.com/office/drawing/2014/main" id="{7AC5FC05-2F5A-4D1C-B3D5-6583D57F48AA}"/>
               </a:ext>
             </a:extLst>
           </p:cNvPr>
           <p:cNvSpPr>
-            <a:spLocks xmlns:a="http://schemas.openxmlformats.org/drawingml/2006/main" noGrp="1"/>
-          </p:cNvSpPr>
-          <p:nvPr/>
-        </p:nvSpPr>
-        <p:spPr>
-          <a:xfrm xmlns:a="http://schemas.openxmlformats.org/drawingml/2006/main">
+            <a:spLocks noGrp="1"/>
+          </p:cNvSpPr>
+          <p:nvPr/>
+        </p:nvSpPr>
+        <p:spPr>
+          <a:xfrm>
             <a:off x="552450" y="6429375"/>
             <a:ext cx="11087100" cy="47625"/>
           </a:xfrm>
-          <a:prstGeom xmlns:a="http://schemas.openxmlformats.org/drawingml/2006/main" prst="rect">
-            <a:avLst/>
-          </a:prstGeom>
-          <a:solidFill xmlns:a="http://schemas.openxmlformats.org/drawingml/2006/main">
+          <a:prstGeom prst="rect">
+            <a:avLst/>
+          </a:prstGeom>
+          <a:solidFill>
             <a:srgbClr val="F57C24"/>
           </a:solidFill>
-          <a:ln xmlns:a="http://schemas.openxmlformats.org/drawingml/2006/main" w="0">
+          <a:ln w="0">
             <a:noFill/>
           </a:ln>
         </p:spPr>
-      </p:sp>
-      <p:sp>
-        <p:nvSpPr>
-          <p:cNvPr id="17" name="">
-            <a:extLst xmlns:a="http://schemas.openxmlformats.org/drawingml/2006/main">
+        <p:txBody>
+          <a:bodyPr/>
+          <a:lstStyle/>
+          <a:p>
+            <a:endParaRPr lang="en-GB"/>
+          </a:p>
+        </p:txBody>
+      </p:sp>
+      <p:sp>
+        <p:nvSpPr>
+          <p:cNvPr id="17" name="Rectangle 16">
+            <a:extLst>
               <a:ext uri="{FF2B5EF4-FFF2-40B4-BE49-F238E27FC236}">
                 <a16:creationId xmlns:a16="http://schemas.microsoft.com/office/drawing/2014/main" id="{63574032-C560-4EA8-B7E6-1D43DEAC6193}"/>
               </a:ext>
             </a:extLst>
           </p:cNvPr>
           <p:cNvSpPr>
-            <a:spLocks xmlns:a="http://schemas.openxmlformats.org/drawingml/2006/main" noGrp="1"/>
-          </p:cNvSpPr>
-          <p:nvPr/>
-        </p:nvSpPr>
-        <p:spPr>
-          <a:xfrm xmlns:a="http://schemas.openxmlformats.org/drawingml/2006/main">
+            <a:spLocks noGrp="1"/>
+          </p:cNvSpPr>
+          <p:nvPr/>
+        </p:nvSpPr>
+        <p:spPr>
+          <a:xfrm>
             <a:off x="4286250" y="6429375"/>
             <a:ext cx="7353300" cy="47625"/>
           </a:xfrm>
-          <a:prstGeom xmlns:a="http://schemas.openxmlformats.org/drawingml/2006/main" prst="rect">
-            <a:avLst/>
-          </a:prstGeom>
-          <a:solidFill xmlns:a="http://schemas.openxmlformats.org/drawingml/2006/main">
+          <a:prstGeom prst="rect">
+            <a:avLst/>
+          </a:prstGeom>
+          <a:solidFill>
             <a:srgbClr val="77A9D7"/>
           </a:solidFill>
-          <a:ln xmlns:a="http://schemas.openxmlformats.org/drawingml/2006/main" w="0">
+          <a:ln w="0">
             <a:noFill/>
           </a:ln>
         </p:spPr>
+        <p:txBody>
+          <a:bodyPr/>
+          <a:lstStyle/>
+          <a:p>
+            <a:endParaRPr lang="en-GB"/>
+          </a:p>
+        </p:txBody>
       </p:sp>
     </p:spTree>
     <p:extLst>
@@ -3227,17 +3130,21 @@
       </p:ext>
     </p:extLst>
   </p:cSld>
+  <p:clrMapOvr>
+    <a:masterClrMapping/>
+  </p:clrMapOvr>
 </p:sld>
 </file>
 
 <file path=ppt/slides/slide4.xml><?xml version="1.0" encoding="utf-8"?>
-<p:sld xmlns:p="http://schemas.openxmlformats.org/presentationml/2006/main">
+<p:sld xmlns:a="http://schemas.openxmlformats.org/drawingml/2006/main" xmlns:r="http://schemas.openxmlformats.org/officeDocument/2006/relationships" xmlns:p="http://schemas.openxmlformats.org/presentationml/2006/main">
   <p:cSld>
     <p:bg>
       <p:bgPr>
-        <a:solidFill xmlns:a="http://schemas.openxmlformats.org/drawingml/2006/main">
+        <a:solidFill>
           <a:srgbClr val="FFFFFF"/>
         </a:solidFill>
+        <a:effectLst/>
       </p:bgPr>
     </p:bg>
     <p:spTree>
@@ -3247,41 +3154,46 @@
         <p:nvPr/>
       </p:nvGrpSpPr>
       <p:grpSpPr>
-        <a:xfrm xmlns:a="http://schemas.openxmlformats.org/drawingml/2006/main"/>
+        <a:xfrm>
+          <a:off x="0" y="0"/>
+          <a:ext cx="0" cy="0"/>
+          <a:chOff x="0" y="0"/>
+          <a:chExt cx="0" cy="0"/>
+        </a:xfrm>
       </p:grpSpPr>
       <p:sp>
         <p:nvSpPr>
-          <p:cNvPr id="12" name="">
-            <a:extLst xmlns:a="http://schemas.openxmlformats.org/drawingml/2006/main">
+          <p:cNvPr id="12" name="Rectangle 11">
+            <a:extLst>
               <a:ext uri="{FF2B5EF4-FFF2-40B4-BE49-F238E27FC236}">
                 <a16:creationId xmlns:a16="http://schemas.microsoft.com/office/drawing/2014/main" id="{C61121DC-FD36-445E-B433-8342CA536199}"/>
               </a:ext>
             </a:extLst>
           </p:cNvPr>
           <p:cNvSpPr>
-            <a:spLocks xmlns:a="http://schemas.openxmlformats.org/drawingml/2006/main" noGrp="1"/>
-          </p:cNvSpPr>
-          <p:nvPr/>
-        </p:nvSpPr>
-        <p:spPr>
-          <a:xfrm xmlns:a="http://schemas.openxmlformats.org/drawingml/2006/main">
+            <a:spLocks noGrp="1"/>
+          </p:cNvSpPr>
+          <p:nvPr/>
+        </p:nvSpPr>
+        <p:spPr>
+          <a:xfrm>
             <a:off x="552450" y="333375"/>
             <a:ext cx="11087100" cy="704850"/>
           </a:xfrm>
-          <a:prstGeom xmlns:a="http://schemas.openxmlformats.org/drawingml/2006/main" prst="rect">
-            <a:avLst/>
-          </a:prstGeom>
-          <a:noFill xmlns:a="http://schemas.openxmlformats.org/drawingml/2006/main"/>
-          <a:ln xmlns:a="http://schemas.openxmlformats.org/drawingml/2006/main" w="0">
+          <a:prstGeom prst="rect">
+            <a:avLst/>
+          </a:prstGeom>
+          <a:noFill/>
+          <a:ln w="0">
             <a:noFill/>
           </a:ln>
         </p:spPr>
         <p:txBody>
-          <a:bodyPr xmlns:a="http://schemas.openxmlformats.org/drawingml/2006/main" lIns="38100" tIns="19050" rIns="38100" bIns="19050" anchor="t">
-            <a:normAutofit fontScale="100000"/>
+          <a:bodyPr lIns="38100" tIns="19050" rIns="38100" bIns="19050" anchor="t">
+            <a:normAutofit/>
           </a:bodyPr>
-          <a:lstStyle xmlns:a="http://schemas.openxmlformats.org/drawingml/2006/main"/>
-          <a:p xmlns:a="http://schemas.openxmlformats.org/drawingml/2006/main">
+          <a:lstStyle/>
+          <a:p>
             <a:pPr algn="l">
               <a:defRPr sz="2550" b="0">
                 <a:solidFill>
@@ -3308,71 +3220,78 @@
       </p:sp>
       <p:sp>
         <p:nvSpPr>
-          <p:cNvPr id="2" name="">
-            <a:extLst xmlns:a="http://schemas.openxmlformats.org/drawingml/2006/main">
+          <p:cNvPr id="2" name="Rectangle: Rounded Corners 1">
+            <a:extLst>
               <a:ext uri="{FF2B5EF4-FFF2-40B4-BE49-F238E27FC236}">
                 <a16:creationId xmlns:a16="http://schemas.microsoft.com/office/drawing/2014/main" id="{7ACF1939-0D60-4B99-B47A-2D078CF99A1D}"/>
               </a:ext>
             </a:extLst>
           </p:cNvPr>
           <p:cNvSpPr>
-            <a:spLocks xmlns:a="http://schemas.openxmlformats.org/drawingml/2006/main" noGrp="1"/>
-          </p:cNvSpPr>
-          <p:nvPr/>
-        </p:nvSpPr>
-        <p:spPr>
-          <a:xfrm xmlns:a="http://schemas.openxmlformats.org/drawingml/2006/main">
+            <a:spLocks noGrp="1"/>
+          </p:cNvSpPr>
+          <p:nvPr/>
+        </p:nvSpPr>
+        <p:spPr>
+          <a:xfrm>
             <a:off x="590550" y="1285875"/>
             <a:ext cx="5095875" cy="3810000"/>
           </a:xfrm>
-          <a:prstGeom xmlns:a="http://schemas.openxmlformats.org/drawingml/2006/main" prst="roundRect">
+          <a:prstGeom prst="roundRect">
             <a:avLst>
               <a:gd name="adj" fmla="val 2000"/>
             </a:avLst>
           </a:prstGeom>
-          <a:solidFill xmlns:a="http://schemas.openxmlformats.org/drawingml/2006/main">
+          <a:solidFill>
             <a:srgbClr val="F7F7F7"/>
           </a:solidFill>
-          <a:ln xmlns:a="http://schemas.openxmlformats.org/drawingml/2006/main" w="9525">
+          <a:ln w="9525">
             <a:solidFill>
               <a:srgbClr val="DDDDDD"/>
             </a:solidFill>
           </a:ln>
         </p:spPr>
-      </p:sp>
-      <p:sp>
-        <p:nvSpPr>
-          <p:cNvPr id="3" name="">
-            <a:extLst xmlns:a="http://schemas.openxmlformats.org/drawingml/2006/main">
+        <p:txBody>
+          <a:bodyPr/>
+          <a:lstStyle/>
+          <a:p>
+            <a:endParaRPr lang="en-GB"/>
+          </a:p>
+        </p:txBody>
+      </p:sp>
+      <p:sp>
+        <p:nvSpPr>
+          <p:cNvPr id="3" name="Rectangle 2">
+            <a:extLst>
               <a:ext uri="{FF2B5EF4-FFF2-40B4-BE49-F238E27FC236}">
                 <a16:creationId xmlns:a16="http://schemas.microsoft.com/office/drawing/2014/main" id="{36628FB2-BD33-4802-B6CC-F712F9536C2E}"/>
               </a:ext>
             </a:extLst>
           </p:cNvPr>
           <p:cNvSpPr>
-            <a:spLocks xmlns:a="http://schemas.openxmlformats.org/drawingml/2006/main" noGrp="1"/>
-          </p:cNvSpPr>
-          <p:nvPr/>
-        </p:nvSpPr>
-        <p:spPr>
-          <a:xfrm xmlns:a="http://schemas.openxmlformats.org/drawingml/2006/main">
+            <a:spLocks noGrp="1"/>
+          </p:cNvSpPr>
+          <p:nvPr/>
+        </p:nvSpPr>
+        <p:spPr>
+          <a:xfrm>
             <a:off x="857250" y="1562100"/>
             <a:ext cx="4524375" cy="428625"/>
           </a:xfrm>
-          <a:prstGeom xmlns:a="http://schemas.openxmlformats.org/drawingml/2006/main" prst="rect">
-            <a:avLst/>
-          </a:prstGeom>
-          <a:noFill xmlns:a="http://schemas.openxmlformats.org/drawingml/2006/main"/>
-          <a:ln xmlns:a="http://schemas.openxmlformats.org/drawingml/2006/main" w="0">
+          <a:prstGeom prst="rect">
+            <a:avLst/>
+          </a:prstGeom>
+          <a:noFill/>
+          <a:ln w="0">
             <a:noFill/>
           </a:ln>
         </p:spPr>
         <p:txBody>
-          <a:bodyPr xmlns:a="http://schemas.openxmlformats.org/drawingml/2006/main" lIns="38100" tIns="19050" rIns="38100" bIns="19050" anchor="t">
-            <a:normAutofit fontScale="100000"/>
+          <a:bodyPr lIns="38100" tIns="19050" rIns="38100" bIns="19050" anchor="t">
+            <a:normAutofit/>
           </a:bodyPr>
-          <a:lstStyle xmlns:a="http://schemas.openxmlformats.org/drawingml/2006/main"/>
-          <a:p xmlns:a="http://schemas.openxmlformats.org/drawingml/2006/main">
+          <a:lstStyle/>
+          <a:p>
             <a:pPr algn="l">
               <a:defRPr sz="2025" b="1">
                 <a:solidFill>
@@ -3399,37 +3318,37 @@
       </p:sp>
       <p:sp>
         <p:nvSpPr>
-          <p:cNvPr id="4" name="">
-            <a:extLst xmlns:a="http://schemas.openxmlformats.org/drawingml/2006/main">
+          <p:cNvPr id="4" name="Rectangle 3">
+            <a:extLst>
               <a:ext uri="{FF2B5EF4-FFF2-40B4-BE49-F238E27FC236}">
                 <a16:creationId xmlns:a16="http://schemas.microsoft.com/office/drawing/2014/main" id="{711B9327-7C92-4618-9780-9F71DF7A6B09}"/>
               </a:ext>
             </a:extLst>
           </p:cNvPr>
           <p:cNvSpPr>
-            <a:spLocks xmlns:a="http://schemas.openxmlformats.org/drawingml/2006/main" noGrp="1"/>
-          </p:cNvSpPr>
-          <p:nvPr/>
-        </p:nvSpPr>
-        <p:spPr>
-          <a:xfrm xmlns:a="http://schemas.openxmlformats.org/drawingml/2006/main">
+            <a:spLocks noGrp="1"/>
+          </p:cNvSpPr>
+          <p:nvPr/>
+        </p:nvSpPr>
+        <p:spPr>
+          <a:xfrm>
             <a:off x="857250" y="2190750"/>
             <a:ext cx="4429125" cy="2095500"/>
           </a:xfrm>
-          <a:prstGeom xmlns:a="http://schemas.openxmlformats.org/drawingml/2006/main" prst="rect">
-            <a:avLst/>
-          </a:prstGeom>
-          <a:noFill xmlns:a="http://schemas.openxmlformats.org/drawingml/2006/main"/>
-          <a:ln xmlns:a="http://schemas.openxmlformats.org/drawingml/2006/main" w="0">
+          <a:prstGeom prst="rect">
+            <a:avLst/>
+          </a:prstGeom>
+          <a:noFill/>
+          <a:ln w="0">
             <a:noFill/>
           </a:ln>
         </p:spPr>
         <p:txBody>
-          <a:bodyPr xmlns:a="http://schemas.openxmlformats.org/drawingml/2006/main" lIns="28575" tIns="19050" rIns="28575" bIns="19050" anchor="t">
-            <a:normAutofit fontScale="100000"/>
+          <a:bodyPr lIns="28575" tIns="19050" rIns="28575" bIns="19050" anchor="t">
+            <a:normAutofit/>
           </a:bodyPr>
-          <a:lstStyle xmlns:a="http://schemas.openxmlformats.org/drawingml/2006/main"/>
-          <a:p xmlns:a="http://schemas.openxmlformats.org/drawingml/2006/main">
+          <a:lstStyle/>
+          <a:p>
             <a:pPr marL="254000" indent="-152400" algn="l">
               <a:spcAft>
                 <a:spcPts val="550"/>
@@ -3456,7 +3375,7 @@
               <a:t>Ανοίγουμε τις ρυθμίσεις του φυλλομετρητή.</a:t>
             </a:r>
           </a:p>
-          <a:p xmlns:a="http://schemas.openxmlformats.org/drawingml/2006/main">
+          <a:p>
             <a:pPr marL="254000" indent="-152400" algn="l">
               <a:spcAft>
                 <a:spcPts val="550"/>
@@ -3483,7 +3402,7 @@
               <a:t>Ορίζουμε τη διεύθυνση που θέλουμε ως αρχική σελίδα.</a:t>
             </a:r>
           </a:p>
-          <a:p xmlns:a="http://schemas.openxmlformats.org/drawingml/2006/main">
+          <a:p>
             <a:pPr marL="254000" indent="-152400" algn="l">
               <a:spcAft>
                 <a:spcPts val="550"/>
@@ -3514,93 +3433,100 @@
       </p:sp>
       <p:pic>
         <p:nvPicPr>
-          <p:cNvPr id="16" name=""/>
+          <p:cNvPr id="16" name="Picture 15"/>
           <p:cNvPicPr>
-            <a:picLocks xmlns:a="http://schemas.openxmlformats.org/drawingml/2006/main" noChangeAspect="1"/>
+            <a:picLocks noChangeAspect="1"/>
           </p:cNvPicPr>
           <p:nvPr/>
         </p:nvPicPr>
         <p:blipFill>
-          <a:blip xmlns:r="http://schemas.openxmlformats.org/officeDocument/2006/relationships" xmlns:a="http://schemas.openxmlformats.org/drawingml/2006/main" r:embed="R46222f4a652445ed"/>
-          <a:stretch xmlns:a="http://schemas.openxmlformats.org/drawingml/2006/main"/>
+          <a:blip r:embed="rId3"/>
+          <a:stretch/>
         </p:blipFill>
         <p:spPr>
-          <a:xfrm xmlns:a="http://schemas.openxmlformats.org/drawingml/2006/main">
+          <a:xfrm>
             <a:off x="4762500" y="1622425"/>
             <a:ext cx="400050" cy="355600"/>
           </a:xfrm>
-          <a:prstGeom xmlns:a="http://schemas.openxmlformats.org/drawingml/2006/main" prst="rect">
+          <a:prstGeom prst="rect">
             <a:avLst/>
           </a:prstGeom>
         </p:spPr>
       </p:pic>
       <p:sp>
         <p:nvSpPr>
-          <p:cNvPr id="6" name="">
-            <a:extLst xmlns:a="http://schemas.openxmlformats.org/drawingml/2006/main">
+          <p:cNvPr id="6" name="Rectangle: Rounded Corners 5">
+            <a:extLst>
               <a:ext uri="{FF2B5EF4-FFF2-40B4-BE49-F238E27FC236}">
                 <a16:creationId xmlns:a16="http://schemas.microsoft.com/office/drawing/2014/main" id="{B3316F25-9E90-4545-88D2-FE5AF6B89A6C}"/>
               </a:ext>
             </a:extLst>
           </p:cNvPr>
           <p:cNvSpPr>
-            <a:spLocks xmlns:a="http://schemas.openxmlformats.org/drawingml/2006/main" noGrp="1"/>
-          </p:cNvSpPr>
-          <p:nvPr/>
-        </p:nvSpPr>
-        <p:spPr>
-          <a:xfrm xmlns:a="http://schemas.openxmlformats.org/drawingml/2006/main">
+            <a:spLocks noGrp="1"/>
+          </p:cNvSpPr>
+          <p:nvPr/>
+        </p:nvSpPr>
+        <p:spPr>
+          <a:xfrm>
             <a:off x="6000750" y="1285875"/>
             <a:ext cx="5095875" cy="3810000"/>
           </a:xfrm>
-          <a:prstGeom xmlns:a="http://schemas.openxmlformats.org/drawingml/2006/main" prst="roundRect">
+          <a:prstGeom prst="roundRect">
             <a:avLst>
               <a:gd name="adj" fmla="val 2000"/>
             </a:avLst>
           </a:prstGeom>
-          <a:solidFill xmlns:a="http://schemas.openxmlformats.org/drawingml/2006/main">
+          <a:solidFill>
             <a:srgbClr val="F7F7F7"/>
           </a:solidFill>
-          <a:ln xmlns:a="http://schemas.openxmlformats.org/drawingml/2006/main" w="9525">
+          <a:ln w="9525">
             <a:solidFill>
               <a:srgbClr val="DDDDDD"/>
             </a:solidFill>
           </a:ln>
         </p:spPr>
-      </p:sp>
-      <p:sp>
-        <p:nvSpPr>
-          <p:cNvPr id="7" name="">
-            <a:extLst xmlns:a="http://schemas.openxmlformats.org/drawingml/2006/main">
+        <p:txBody>
+          <a:bodyPr/>
+          <a:lstStyle/>
+          <a:p>
+            <a:endParaRPr lang="en-GB"/>
+          </a:p>
+        </p:txBody>
+      </p:sp>
+      <p:sp>
+        <p:nvSpPr>
+          <p:cNvPr id="7" name="Rectangle 6">
+            <a:extLst>
               <a:ext uri="{FF2B5EF4-FFF2-40B4-BE49-F238E27FC236}">
                 <a16:creationId xmlns:a16="http://schemas.microsoft.com/office/drawing/2014/main" id="{89F68C33-3206-4D1C-8D79-DF7AD5A877DF}"/>
               </a:ext>
             </a:extLst>
           </p:cNvPr>
           <p:cNvSpPr>
-            <a:spLocks xmlns:a="http://schemas.openxmlformats.org/drawingml/2006/main" noGrp="1"/>
-          </p:cNvSpPr>
-          <p:nvPr/>
-        </p:nvSpPr>
-        <p:spPr>
-          <a:xfrm xmlns:a="http://schemas.openxmlformats.org/drawingml/2006/main">
+            <a:spLocks noGrp="1"/>
+          </p:cNvSpPr>
+          <p:nvPr/>
+        </p:nvSpPr>
+        <p:spPr>
+          <a:xfrm>
             <a:off x="6267450" y="1562100"/>
             <a:ext cx="4524375" cy="428625"/>
           </a:xfrm>
-          <a:prstGeom xmlns:a="http://schemas.openxmlformats.org/drawingml/2006/main" prst="rect">
-            <a:avLst/>
-          </a:prstGeom>
-          <a:noFill xmlns:a="http://schemas.openxmlformats.org/drawingml/2006/main"/>
-          <a:ln xmlns:a="http://schemas.openxmlformats.org/drawingml/2006/main" w="0">
+          <a:prstGeom prst="rect">
+            <a:avLst/>
+          </a:prstGeom>
+          <a:noFill/>
+          <a:ln w="0">
             <a:noFill/>
           </a:ln>
         </p:spPr>
         <p:txBody>
-          <a:bodyPr xmlns:a="http://schemas.openxmlformats.org/drawingml/2006/main" lIns="38100" tIns="19050" rIns="38100" bIns="19050" anchor="t">
-            <a:normAutofit fontScale="100000"/>
+          <a:bodyPr lIns="38100" tIns="19050" rIns="38100" bIns="19050" anchor="t">
+            <a:normAutofit/>
           </a:bodyPr>
-          <a:lstStyle xmlns:a="http://schemas.openxmlformats.org/drawingml/2006/main"/>
-          <a:p xmlns:a="http://schemas.openxmlformats.org/drawingml/2006/main">
+          <a:lstStyle/>
+          <a:p>
             <a:pPr algn="l">
               <a:defRPr sz="2025" b="1">
                 <a:solidFill>
@@ -3627,37 +3553,37 @@
       </p:sp>
       <p:sp>
         <p:nvSpPr>
-          <p:cNvPr id="8" name="">
-            <a:extLst xmlns:a="http://schemas.openxmlformats.org/drawingml/2006/main">
+          <p:cNvPr id="8" name="Rectangle 7">
+            <a:extLst>
               <a:ext uri="{FF2B5EF4-FFF2-40B4-BE49-F238E27FC236}">
                 <a16:creationId xmlns:a16="http://schemas.microsoft.com/office/drawing/2014/main" id="{D3FFBF0F-2F2C-44EA-AD5F-6957E8695B19}"/>
               </a:ext>
             </a:extLst>
           </p:cNvPr>
           <p:cNvSpPr>
-            <a:spLocks xmlns:a="http://schemas.openxmlformats.org/drawingml/2006/main" noGrp="1"/>
-          </p:cNvSpPr>
-          <p:nvPr/>
-        </p:nvSpPr>
-        <p:spPr>
-          <a:xfrm xmlns:a="http://schemas.openxmlformats.org/drawingml/2006/main">
+            <a:spLocks noGrp="1"/>
+          </p:cNvSpPr>
+          <p:nvPr/>
+        </p:nvSpPr>
+        <p:spPr>
+          <a:xfrm>
             <a:off x="6267450" y="2190750"/>
             <a:ext cx="4429125" cy="2095500"/>
           </a:xfrm>
-          <a:prstGeom xmlns:a="http://schemas.openxmlformats.org/drawingml/2006/main" prst="rect">
-            <a:avLst/>
-          </a:prstGeom>
-          <a:noFill xmlns:a="http://schemas.openxmlformats.org/drawingml/2006/main"/>
-          <a:ln xmlns:a="http://schemas.openxmlformats.org/drawingml/2006/main" w="0">
+          <a:prstGeom prst="rect">
+            <a:avLst/>
+          </a:prstGeom>
+          <a:noFill/>
+          <a:ln w="0">
             <a:noFill/>
           </a:ln>
         </p:spPr>
         <p:txBody>
-          <a:bodyPr xmlns:a="http://schemas.openxmlformats.org/drawingml/2006/main" lIns="28575" tIns="19050" rIns="28575" bIns="19050" anchor="t">
-            <a:normAutofit fontScale="100000"/>
+          <a:bodyPr lIns="28575" tIns="19050" rIns="28575" bIns="19050" anchor="t">
+            <a:normAutofit/>
           </a:bodyPr>
-          <a:lstStyle xmlns:a="http://schemas.openxmlformats.org/drawingml/2006/main"/>
-          <a:p xmlns:a="http://schemas.openxmlformats.org/drawingml/2006/main">
+          <a:lstStyle/>
+          <a:p>
             <a:pPr marL="254000" indent="-152400" algn="l">
               <a:spcAft>
                 <a:spcPts val="550"/>
@@ -3684,7 +3610,7 @@
               <a:t>Ανοίγουμε την ιστοσελίδα που θέλουμε.</a:t>
             </a:r>
           </a:p>
-          <a:p xmlns:a="http://schemas.openxmlformats.org/drawingml/2006/main">
+          <a:p>
             <a:pPr marL="254000" indent="-152400" algn="l">
               <a:spcAft>
                 <a:spcPts val="550"/>
@@ -3711,7 +3637,7 @@
               <a:t>Πατάμε το εικονίδιο Αγαπημένων.</a:t>
             </a:r>
           </a:p>
-          <a:p xmlns:a="http://schemas.openxmlformats.org/drawingml/2006/main">
+          <a:p>
             <a:pPr marL="254000" indent="-152400" algn="l">
               <a:spcAft>
                 <a:spcPts val="550"/>
@@ -3742,85 +3668,99 @@
       </p:sp>
       <p:pic>
         <p:nvPicPr>
-          <p:cNvPr id="20" name=""/>
+          <p:cNvPr id="20" name="Picture 19"/>
           <p:cNvPicPr>
-            <a:picLocks xmlns:a="http://schemas.openxmlformats.org/drawingml/2006/main" noChangeAspect="1"/>
+            <a:picLocks noChangeAspect="1"/>
           </p:cNvPicPr>
           <p:nvPr/>
         </p:nvPicPr>
         <p:blipFill>
-          <a:blip xmlns:r="http://schemas.openxmlformats.org/officeDocument/2006/relationships" xmlns:a="http://schemas.openxmlformats.org/drawingml/2006/main" r:embed="R7383067f46534d56"/>
-          <a:stretch xmlns:a="http://schemas.openxmlformats.org/drawingml/2006/main"/>
+          <a:blip r:embed="rId4"/>
+          <a:stretch/>
         </p:blipFill>
         <p:spPr>
-          <a:xfrm xmlns:a="http://schemas.openxmlformats.org/drawingml/2006/main">
+          <a:xfrm>
             <a:off x="10288681" y="1619250"/>
             <a:ext cx="358588" cy="381000"/>
           </a:xfrm>
-          <a:prstGeom xmlns:a="http://schemas.openxmlformats.org/drawingml/2006/main" prst="rect">
+          <a:prstGeom prst="rect">
             <a:avLst/>
           </a:prstGeom>
         </p:spPr>
       </p:pic>
       <p:sp>
         <p:nvSpPr>
-          <p:cNvPr id="10" name="">
-            <a:extLst xmlns:a="http://schemas.openxmlformats.org/drawingml/2006/main">
+          <p:cNvPr id="10" name="Rectangle 9">
+            <a:extLst>
               <a:ext uri="{FF2B5EF4-FFF2-40B4-BE49-F238E27FC236}">
                 <a16:creationId xmlns:a16="http://schemas.microsoft.com/office/drawing/2014/main" id="{2E2BC598-BE69-4CB4-9045-6EE85E590B7E}"/>
               </a:ext>
             </a:extLst>
           </p:cNvPr>
           <p:cNvSpPr>
-            <a:spLocks xmlns:a="http://schemas.openxmlformats.org/drawingml/2006/main" noGrp="1"/>
-          </p:cNvSpPr>
-          <p:nvPr/>
-        </p:nvSpPr>
-        <p:spPr>
-          <a:xfrm xmlns:a="http://schemas.openxmlformats.org/drawingml/2006/main">
+            <a:spLocks noGrp="1"/>
+          </p:cNvSpPr>
+          <p:nvPr/>
+        </p:nvSpPr>
+        <p:spPr>
+          <a:xfrm>
             <a:off x="552450" y="6429375"/>
             <a:ext cx="11087100" cy="47625"/>
           </a:xfrm>
-          <a:prstGeom xmlns:a="http://schemas.openxmlformats.org/drawingml/2006/main" prst="rect">
-            <a:avLst/>
-          </a:prstGeom>
-          <a:solidFill xmlns:a="http://schemas.openxmlformats.org/drawingml/2006/main">
+          <a:prstGeom prst="rect">
+            <a:avLst/>
+          </a:prstGeom>
+          <a:solidFill>
             <a:srgbClr val="F57C24"/>
           </a:solidFill>
-          <a:ln xmlns:a="http://schemas.openxmlformats.org/drawingml/2006/main" w="0">
+          <a:ln w="0">
             <a:noFill/>
           </a:ln>
         </p:spPr>
-      </p:sp>
-      <p:sp>
-        <p:nvSpPr>
-          <p:cNvPr id="11" name="">
-            <a:extLst xmlns:a="http://schemas.openxmlformats.org/drawingml/2006/main">
+        <p:txBody>
+          <a:bodyPr/>
+          <a:lstStyle/>
+          <a:p>
+            <a:endParaRPr lang="en-GB"/>
+          </a:p>
+        </p:txBody>
+      </p:sp>
+      <p:sp>
+        <p:nvSpPr>
+          <p:cNvPr id="11" name="Rectangle 10">
+            <a:extLst>
               <a:ext uri="{FF2B5EF4-FFF2-40B4-BE49-F238E27FC236}">
                 <a16:creationId xmlns:a16="http://schemas.microsoft.com/office/drawing/2014/main" id="{8F7D726B-F8FB-4861-B193-9CBC8F7544F7}"/>
               </a:ext>
             </a:extLst>
           </p:cNvPr>
           <p:cNvSpPr>
-            <a:spLocks xmlns:a="http://schemas.openxmlformats.org/drawingml/2006/main" noGrp="1"/>
-          </p:cNvSpPr>
-          <p:nvPr/>
-        </p:nvSpPr>
-        <p:spPr>
-          <a:xfrm xmlns:a="http://schemas.openxmlformats.org/drawingml/2006/main">
+            <a:spLocks noGrp="1"/>
+          </p:cNvSpPr>
+          <p:nvPr/>
+        </p:nvSpPr>
+        <p:spPr>
+          <a:xfrm>
             <a:off x="4286250" y="6429375"/>
             <a:ext cx="7353300" cy="47625"/>
           </a:xfrm>
-          <a:prstGeom xmlns:a="http://schemas.openxmlformats.org/drawingml/2006/main" prst="rect">
-            <a:avLst/>
-          </a:prstGeom>
-          <a:solidFill xmlns:a="http://schemas.openxmlformats.org/drawingml/2006/main">
+          <a:prstGeom prst="rect">
+            <a:avLst/>
+          </a:prstGeom>
+          <a:solidFill>
             <a:srgbClr val="77A9D7"/>
           </a:solidFill>
-          <a:ln xmlns:a="http://schemas.openxmlformats.org/drawingml/2006/main" w="0">
+          <a:ln w="0">
             <a:noFill/>
           </a:ln>
         </p:spPr>
+        <p:txBody>
+          <a:bodyPr/>
+          <a:lstStyle/>
+          <a:p>
+            <a:endParaRPr lang="en-GB"/>
+          </a:p>
+        </p:txBody>
       </p:sp>
     </p:spTree>
     <p:extLst>
@@ -3829,17 +3769,21 @@
       </p:ext>
     </p:extLst>
   </p:cSld>
+  <p:clrMapOvr>
+    <a:masterClrMapping/>
+  </p:clrMapOvr>
 </p:sld>
 </file>
 
 <file path=ppt/slides/slide5.xml><?xml version="1.0" encoding="utf-8"?>
-<p:sld xmlns:p="http://schemas.openxmlformats.org/presentationml/2006/main">
+<p:sld xmlns:a="http://schemas.openxmlformats.org/drawingml/2006/main" xmlns:r="http://schemas.openxmlformats.org/officeDocument/2006/relationships" xmlns:p="http://schemas.openxmlformats.org/presentationml/2006/main">
   <p:cSld>
     <p:bg>
       <p:bgPr>
-        <a:solidFill xmlns:a="http://schemas.openxmlformats.org/drawingml/2006/main">
+        <a:solidFill>
           <a:srgbClr val="FFFFFF"/>
         </a:solidFill>
+        <a:effectLst/>
       </p:bgPr>
     </p:bg>
     <p:spTree>
@@ -3849,41 +3793,46 @@
         <p:nvPr/>
       </p:nvGrpSpPr>
       <p:grpSpPr>
-        <a:xfrm xmlns:a="http://schemas.openxmlformats.org/drawingml/2006/main"/>
+        <a:xfrm>
+          <a:off x="0" y="0"/>
+          <a:ext cx="0" cy="0"/>
+          <a:chOff x="0" y="0"/>
+          <a:chExt cx="0" cy="0"/>
+        </a:xfrm>
       </p:grpSpPr>
       <p:sp>
         <p:nvSpPr>
-          <p:cNvPr id="10" name="">
-            <a:extLst xmlns:a="http://schemas.openxmlformats.org/drawingml/2006/main">
+          <p:cNvPr id="10" name="Rectangle 9">
+            <a:extLst>
               <a:ext uri="{FF2B5EF4-FFF2-40B4-BE49-F238E27FC236}">
                 <a16:creationId xmlns:a16="http://schemas.microsoft.com/office/drawing/2014/main" id="{1E5825D1-DFC0-455A-8539-C2D2B637F2EF}"/>
               </a:ext>
             </a:extLst>
           </p:cNvPr>
           <p:cNvSpPr>
-            <a:spLocks xmlns:a="http://schemas.openxmlformats.org/drawingml/2006/main" noGrp="1"/>
-          </p:cNvSpPr>
-          <p:nvPr/>
-        </p:nvSpPr>
-        <p:spPr>
-          <a:xfrm xmlns:a="http://schemas.openxmlformats.org/drawingml/2006/main">
+            <a:spLocks noGrp="1"/>
+          </p:cNvSpPr>
+          <p:nvPr/>
+        </p:nvSpPr>
+        <p:spPr>
+          <a:xfrm>
             <a:off x="552450" y="333375"/>
             <a:ext cx="11087100" cy="704850"/>
           </a:xfrm>
-          <a:prstGeom xmlns:a="http://schemas.openxmlformats.org/drawingml/2006/main" prst="rect">
-            <a:avLst/>
-          </a:prstGeom>
-          <a:noFill xmlns:a="http://schemas.openxmlformats.org/drawingml/2006/main"/>
-          <a:ln xmlns:a="http://schemas.openxmlformats.org/drawingml/2006/main" w="0">
+          <a:prstGeom prst="rect">
+            <a:avLst/>
+          </a:prstGeom>
+          <a:noFill/>
+          <a:ln w="0">
             <a:noFill/>
           </a:ln>
         </p:spPr>
         <p:txBody>
-          <a:bodyPr xmlns:a="http://schemas.openxmlformats.org/drawingml/2006/main" lIns="38100" tIns="19050" rIns="38100" bIns="19050" anchor="t">
-            <a:normAutofit fontScale="100000"/>
+          <a:bodyPr lIns="38100" tIns="19050" rIns="38100" bIns="19050" anchor="t">
+            <a:normAutofit/>
           </a:bodyPr>
-          <a:lstStyle xmlns:a="http://schemas.openxmlformats.org/drawingml/2006/main"/>
-          <a:p xmlns:a="http://schemas.openxmlformats.org/drawingml/2006/main">
+          <a:lstStyle/>
+          <a:p>
             <a:pPr algn="l">
               <a:defRPr sz="2550" b="0">
                 <a:solidFill>
@@ -3910,37 +3859,37 @@
       </p:sp>
       <p:sp>
         <p:nvSpPr>
-          <p:cNvPr id="2" name="">
-            <a:extLst xmlns:a="http://schemas.openxmlformats.org/drawingml/2006/main">
+          <p:cNvPr id="2" name="Rectangle 1">
+            <a:extLst>
               <a:ext uri="{FF2B5EF4-FFF2-40B4-BE49-F238E27FC236}">
                 <a16:creationId xmlns:a16="http://schemas.microsoft.com/office/drawing/2014/main" id="{B05E293B-CC71-4C59-AC6C-1AD3D5C69AD9}"/>
               </a:ext>
             </a:extLst>
           </p:cNvPr>
           <p:cNvSpPr>
-            <a:spLocks xmlns:a="http://schemas.openxmlformats.org/drawingml/2006/main" noGrp="1"/>
-          </p:cNvSpPr>
-          <p:nvPr/>
-        </p:nvSpPr>
-        <p:spPr>
-          <a:xfrm xmlns:a="http://schemas.openxmlformats.org/drawingml/2006/main">
+            <a:spLocks noGrp="1"/>
+          </p:cNvSpPr>
+          <p:nvPr/>
+        </p:nvSpPr>
+        <p:spPr>
+          <a:xfrm>
             <a:off x="609600" y="1352550"/>
-            <a:ext cx="5905500" cy="3333750"/>
-          </a:xfrm>
-          <a:prstGeom xmlns:a="http://schemas.openxmlformats.org/drawingml/2006/main" prst="rect">
-            <a:avLst/>
-          </a:prstGeom>
-          <a:noFill xmlns:a="http://schemas.openxmlformats.org/drawingml/2006/main"/>
-          <a:ln xmlns:a="http://schemas.openxmlformats.org/drawingml/2006/main" w="0">
+            <a:ext cx="4171950" cy="3333750"/>
+          </a:xfrm>
+          <a:prstGeom prst="rect">
+            <a:avLst/>
+          </a:prstGeom>
+          <a:noFill/>
+          <a:ln w="0">
             <a:noFill/>
           </a:ln>
         </p:spPr>
         <p:txBody>
-          <a:bodyPr xmlns:a="http://schemas.openxmlformats.org/drawingml/2006/main" lIns="28575" tIns="19050" rIns="28575" bIns="19050" anchor="t">
-            <a:normAutofit fontScale="100000"/>
+          <a:bodyPr lIns="28575" tIns="19050" rIns="28575" bIns="19050" anchor="t">
+            <a:normAutofit/>
           </a:bodyPr>
-          <a:lstStyle xmlns:a="http://schemas.openxmlformats.org/drawingml/2006/main"/>
-          <a:p xmlns:a="http://schemas.openxmlformats.org/drawingml/2006/main">
+          <a:lstStyle/>
+          <a:p>
             <a:pPr marL="254000" indent="-152400" algn="l">
               <a:spcAft>
                 <a:spcPts val="550"/>
@@ -3956,18 +3905,73 @@
               </a:defRPr>
             </a:pPr>
             <a:r>
-              <a:rPr sz="1800" b="0">
-                <a:solidFill>
-                  <a:srgbClr val="111111"/>
-                </a:solidFill>
-                <a:latin typeface="Tahoma"/>
-                <a:ea typeface="Tahoma"/>
-                <a:cs typeface="Tahoma"/>
-              </a:rPr>
-              <a:t>Βρίσκουμε την εικόνα με μια μηχανή αναζήτησης.</a:t>
-            </a:r>
-          </a:p>
-          <a:p xmlns:a="http://schemas.openxmlformats.org/drawingml/2006/main">
+              <a:rPr sz="1800" b="0" dirty="0" err="1">
+                <a:solidFill>
+                  <a:srgbClr val="111111"/>
+                </a:solidFill>
+                <a:latin typeface="Tahoma"/>
+                <a:ea typeface="Tahoma"/>
+                <a:cs typeface="Tahoma"/>
+              </a:rPr>
+              <a:t>Βρίσκουμε</a:t>
+            </a:r>
+            <a:r>
+              <a:rPr sz="1800" b="0" dirty="0">
+                <a:solidFill>
+                  <a:srgbClr val="111111"/>
+                </a:solidFill>
+                <a:latin typeface="Tahoma"/>
+                <a:ea typeface="Tahoma"/>
+                <a:cs typeface="Tahoma"/>
+              </a:rPr>
+              <a:t> </a:t>
+            </a:r>
+            <a:r>
+              <a:rPr sz="1800" b="0" dirty="0" err="1">
+                <a:solidFill>
+                  <a:srgbClr val="111111"/>
+                </a:solidFill>
+                <a:latin typeface="Tahoma"/>
+                <a:ea typeface="Tahoma"/>
+                <a:cs typeface="Tahoma"/>
+              </a:rPr>
+              <a:t>την</a:t>
+            </a:r>
+            <a:r>
+              <a:rPr sz="1800" b="0" dirty="0">
+                <a:solidFill>
+                  <a:srgbClr val="111111"/>
+                </a:solidFill>
+                <a:latin typeface="Tahoma"/>
+                <a:ea typeface="Tahoma"/>
+                <a:cs typeface="Tahoma"/>
+              </a:rPr>
+              <a:t> </a:t>
+            </a:r>
+            <a:r>
+              <a:rPr sz="1800" b="0" dirty="0" err="1">
+                <a:solidFill>
+                  <a:srgbClr val="111111"/>
+                </a:solidFill>
+                <a:latin typeface="Tahoma"/>
+                <a:ea typeface="Tahoma"/>
+                <a:cs typeface="Tahoma"/>
+              </a:rPr>
+              <a:t>εικόν</a:t>
+            </a:r>
+            <a:r>
+              <a:rPr sz="1800" b="0" dirty="0">
+                <a:solidFill>
+                  <a:srgbClr val="111111"/>
+                </a:solidFill>
+                <a:latin typeface="Tahoma"/>
+                <a:ea typeface="Tahoma"/>
+                <a:cs typeface="Tahoma"/>
+              </a:rPr>
+              <a:t>α με μια μηχανή αναζήτησης.</a:t>
+            </a:r>
+          </a:p>
+          <a:p>
             <a:pPr marL="254000" indent="-152400" algn="l">
               <a:spcAft>
                 <a:spcPts val="550"/>
@@ -3983,18 +3987,139 @@
               </a:defRPr>
             </a:pPr>
             <a:r>
-              <a:rPr sz="1800" b="0">
-                <a:solidFill>
-                  <a:srgbClr val="111111"/>
-                </a:solidFill>
-                <a:latin typeface="Tahoma"/>
-                <a:ea typeface="Tahoma"/>
-                <a:cs typeface="Tahoma"/>
-              </a:rPr>
-              <a:t>Κάνουμε δεξί κλικ και επιλέγουμε Αποθήκευση εικόνας ως…</a:t>
-            </a:r>
-          </a:p>
-          <a:p xmlns:a="http://schemas.openxmlformats.org/drawingml/2006/main">
+              <a:rPr sz="1800" b="0" dirty="0" err="1">
+                <a:solidFill>
+                  <a:srgbClr val="111111"/>
+                </a:solidFill>
+                <a:latin typeface="Tahoma"/>
+                <a:ea typeface="Tahoma"/>
+                <a:cs typeface="Tahoma"/>
+              </a:rPr>
+              <a:t>Κάνουμε</a:t>
+            </a:r>
+            <a:r>
+              <a:rPr sz="1800" b="0" dirty="0">
+                <a:solidFill>
+                  <a:srgbClr val="111111"/>
+                </a:solidFill>
+                <a:latin typeface="Tahoma"/>
+                <a:ea typeface="Tahoma"/>
+                <a:cs typeface="Tahoma"/>
+              </a:rPr>
+              <a:t> </a:t>
+            </a:r>
+            <a:r>
+              <a:rPr sz="1800" b="0" dirty="0" err="1">
+                <a:solidFill>
+                  <a:srgbClr val="111111"/>
+                </a:solidFill>
+                <a:latin typeface="Tahoma"/>
+                <a:ea typeface="Tahoma"/>
+                <a:cs typeface="Tahoma"/>
+              </a:rPr>
+              <a:t>δεξί</a:t>
+            </a:r>
+            <a:r>
+              <a:rPr sz="1800" b="0" dirty="0">
+                <a:solidFill>
+                  <a:srgbClr val="111111"/>
+                </a:solidFill>
+                <a:latin typeface="Tahoma"/>
+                <a:ea typeface="Tahoma"/>
+                <a:cs typeface="Tahoma"/>
+              </a:rPr>
+              <a:t> </a:t>
+            </a:r>
+            <a:r>
+              <a:rPr sz="1800" b="0" dirty="0" err="1">
+                <a:solidFill>
+                  <a:srgbClr val="111111"/>
+                </a:solidFill>
+                <a:latin typeface="Tahoma"/>
+                <a:ea typeface="Tahoma"/>
+                <a:cs typeface="Tahoma"/>
+              </a:rPr>
+              <a:t>κλικ</a:t>
+            </a:r>
+            <a:r>
+              <a:rPr sz="1800" b="0" dirty="0">
+                <a:solidFill>
+                  <a:srgbClr val="111111"/>
+                </a:solidFill>
+                <a:latin typeface="Tahoma"/>
+                <a:ea typeface="Tahoma"/>
+                <a:cs typeface="Tahoma"/>
+              </a:rPr>
+              <a:t> και επ</a:t>
+            </a:r>
+            <a:r>
+              <a:rPr sz="1800" b="0" dirty="0" err="1">
+                <a:solidFill>
+                  <a:srgbClr val="111111"/>
+                </a:solidFill>
+                <a:latin typeface="Tahoma"/>
+                <a:ea typeface="Tahoma"/>
+                <a:cs typeface="Tahoma"/>
+              </a:rPr>
+              <a:t>ιλέγουμε</a:t>
+            </a:r>
+            <a:r>
+              <a:rPr sz="1800" b="0" dirty="0">
+                <a:solidFill>
+                  <a:srgbClr val="111111"/>
+                </a:solidFill>
+                <a:latin typeface="Tahoma"/>
+                <a:ea typeface="Tahoma"/>
+                <a:cs typeface="Tahoma"/>
+              </a:rPr>
+              <a:t> Απ</a:t>
+            </a:r>
+            <a:r>
+              <a:rPr sz="1800" b="0" dirty="0" err="1">
+                <a:solidFill>
+                  <a:srgbClr val="111111"/>
+                </a:solidFill>
+                <a:latin typeface="Tahoma"/>
+                <a:ea typeface="Tahoma"/>
+                <a:cs typeface="Tahoma"/>
+              </a:rPr>
+              <a:t>οθήκευση</a:t>
+            </a:r>
+            <a:r>
+              <a:rPr sz="1800" b="0" dirty="0">
+                <a:solidFill>
+                  <a:srgbClr val="111111"/>
+                </a:solidFill>
+                <a:latin typeface="Tahoma"/>
+                <a:ea typeface="Tahoma"/>
+                <a:cs typeface="Tahoma"/>
+              </a:rPr>
+              <a:t> </a:t>
+            </a:r>
+            <a:r>
+              <a:rPr sz="1800" b="0" dirty="0" err="1">
+                <a:solidFill>
+                  <a:srgbClr val="111111"/>
+                </a:solidFill>
+                <a:latin typeface="Tahoma"/>
+                <a:ea typeface="Tahoma"/>
+                <a:cs typeface="Tahoma"/>
+              </a:rPr>
+              <a:t>εικόν</a:t>
+            </a:r>
+            <a:r>
+              <a:rPr sz="1800" b="0" dirty="0">
+                <a:solidFill>
+                  <a:srgbClr val="111111"/>
+                </a:solidFill>
+                <a:latin typeface="Tahoma"/>
+                <a:ea typeface="Tahoma"/>
+                <a:cs typeface="Tahoma"/>
+              </a:rPr>
+              <a:t>ας ως…</a:t>
+            </a:r>
+          </a:p>
+          <a:p>
             <a:pPr marL="254000" indent="-152400" algn="l">
               <a:spcAft>
                 <a:spcPts val="550"/>
@@ -4010,18 +4135,128 @@
               </a:defRPr>
             </a:pPr>
             <a:r>
-              <a:rPr sz="1800" b="0">
-                <a:solidFill>
-                  <a:srgbClr val="111111"/>
-                </a:solidFill>
-                <a:latin typeface="Tahoma"/>
-                <a:ea typeface="Tahoma"/>
-                <a:cs typeface="Tahoma"/>
-              </a:rPr>
-              <a:t>Επιλέγουμε τον σωστό φάκελο και όνομα αρχείου.</a:t>
-            </a:r>
-          </a:p>
-          <a:p xmlns:a="http://schemas.openxmlformats.org/drawingml/2006/main">
+              <a:rPr sz="1800" b="0" dirty="0">
+                <a:solidFill>
+                  <a:srgbClr val="111111"/>
+                </a:solidFill>
+                <a:latin typeface="Tahoma"/>
+                <a:ea typeface="Tahoma"/>
+                <a:cs typeface="Tahoma"/>
+              </a:rPr>
+              <a:t>Επ</a:t>
+            </a:r>
+            <a:r>
+              <a:rPr sz="1800" b="0" dirty="0" err="1">
+                <a:solidFill>
+                  <a:srgbClr val="111111"/>
+                </a:solidFill>
+                <a:latin typeface="Tahoma"/>
+                <a:ea typeface="Tahoma"/>
+                <a:cs typeface="Tahoma"/>
+              </a:rPr>
+              <a:t>ιλέγουμε</a:t>
+            </a:r>
+            <a:r>
+              <a:rPr sz="1800" b="0" dirty="0">
+                <a:solidFill>
+                  <a:srgbClr val="111111"/>
+                </a:solidFill>
+                <a:latin typeface="Tahoma"/>
+                <a:ea typeface="Tahoma"/>
+                <a:cs typeface="Tahoma"/>
+              </a:rPr>
+              <a:t> </a:t>
+            </a:r>
+            <a:r>
+              <a:rPr sz="1800" b="0" dirty="0" err="1">
+                <a:solidFill>
+                  <a:srgbClr val="111111"/>
+                </a:solidFill>
+                <a:latin typeface="Tahoma"/>
+                <a:ea typeface="Tahoma"/>
+                <a:cs typeface="Tahoma"/>
+              </a:rPr>
+              <a:t>τον</a:t>
+            </a:r>
+            <a:r>
+              <a:rPr sz="1800" b="0" dirty="0">
+                <a:solidFill>
+                  <a:srgbClr val="111111"/>
+                </a:solidFill>
+                <a:latin typeface="Tahoma"/>
+                <a:ea typeface="Tahoma"/>
+                <a:cs typeface="Tahoma"/>
+              </a:rPr>
+              <a:t> </a:t>
+            </a:r>
+            <a:r>
+              <a:rPr sz="1800" b="0" dirty="0" err="1">
+                <a:solidFill>
+                  <a:srgbClr val="111111"/>
+                </a:solidFill>
+                <a:latin typeface="Tahoma"/>
+                <a:ea typeface="Tahoma"/>
+                <a:cs typeface="Tahoma"/>
+              </a:rPr>
+              <a:t>σωστό</a:t>
+            </a:r>
+            <a:r>
+              <a:rPr sz="1800" b="0" dirty="0">
+                <a:solidFill>
+                  <a:srgbClr val="111111"/>
+                </a:solidFill>
+                <a:latin typeface="Tahoma"/>
+                <a:ea typeface="Tahoma"/>
+                <a:cs typeface="Tahoma"/>
+              </a:rPr>
+              <a:t> </a:t>
+            </a:r>
+            <a:r>
+              <a:rPr sz="1800" b="0" dirty="0" err="1">
+                <a:solidFill>
+                  <a:srgbClr val="111111"/>
+                </a:solidFill>
+                <a:latin typeface="Tahoma"/>
+                <a:ea typeface="Tahoma"/>
+                <a:cs typeface="Tahoma"/>
+              </a:rPr>
+              <a:t>φάκελο</a:t>
+            </a:r>
+            <a:r>
+              <a:rPr sz="1800" b="0" dirty="0">
+                <a:solidFill>
+                  <a:srgbClr val="111111"/>
+                </a:solidFill>
+                <a:latin typeface="Tahoma"/>
+                <a:ea typeface="Tahoma"/>
+                <a:cs typeface="Tahoma"/>
+              </a:rPr>
+              <a:t> και </a:t>
+            </a:r>
+            <a:r>
+              <a:rPr sz="1800" b="0" dirty="0" err="1">
+                <a:solidFill>
+                  <a:srgbClr val="111111"/>
+                </a:solidFill>
+                <a:latin typeface="Tahoma"/>
+                <a:ea typeface="Tahoma"/>
+                <a:cs typeface="Tahoma"/>
+              </a:rPr>
+              <a:t>όνομ</a:t>
+            </a:r>
+            <a:r>
+              <a:rPr sz="1800" b="0" dirty="0">
+                <a:solidFill>
+                  <a:srgbClr val="111111"/>
+                </a:solidFill>
+                <a:latin typeface="Tahoma"/>
+                <a:ea typeface="Tahoma"/>
+                <a:cs typeface="Tahoma"/>
+              </a:rPr>
+              <a:t>α αρχείου.</a:t>
+            </a:r>
+          </a:p>
+          <a:p>
             <a:pPr marL="254000" indent="-152400" algn="l">
               <a:spcAft>
                 <a:spcPts val="550"/>
@@ -4037,269 +4272,206 @@
               </a:defRPr>
             </a:pPr>
             <a:r>
-              <a:rPr sz="1800" b="0">
-                <a:solidFill>
-                  <a:srgbClr val="111111"/>
-                </a:solidFill>
-                <a:latin typeface="Tahoma"/>
-                <a:ea typeface="Tahoma"/>
-                <a:cs typeface="Tahoma"/>
-              </a:rPr>
-              <a:t>Πατάμε Αποθήκευση.</a:t>
-            </a:r>
-          </a:p>
-        </p:txBody>
-      </p:sp>
-      <p:sp>
-        <p:nvSpPr>
-          <p:cNvPr id="3" name="">
-            <a:extLst xmlns:a="http://schemas.openxmlformats.org/drawingml/2006/main">
+              <a:rPr sz="1800" b="0" dirty="0">
+                <a:solidFill>
+                  <a:srgbClr val="111111"/>
+                </a:solidFill>
+                <a:latin typeface="Tahoma"/>
+                <a:ea typeface="Tahoma"/>
+                <a:cs typeface="Tahoma"/>
+              </a:rPr>
+              <a:t>Πα</a:t>
+            </a:r>
+            <a:r>
+              <a:rPr sz="1800" b="0" dirty="0" err="1">
+                <a:solidFill>
+                  <a:srgbClr val="111111"/>
+                </a:solidFill>
+                <a:latin typeface="Tahoma"/>
+                <a:ea typeface="Tahoma"/>
+                <a:cs typeface="Tahoma"/>
+              </a:rPr>
+              <a:t>τάμε</a:t>
+            </a:r>
+            <a:r>
+              <a:rPr sz="1800" b="0" dirty="0">
+                <a:solidFill>
+                  <a:srgbClr val="111111"/>
+                </a:solidFill>
+                <a:latin typeface="Tahoma"/>
+                <a:ea typeface="Tahoma"/>
+                <a:cs typeface="Tahoma"/>
+              </a:rPr>
+              <a:t> Απ</a:t>
+            </a:r>
+            <a:r>
+              <a:rPr sz="1800" b="0" dirty="0" err="1">
+                <a:solidFill>
+                  <a:srgbClr val="111111"/>
+                </a:solidFill>
+                <a:latin typeface="Tahoma"/>
+                <a:ea typeface="Tahoma"/>
+                <a:cs typeface="Tahoma"/>
+              </a:rPr>
+              <a:t>οθήκευση</a:t>
+            </a:r>
+            <a:r>
+              <a:rPr sz="1800" b="0" dirty="0">
+                <a:solidFill>
+                  <a:srgbClr val="111111"/>
+                </a:solidFill>
+                <a:latin typeface="Tahoma"/>
+                <a:ea typeface="Tahoma"/>
+                <a:cs typeface="Tahoma"/>
+              </a:rPr>
+              <a:t>.</a:t>
+            </a:r>
+          </a:p>
+        </p:txBody>
+      </p:sp>
+      <p:sp>
+        <p:nvSpPr>
+          <p:cNvPr id="3" name="Rectangle: Rounded Corners 2">
+            <a:extLst>
               <a:ext uri="{FF2B5EF4-FFF2-40B4-BE49-F238E27FC236}">
                 <a16:creationId xmlns:a16="http://schemas.microsoft.com/office/drawing/2014/main" id="{F0A7001D-3F8C-48A1-ACF8-7BE440913A63}"/>
               </a:ext>
             </a:extLst>
           </p:cNvPr>
           <p:cNvSpPr>
-            <a:spLocks xmlns:a="http://schemas.openxmlformats.org/drawingml/2006/main" noGrp="1"/>
-          </p:cNvSpPr>
-          <p:nvPr/>
-        </p:nvSpPr>
-        <p:spPr>
-          <a:xfrm xmlns:a="http://schemas.openxmlformats.org/drawingml/2006/main">
+            <a:spLocks noGrp="1"/>
+          </p:cNvSpPr>
+          <p:nvPr/>
+        </p:nvSpPr>
+        <p:spPr>
+          <a:xfrm>
             <a:off x="6905625" y="1333500"/>
             <a:ext cx="4476750" cy="857250"/>
           </a:xfrm>
-          <a:prstGeom xmlns:a="http://schemas.openxmlformats.org/drawingml/2006/main" prst="roundRect">
+          <a:prstGeom prst="roundRect">
             <a:avLst>
               <a:gd name="adj" fmla="val 8889"/>
             </a:avLst>
           </a:prstGeom>
-          <a:solidFill xmlns:a="http://schemas.openxmlformats.org/drawingml/2006/main">
+          <a:solidFill>
             <a:srgbClr val="EEF5FB"/>
           </a:solidFill>
-          <a:ln xmlns:a="http://schemas.openxmlformats.org/drawingml/2006/main" w="0">
+          <a:ln w="0">
             <a:noFill/>
           </a:ln>
         </p:spPr>
-      </p:sp>
-      <p:sp>
-        <p:nvSpPr>
-          <p:cNvPr id="4" name="">
-            <a:extLst xmlns:a="http://schemas.openxmlformats.org/drawingml/2006/main">
-              <a:ext uri="{FF2B5EF4-FFF2-40B4-BE49-F238E27FC236}">
-                <a16:creationId xmlns:a16="http://schemas.microsoft.com/office/drawing/2014/main" id="{7D79C285-28C6-4B01-8D43-387F88432D71}"/>
-              </a:ext>
-            </a:extLst>
-          </p:cNvPr>
-          <p:cNvSpPr>
-            <a:spLocks xmlns:a="http://schemas.openxmlformats.org/drawingml/2006/main" noGrp="1"/>
-          </p:cNvSpPr>
-          <p:nvPr/>
-        </p:nvSpPr>
-        <p:spPr>
-          <a:xfrm xmlns:a="http://schemas.openxmlformats.org/drawingml/2006/main">
-            <a:off x="7096125" y="1504950"/>
-            <a:ext cx="4095750" cy="323850"/>
-          </a:xfrm>
-          <a:prstGeom xmlns:a="http://schemas.openxmlformats.org/drawingml/2006/main" prst="rect">
-            <a:avLst/>
-          </a:prstGeom>
-          <a:noFill xmlns:a="http://schemas.openxmlformats.org/drawingml/2006/main"/>
-          <a:ln xmlns:a="http://schemas.openxmlformats.org/drawingml/2006/main" w="0">
+        <p:txBody>
+          <a:bodyPr/>
+          <a:lstStyle/>
+          <a:p>
+            <a:endParaRPr lang="en-GB"/>
+          </a:p>
+        </p:txBody>
+      </p:sp>
+      <p:sp>
+        <p:nvSpPr>
+          <p:cNvPr id="8" name="Rectangle 7">
+            <a:extLst>
+              <a:ext uri="{FF2B5EF4-FFF2-40B4-BE49-F238E27FC236}">
+                <a16:creationId xmlns:a16="http://schemas.microsoft.com/office/drawing/2014/main" id="{D6B06397-BA43-4A1E-A93C-89AC90419960}"/>
+              </a:ext>
+            </a:extLst>
+          </p:cNvPr>
+          <p:cNvSpPr>
+            <a:spLocks noGrp="1"/>
+          </p:cNvSpPr>
+          <p:nvPr/>
+        </p:nvSpPr>
+        <p:spPr>
+          <a:xfrm>
+            <a:off x="552450" y="6429375"/>
+            <a:ext cx="11087100" cy="47625"/>
+          </a:xfrm>
+          <a:prstGeom prst="rect">
+            <a:avLst/>
+          </a:prstGeom>
+          <a:solidFill>
+            <a:srgbClr val="F57C24"/>
+          </a:solidFill>
+          <a:ln w="0">
             <a:noFill/>
           </a:ln>
         </p:spPr>
         <p:txBody>
-          <a:bodyPr xmlns:a="http://schemas.openxmlformats.org/drawingml/2006/main" lIns="38100" tIns="19050" rIns="38100" bIns="19050" anchor="t">
-            <a:normAutofit fontScale="96154"/>
-          </a:bodyPr>
-          <a:lstStyle xmlns:a="http://schemas.openxmlformats.org/drawingml/2006/main"/>
-          <a:p xmlns:a="http://schemas.openxmlformats.org/drawingml/2006/main">
-            <a:pPr algn="ctr">
-              <a:defRPr sz="1950" b="1">
-                <a:solidFill>
-                  <a:srgbClr val="337AB7"/>
-                </a:solidFill>
-                <a:latin typeface="Tahoma"/>
-                <a:ea typeface="Tahoma"/>
-                <a:cs typeface="Tahoma"/>
-              </a:defRPr>
-            </a:pPr>
-            <a:r>
-              <a:rPr sz="1950" b="1">
-                <a:solidFill>
-                  <a:srgbClr val="337AB7"/>
-                </a:solidFill>
-                <a:latin typeface="Tahoma"/>
-                <a:ea typeface="Tahoma"/>
-                <a:cs typeface="Tahoma"/>
-              </a:rPr>
-              <a:t>Λήψη (Download)</a:t>
-            </a:r>
-          </a:p>
-        </p:txBody>
-      </p:sp>
-      <p:sp>
-        <p:nvSpPr>
-          <p:cNvPr id="5" name="">
-            <a:extLst xmlns:a="http://schemas.openxmlformats.org/drawingml/2006/main">
-              <a:ext uri="{FF2B5EF4-FFF2-40B4-BE49-F238E27FC236}">
-                <a16:creationId xmlns:a16="http://schemas.microsoft.com/office/drawing/2014/main" id="{194F3C58-D72A-4E22-8A6E-455918DC4055}"/>
-              </a:ext>
-            </a:extLst>
-          </p:cNvPr>
-          <p:cNvSpPr>
-            <a:spLocks xmlns:a="http://schemas.openxmlformats.org/drawingml/2006/main" noGrp="1"/>
-          </p:cNvSpPr>
-          <p:nvPr/>
-        </p:nvSpPr>
-        <p:spPr>
-          <a:xfrm xmlns:a="http://schemas.openxmlformats.org/drawingml/2006/main">
-            <a:off x="7096125" y="1885950"/>
-            <a:ext cx="4095750" cy="609600"/>
-          </a:xfrm>
-          <a:prstGeom xmlns:a="http://schemas.openxmlformats.org/drawingml/2006/main" prst="rect">
-            <a:avLst/>
-          </a:prstGeom>
-          <a:noFill xmlns:a="http://schemas.openxmlformats.org/drawingml/2006/main"/>
-          <a:ln xmlns:a="http://schemas.openxmlformats.org/drawingml/2006/main" w="0">
+          <a:bodyPr/>
+          <a:lstStyle/>
+          <a:p>
+            <a:endParaRPr lang="en-GB"/>
+          </a:p>
+        </p:txBody>
+      </p:sp>
+      <p:sp>
+        <p:nvSpPr>
+          <p:cNvPr id="9" name="Rectangle 8">
+            <a:extLst>
+              <a:ext uri="{FF2B5EF4-FFF2-40B4-BE49-F238E27FC236}">
+                <a16:creationId xmlns:a16="http://schemas.microsoft.com/office/drawing/2014/main" id="{74B45AFB-BA11-4B24-90AA-1E15EA8BE883}"/>
+              </a:ext>
+            </a:extLst>
+          </p:cNvPr>
+          <p:cNvSpPr>
+            <a:spLocks noGrp="1"/>
+          </p:cNvSpPr>
+          <p:nvPr/>
+        </p:nvSpPr>
+        <p:spPr>
+          <a:xfrm>
+            <a:off x="4286250" y="6429375"/>
+            <a:ext cx="7353300" cy="47625"/>
+          </a:xfrm>
+          <a:prstGeom prst="rect">
+            <a:avLst/>
+          </a:prstGeom>
+          <a:solidFill>
+            <a:srgbClr val="77A9D7"/>
+          </a:solidFill>
+          <a:ln w="0">
             <a:noFill/>
           </a:ln>
         </p:spPr>
         <p:txBody>
-          <a:bodyPr xmlns:a="http://schemas.openxmlformats.org/drawingml/2006/main" lIns="38100" tIns="19050" rIns="38100" bIns="19050" anchor="t">
-            <a:normAutofit fontScale="100000"/>
-          </a:bodyPr>
-          <a:lstStyle xmlns:a="http://schemas.openxmlformats.org/drawingml/2006/main"/>
-          <a:p xmlns:a="http://schemas.openxmlformats.org/drawingml/2006/main">
-            <a:pPr algn="ctr">
-              <a:defRPr sz="1425" b="0">
-                <a:solidFill>
-                  <a:srgbClr val="444444"/>
-                </a:solidFill>
-                <a:latin typeface="Tahoma"/>
-                <a:ea typeface="Tahoma"/>
-                <a:cs typeface="Tahoma"/>
-              </a:defRPr>
-            </a:pPr>
-            <a:r>
-              <a:rPr sz="1425" b="0">
-                <a:solidFill>
-                  <a:srgbClr val="444444"/>
-                </a:solidFill>
-                <a:latin typeface="Tahoma"/>
-                <a:ea typeface="Tahoma"/>
-                <a:cs typeface="Tahoma"/>
-              </a:rPr>
-              <a:t>Μεταφορά ενός αρχείου από το Διαδίκτυο στον υπολογιστή μας.</a:t>
-            </a:r>
+          <a:bodyPr/>
+          <a:lstStyle/>
+          <a:p>
+            <a:endParaRPr lang="en-GB"/>
           </a:p>
         </p:txBody>
       </p:sp>
       <p:pic>
         <p:nvPicPr>
-          <p:cNvPr id="15" name=""/>
+          <p:cNvPr id="7" name="Picture 6">
+            <a:extLst>
+              <a:ext uri="{FF2B5EF4-FFF2-40B4-BE49-F238E27FC236}">
+                <a16:creationId xmlns:a16="http://schemas.microsoft.com/office/drawing/2014/main" id="{4547B794-9E8B-DC10-F2EA-2213E6395F55}"/>
+              </a:ext>
+            </a:extLst>
+          </p:cNvPr>
           <p:cNvPicPr>
-            <a:picLocks xmlns:a="http://schemas.openxmlformats.org/drawingml/2006/main" noChangeAspect="1"/>
+            <a:picLocks noChangeAspect="1"/>
           </p:cNvPicPr>
           <p:nvPr/>
         </p:nvPicPr>
         <p:blipFill>
-          <a:blip xmlns:r="http://schemas.openxmlformats.org/officeDocument/2006/relationships" xmlns:a="http://schemas.openxmlformats.org/drawingml/2006/main" r:embed="Ra45279ece2194f2c"/>
-          <a:stretch xmlns:a="http://schemas.openxmlformats.org/drawingml/2006/main"/>
+          <a:blip r:embed="rId3"/>
+          <a:stretch>
+            <a:fillRect/>
+          </a:stretch>
         </p:blipFill>
         <p:spPr>
-          <a:xfrm xmlns:a="http://schemas.openxmlformats.org/drawingml/2006/main">
-            <a:off x="6953250" y="3123740"/>
-            <a:ext cx="4333875" cy="229520"/>
-          </a:xfrm>
-          <a:prstGeom xmlns:a="http://schemas.openxmlformats.org/drawingml/2006/main" prst="rect">
+          <a:xfrm>
+            <a:off x="5130800" y="863599"/>
+            <a:ext cx="6718539" cy="4882872"/>
+          </a:xfrm>
+          <a:prstGeom prst="rect">
             <a:avLst/>
           </a:prstGeom>
         </p:spPr>
       </p:pic>
-      <p:pic>
-        <p:nvPicPr>
-          <p:cNvPr id="16" name=""/>
-          <p:cNvPicPr>
-            <a:picLocks xmlns:a="http://schemas.openxmlformats.org/drawingml/2006/main" noChangeAspect="1"/>
-          </p:cNvPicPr>
-          <p:nvPr/>
-        </p:nvPicPr>
-        <p:blipFill>
-          <a:blip xmlns:r="http://schemas.openxmlformats.org/officeDocument/2006/relationships" xmlns:a="http://schemas.openxmlformats.org/drawingml/2006/main" r:embed="R443aa605f8cb4525"/>
-          <a:stretch xmlns:a="http://schemas.openxmlformats.org/drawingml/2006/main"/>
-        </p:blipFill>
-        <p:spPr>
-          <a:xfrm xmlns:a="http://schemas.openxmlformats.org/drawingml/2006/main">
-            <a:off x="8507533" y="3790950"/>
-            <a:ext cx="1082433" cy="1952625"/>
-          </a:xfrm>
-          <a:prstGeom xmlns:a="http://schemas.openxmlformats.org/drawingml/2006/main" prst="rect">
-            <a:avLst/>
-          </a:prstGeom>
-        </p:spPr>
-      </p:pic>
-      <p:sp>
-        <p:nvSpPr>
-          <p:cNvPr id="8" name="">
-            <a:extLst xmlns:a="http://schemas.openxmlformats.org/drawingml/2006/main">
-              <a:ext uri="{FF2B5EF4-FFF2-40B4-BE49-F238E27FC236}">
-                <a16:creationId xmlns:a16="http://schemas.microsoft.com/office/drawing/2014/main" id="{D6B06397-BA43-4A1E-A93C-89AC90419960}"/>
-              </a:ext>
-            </a:extLst>
-          </p:cNvPr>
-          <p:cNvSpPr>
-            <a:spLocks xmlns:a="http://schemas.openxmlformats.org/drawingml/2006/main" noGrp="1"/>
-          </p:cNvSpPr>
-          <p:nvPr/>
-        </p:nvSpPr>
-        <p:spPr>
-          <a:xfrm xmlns:a="http://schemas.openxmlformats.org/drawingml/2006/main">
-            <a:off x="552450" y="6429375"/>
-            <a:ext cx="11087100" cy="47625"/>
-          </a:xfrm>
-          <a:prstGeom xmlns:a="http://schemas.openxmlformats.org/drawingml/2006/main" prst="rect">
-            <a:avLst/>
-          </a:prstGeom>
-          <a:solidFill xmlns:a="http://schemas.openxmlformats.org/drawingml/2006/main">
-            <a:srgbClr val="F57C24"/>
-          </a:solidFill>
-          <a:ln xmlns:a="http://schemas.openxmlformats.org/drawingml/2006/main" w="0">
-            <a:noFill/>
-          </a:ln>
-        </p:spPr>
-      </p:sp>
-      <p:sp>
-        <p:nvSpPr>
-          <p:cNvPr id="9" name="">
-            <a:extLst xmlns:a="http://schemas.openxmlformats.org/drawingml/2006/main">
-              <a:ext uri="{FF2B5EF4-FFF2-40B4-BE49-F238E27FC236}">
-                <a16:creationId xmlns:a16="http://schemas.microsoft.com/office/drawing/2014/main" id="{74B45AFB-BA11-4B24-90AA-1E15EA8BE883}"/>
-              </a:ext>
-            </a:extLst>
-          </p:cNvPr>
-          <p:cNvSpPr>
-            <a:spLocks xmlns:a="http://schemas.openxmlformats.org/drawingml/2006/main" noGrp="1"/>
-          </p:cNvSpPr>
-          <p:nvPr/>
-        </p:nvSpPr>
-        <p:spPr>
-          <a:xfrm xmlns:a="http://schemas.openxmlformats.org/drawingml/2006/main">
-            <a:off x="4286250" y="6429375"/>
-            <a:ext cx="7353300" cy="47625"/>
-          </a:xfrm>
-          <a:prstGeom xmlns:a="http://schemas.openxmlformats.org/drawingml/2006/main" prst="rect">
-            <a:avLst/>
-          </a:prstGeom>
-          <a:solidFill xmlns:a="http://schemas.openxmlformats.org/drawingml/2006/main">
-            <a:srgbClr val="77A9D7"/>
-          </a:solidFill>
-          <a:ln xmlns:a="http://schemas.openxmlformats.org/drawingml/2006/main" w="0">
-            <a:noFill/>
-          </a:ln>
-        </p:spPr>
-      </p:sp>
     </p:spTree>
     <p:extLst>
       <p:ext uri="{BB962C8B-B14F-4D97-AF65-F5344CB8AC3E}">
@@ -4307,17 +4479,21 @@
       </p:ext>
     </p:extLst>
   </p:cSld>
+  <p:clrMapOvr>
+    <a:masterClrMapping/>
+  </p:clrMapOvr>
 </p:sld>
 </file>
 
 <file path=ppt/slides/slide6.xml><?xml version="1.0" encoding="utf-8"?>
-<p:sld xmlns:p="http://schemas.openxmlformats.org/presentationml/2006/main">
+<p:sld xmlns:a="http://schemas.openxmlformats.org/drawingml/2006/main" xmlns:r="http://schemas.openxmlformats.org/officeDocument/2006/relationships" xmlns:p="http://schemas.openxmlformats.org/presentationml/2006/main">
   <p:cSld>
     <p:bg>
       <p:bgPr>
-        <a:solidFill xmlns:a="http://schemas.openxmlformats.org/drawingml/2006/main">
+        <a:solidFill>
           <a:srgbClr val="FFFFFF"/>
         </a:solidFill>
+        <a:effectLst/>
       </p:bgPr>
     </p:bg>
     <p:spTree>
@@ -4327,41 +4503,46 @@
         <p:nvPr/>
       </p:nvGrpSpPr>
       <p:grpSpPr>
-        <a:xfrm xmlns:a="http://schemas.openxmlformats.org/drawingml/2006/main"/>
+        <a:xfrm>
+          <a:off x="0" y="0"/>
+          <a:ext cx="0" cy="0"/>
+          <a:chOff x="0" y="0"/>
+          <a:chExt cx="0" cy="0"/>
+        </a:xfrm>
       </p:grpSpPr>
       <p:sp>
         <p:nvSpPr>
-          <p:cNvPr id="9" name="">
-            <a:extLst xmlns:a="http://schemas.openxmlformats.org/drawingml/2006/main">
+          <p:cNvPr id="9" name="Rectangle 8">
+            <a:extLst>
               <a:ext uri="{FF2B5EF4-FFF2-40B4-BE49-F238E27FC236}">
                 <a16:creationId xmlns:a16="http://schemas.microsoft.com/office/drawing/2014/main" id="{2CE58635-C629-432F-B5B3-13530BF6144F}"/>
               </a:ext>
             </a:extLst>
           </p:cNvPr>
           <p:cNvSpPr>
-            <a:spLocks xmlns:a="http://schemas.openxmlformats.org/drawingml/2006/main" noGrp="1"/>
-          </p:cNvSpPr>
-          <p:nvPr/>
-        </p:nvSpPr>
-        <p:spPr>
-          <a:xfrm xmlns:a="http://schemas.openxmlformats.org/drawingml/2006/main">
+            <a:spLocks noGrp="1"/>
+          </p:cNvSpPr>
+          <p:nvPr/>
+        </p:nvSpPr>
+        <p:spPr>
+          <a:xfrm>
             <a:off x="552450" y="333375"/>
             <a:ext cx="11087100" cy="704850"/>
           </a:xfrm>
-          <a:prstGeom xmlns:a="http://schemas.openxmlformats.org/drawingml/2006/main" prst="rect">
-            <a:avLst/>
-          </a:prstGeom>
-          <a:noFill xmlns:a="http://schemas.openxmlformats.org/drawingml/2006/main"/>
-          <a:ln xmlns:a="http://schemas.openxmlformats.org/drawingml/2006/main" w="0">
+          <a:prstGeom prst="rect">
+            <a:avLst/>
+          </a:prstGeom>
+          <a:noFill/>
+          <a:ln w="0">
             <a:noFill/>
           </a:ln>
         </p:spPr>
         <p:txBody>
-          <a:bodyPr xmlns:a="http://schemas.openxmlformats.org/drawingml/2006/main" lIns="38100" tIns="19050" rIns="38100" bIns="19050" anchor="t">
-            <a:normAutofit fontScale="100000"/>
+          <a:bodyPr lIns="38100" tIns="19050" rIns="38100" bIns="19050" anchor="t">
+            <a:normAutofit/>
           </a:bodyPr>
-          <a:lstStyle xmlns:a="http://schemas.openxmlformats.org/drawingml/2006/main"/>
-          <a:p xmlns:a="http://schemas.openxmlformats.org/drawingml/2006/main">
+          <a:lstStyle/>
+          <a:p>
             <a:pPr algn="l">
               <a:defRPr sz="2550" b="0">
                 <a:solidFill>
@@ -4388,67 +4569,74 @@
       </p:sp>
       <p:sp>
         <p:nvSpPr>
-          <p:cNvPr id="2" name="">
-            <a:extLst xmlns:a="http://schemas.openxmlformats.org/drawingml/2006/main">
+          <p:cNvPr id="2" name="Rectangle 1">
+            <a:extLst>
               <a:ext uri="{FF2B5EF4-FFF2-40B4-BE49-F238E27FC236}">
                 <a16:creationId xmlns:a16="http://schemas.microsoft.com/office/drawing/2014/main" id="{BD4C00D0-6D84-4B19-8A99-6A1F36E007A8}"/>
               </a:ext>
             </a:extLst>
           </p:cNvPr>
           <p:cNvSpPr>
-            <a:spLocks xmlns:a="http://schemas.openxmlformats.org/drawingml/2006/main" noGrp="1"/>
-          </p:cNvSpPr>
-          <p:nvPr/>
-        </p:nvSpPr>
-        <p:spPr>
-          <a:xfrm xmlns:a="http://schemas.openxmlformats.org/drawingml/2006/main">
+            <a:spLocks noGrp="1"/>
+          </p:cNvSpPr>
+          <p:nvPr/>
+        </p:nvSpPr>
+        <p:spPr>
+          <a:xfrm>
             <a:off x="619125" y="1200150"/>
             <a:ext cx="1762125" cy="47625"/>
           </a:xfrm>
-          <a:prstGeom xmlns:a="http://schemas.openxmlformats.org/drawingml/2006/main" prst="rect">
-            <a:avLst/>
-          </a:prstGeom>
-          <a:solidFill xmlns:a="http://schemas.openxmlformats.org/drawingml/2006/main">
+          <a:prstGeom prst="rect">
+            <a:avLst/>
+          </a:prstGeom>
+          <a:solidFill>
             <a:srgbClr val="F57C24"/>
           </a:solidFill>
-          <a:ln xmlns:a="http://schemas.openxmlformats.org/drawingml/2006/main" w="0">
+          <a:ln w="0">
             <a:noFill/>
           </a:ln>
         </p:spPr>
-      </p:sp>
-      <p:sp>
-        <p:nvSpPr>
-          <p:cNvPr id="3" name="">
-            <a:extLst xmlns:a="http://schemas.openxmlformats.org/drawingml/2006/main">
+        <p:txBody>
+          <a:bodyPr/>
+          <a:lstStyle/>
+          <a:p>
+            <a:endParaRPr lang="en-GB"/>
+          </a:p>
+        </p:txBody>
+      </p:sp>
+      <p:sp>
+        <p:nvSpPr>
+          <p:cNvPr id="3" name="Rectangle 2">
+            <a:extLst>
               <a:ext uri="{FF2B5EF4-FFF2-40B4-BE49-F238E27FC236}">
                 <a16:creationId xmlns:a16="http://schemas.microsoft.com/office/drawing/2014/main" id="{5BA15B3A-082B-44B5-838A-9C6CA61E866D}"/>
               </a:ext>
             </a:extLst>
           </p:cNvPr>
           <p:cNvSpPr>
-            <a:spLocks xmlns:a="http://schemas.openxmlformats.org/drawingml/2006/main" noGrp="1"/>
-          </p:cNvSpPr>
-          <p:nvPr/>
-        </p:nvSpPr>
-        <p:spPr>
-          <a:xfrm xmlns:a="http://schemas.openxmlformats.org/drawingml/2006/main">
+            <a:spLocks noGrp="1"/>
+          </p:cNvSpPr>
+          <p:nvPr/>
+        </p:nvSpPr>
+        <p:spPr>
+          <a:xfrm>
             <a:off x="590550" y="1524000"/>
             <a:ext cx="4095750" cy="1905000"/>
           </a:xfrm>
-          <a:prstGeom xmlns:a="http://schemas.openxmlformats.org/drawingml/2006/main" prst="rect">
-            <a:avLst/>
-          </a:prstGeom>
-          <a:noFill xmlns:a="http://schemas.openxmlformats.org/drawingml/2006/main"/>
-          <a:ln xmlns:a="http://schemas.openxmlformats.org/drawingml/2006/main" w="0">
+          <a:prstGeom prst="rect">
+            <a:avLst/>
+          </a:prstGeom>
+          <a:noFill/>
+          <a:ln w="0">
             <a:noFill/>
           </a:ln>
         </p:spPr>
         <p:txBody>
-          <a:bodyPr xmlns:a="http://schemas.openxmlformats.org/drawingml/2006/main" lIns="28575" tIns="19050" rIns="28575" bIns="19050" anchor="t">
-            <a:normAutofit fontScale="100000"/>
+          <a:bodyPr lIns="28575" tIns="19050" rIns="28575" bIns="19050" anchor="t">
+            <a:normAutofit/>
           </a:bodyPr>
-          <a:lstStyle xmlns:a="http://schemas.openxmlformats.org/drawingml/2006/main"/>
-          <a:p xmlns:a="http://schemas.openxmlformats.org/drawingml/2006/main">
+          <a:lstStyle/>
+          <a:p>
             <a:pPr marL="254000" indent="-152400" algn="l">
               <a:spcAft>
                 <a:spcPts val="550"/>
@@ -4475,7 +4663,7 @@
               <a:t>Σελίδες 127–128</a:t>
             </a:r>
           </a:p>
-          <a:p xmlns:a="http://schemas.openxmlformats.org/drawingml/2006/main">
+          <a:p>
             <a:pPr marL="254000" indent="-152400" algn="l">
               <a:spcAft>
                 <a:spcPts val="550"/>
@@ -4502,7 +4690,7 @@
               <a:t>Δραστηριότητες 1–16</a:t>
             </a:r>
           </a:p>
-          <a:p xmlns:a="http://schemas.openxmlformats.org/drawingml/2006/main">
+          <a:p>
             <a:pPr marL="254000" indent="-152400" algn="l">
               <a:spcAft>
                 <a:spcPts val="550"/>
@@ -4533,37 +4721,37 @@
       </p:sp>
       <p:sp>
         <p:nvSpPr>
-          <p:cNvPr id="4" name="">
-            <a:extLst xmlns:a="http://schemas.openxmlformats.org/drawingml/2006/main">
+          <p:cNvPr id="4" name="Rectangle 3">
+            <a:extLst>
               <a:ext uri="{FF2B5EF4-FFF2-40B4-BE49-F238E27FC236}">
                 <a16:creationId xmlns:a16="http://schemas.microsoft.com/office/drawing/2014/main" id="{FAE2A696-0DEE-4E26-B077-C41A10B1A31D}"/>
               </a:ext>
             </a:extLst>
           </p:cNvPr>
           <p:cNvSpPr>
-            <a:spLocks xmlns:a="http://schemas.openxmlformats.org/drawingml/2006/main" noGrp="1"/>
-          </p:cNvSpPr>
-          <p:nvPr/>
-        </p:nvSpPr>
-        <p:spPr>
-          <a:xfrm xmlns:a="http://schemas.openxmlformats.org/drawingml/2006/main">
+            <a:spLocks noGrp="1"/>
+          </p:cNvSpPr>
+          <p:nvPr/>
+        </p:nvSpPr>
+        <p:spPr>
+          <a:xfrm>
             <a:off x="590550" y="3714750"/>
             <a:ext cx="4095750" cy="1047750"/>
           </a:xfrm>
-          <a:prstGeom xmlns:a="http://schemas.openxmlformats.org/drawingml/2006/main" prst="rect">
-            <a:avLst/>
-          </a:prstGeom>
-          <a:noFill xmlns:a="http://schemas.openxmlformats.org/drawingml/2006/main"/>
-          <a:ln xmlns:a="http://schemas.openxmlformats.org/drawingml/2006/main" w="0">
+          <a:prstGeom prst="rect">
+            <a:avLst/>
+          </a:prstGeom>
+          <a:noFill/>
+          <a:ln w="0">
             <a:noFill/>
           </a:ln>
         </p:spPr>
         <p:txBody>
-          <a:bodyPr xmlns:a="http://schemas.openxmlformats.org/drawingml/2006/main" lIns="38100" tIns="19050" rIns="38100" bIns="19050" anchor="t">
-            <a:normAutofit fontScale="100000"/>
+          <a:bodyPr lIns="38100" tIns="19050" rIns="38100" bIns="19050" anchor="t">
+            <a:normAutofit/>
           </a:bodyPr>
-          <a:lstStyle xmlns:a="http://schemas.openxmlformats.org/drawingml/2006/main"/>
-          <a:p xmlns:a="http://schemas.openxmlformats.org/drawingml/2006/main">
+          <a:lstStyle/>
+          <a:p>
             <a:pPr algn="l">
               <a:defRPr sz="1575" b="0">
                 <a:solidFill>
@@ -4588,109 +4776,79 @@
           </a:p>
         </p:txBody>
       </p:sp>
-      <p:pic>
-        <p:nvPicPr>
-          <p:cNvPr id="13" name=""/>
-          <p:cNvPicPr>
-            <a:picLocks xmlns:a="http://schemas.openxmlformats.org/drawingml/2006/main" noChangeAspect="1"/>
-          </p:cNvPicPr>
-          <p:nvPr/>
-        </p:nvPicPr>
-        <p:blipFill>
-          <a:blip xmlns:r="http://schemas.openxmlformats.org/officeDocument/2006/relationships" xmlns:a="http://schemas.openxmlformats.org/drawingml/2006/main" r:embed="R174a7eb914434c31"/>
-          <a:stretch xmlns:a="http://schemas.openxmlformats.org/drawingml/2006/main"/>
-        </p:blipFill>
-        <p:spPr>
-          <a:xfrm xmlns:a="http://schemas.openxmlformats.org/drawingml/2006/main">
-            <a:off x="5338172" y="1143000"/>
-            <a:ext cx="2896780" cy="4095750"/>
-          </a:xfrm>
-          <a:prstGeom xmlns:a="http://schemas.openxmlformats.org/drawingml/2006/main" prst="rect">
-            <a:avLst/>
-          </a:prstGeom>
-        </p:spPr>
-      </p:pic>
-      <p:pic>
-        <p:nvPicPr>
-          <p:cNvPr id="14" name=""/>
-          <p:cNvPicPr>
-            <a:picLocks xmlns:a="http://schemas.openxmlformats.org/drawingml/2006/main" noChangeAspect="1"/>
-          </p:cNvPicPr>
-          <p:nvPr/>
-        </p:nvPicPr>
-        <p:blipFill>
-          <a:blip xmlns:r="http://schemas.openxmlformats.org/officeDocument/2006/relationships" xmlns:a="http://schemas.openxmlformats.org/drawingml/2006/main" r:embed="Rf448ca2e904d4967"/>
-          <a:stretch xmlns:a="http://schemas.openxmlformats.org/drawingml/2006/main"/>
-        </p:blipFill>
-        <p:spPr>
-          <a:xfrm xmlns:a="http://schemas.openxmlformats.org/drawingml/2006/main">
-            <a:off x="8481422" y="1143000"/>
-            <a:ext cx="2896780" cy="4095750"/>
-          </a:xfrm>
-          <a:prstGeom xmlns:a="http://schemas.openxmlformats.org/drawingml/2006/main" prst="rect">
-            <a:avLst/>
-          </a:prstGeom>
-        </p:spPr>
-      </p:pic>
-      <p:sp>
-        <p:nvSpPr>
-          <p:cNvPr id="7" name="">
-            <a:extLst xmlns:a="http://schemas.openxmlformats.org/drawingml/2006/main">
+      <p:sp>
+        <p:nvSpPr>
+          <p:cNvPr id="7" name="Rectangle 6">
+            <a:extLst>
               <a:ext uri="{FF2B5EF4-FFF2-40B4-BE49-F238E27FC236}">
                 <a16:creationId xmlns:a16="http://schemas.microsoft.com/office/drawing/2014/main" id="{0A81DD13-68D0-4A87-9085-573BE3294F21}"/>
               </a:ext>
             </a:extLst>
           </p:cNvPr>
           <p:cNvSpPr>
-            <a:spLocks xmlns:a="http://schemas.openxmlformats.org/drawingml/2006/main" noGrp="1"/>
-          </p:cNvSpPr>
-          <p:nvPr/>
-        </p:nvSpPr>
-        <p:spPr>
-          <a:xfrm xmlns:a="http://schemas.openxmlformats.org/drawingml/2006/main">
+            <a:spLocks noGrp="1"/>
+          </p:cNvSpPr>
+          <p:nvPr/>
+        </p:nvSpPr>
+        <p:spPr>
+          <a:xfrm>
             <a:off x="552450" y="6429375"/>
             <a:ext cx="11087100" cy="47625"/>
           </a:xfrm>
-          <a:prstGeom xmlns:a="http://schemas.openxmlformats.org/drawingml/2006/main" prst="rect">
-            <a:avLst/>
-          </a:prstGeom>
-          <a:solidFill xmlns:a="http://schemas.openxmlformats.org/drawingml/2006/main">
+          <a:prstGeom prst="rect">
+            <a:avLst/>
+          </a:prstGeom>
+          <a:solidFill>
             <a:srgbClr val="F57C24"/>
           </a:solidFill>
-          <a:ln xmlns:a="http://schemas.openxmlformats.org/drawingml/2006/main" w="0">
+          <a:ln w="0">
             <a:noFill/>
           </a:ln>
         </p:spPr>
-      </p:sp>
-      <p:sp>
-        <p:nvSpPr>
-          <p:cNvPr id="8" name="">
-            <a:extLst xmlns:a="http://schemas.openxmlformats.org/drawingml/2006/main">
+        <p:txBody>
+          <a:bodyPr/>
+          <a:lstStyle/>
+          <a:p>
+            <a:endParaRPr lang="en-GB"/>
+          </a:p>
+        </p:txBody>
+      </p:sp>
+      <p:sp>
+        <p:nvSpPr>
+          <p:cNvPr id="8" name="Rectangle 7">
+            <a:extLst>
               <a:ext uri="{FF2B5EF4-FFF2-40B4-BE49-F238E27FC236}">
                 <a16:creationId xmlns:a16="http://schemas.microsoft.com/office/drawing/2014/main" id="{937C338C-AE99-4D7F-A888-E2436FF8029A}"/>
               </a:ext>
             </a:extLst>
           </p:cNvPr>
           <p:cNvSpPr>
-            <a:spLocks xmlns:a="http://schemas.openxmlformats.org/drawingml/2006/main" noGrp="1"/>
-          </p:cNvSpPr>
-          <p:nvPr/>
-        </p:nvSpPr>
-        <p:spPr>
-          <a:xfrm xmlns:a="http://schemas.openxmlformats.org/drawingml/2006/main">
+            <a:spLocks noGrp="1"/>
+          </p:cNvSpPr>
+          <p:nvPr/>
+        </p:nvSpPr>
+        <p:spPr>
+          <a:xfrm>
             <a:off x="4286250" y="6429375"/>
             <a:ext cx="7353300" cy="47625"/>
           </a:xfrm>
-          <a:prstGeom xmlns:a="http://schemas.openxmlformats.org/drawingml/2006/main" prst="rect">
-            <a:avLst/>
-          </a:prstGeom>
-          <a:solidFill xmlns:a="http://schemas.openxmlformats.org/drawingml/2006/main">
+          <a:prstGeom prst="rect">
+            <a:avLst/>
+          </a:prstGeom>
+          <a:solidFill>
             <a:srgbClr val="77A9D7"/>
           </a:solidFill>
-          <a:ln xmlns:a="http://schemas.openxmlformats.org/drawingml/2006/main" w="0">
+          <a:ln w="0">
             <a:noFill/>
           </a:ln>
         </p:spPr>
+        <p:txBody>
+          <a:bodyPr/>
+          <a:lstStyle/>
+          <a:p>
+            <a:endParaRPr lang="en-GB"/>
+          </a:p>
+        </p:txBody>
       </p:sp>
     </p:spTree>
     <p:extLst>
@@ -4699,6 +4857,9 @@
       </p:ext>
     </p:extLst>
   </p:cSld>
+  <p:clrMapOvr>
+    <a:masterClrMapping/>
+  </p:clrMapOvr>
 </p:sld>
 </file>
 
@@ -4944,5 +5105,254 @@
       </a:bgFillStyleLst>
     </a:fmtScheme>
   </a:themeElements>
+  <a:objectDefaults/>
+  <a:extraClrSchemeLst/>
+</a:theme>
+</file>
+
+<file path=ppt/theme/theme2.xml><?xml version="1.0" encoding="utf-8"?>
+<a:theme xmlns:a="http://schemas.openxmlformats.org/drawingml/2006/main" name="ChatGPT">
+  <a:themeElements>
+    <a:clrScheme name="ChatGPT">
+      <a:dk1>
+        <a:srgbClr val="000000"/>
+      </a:dk1>
+      <a:lt1>
+        <a:srgbClr val="FFFFFF"/>
+      </a:lt1>
+      <a:dk2>
+        <a:srgbClr val="0E2841"/>
+      </a:dk2>
+      <a:lt2>
+        <a:srgbClr val="E8E8E8"/>
+      </a:lt2>
+      <a:accent1>
+        <a:srgbClr val="156082"/>
+      </a:accent1>
+      <a:accent2>
+        <a:srgbClr val="E97132"/>
+      </a:accent2>
+      <a:accent3>
+        <a:srgbClr val="196B24"/>
+      </a:accent3>
+      <a:accent4>
+        <a:srgbClr val="0F9ED5"/>
+      </a:accent4>
+      <a:accent5>
+        <a:srgbClr val="A02B93"/>
+      </a:accent5>
+      <a:accent6>
+        <a:srgbClr val="4EA72E"/>
+      </a:accent6>
+      <a:hlink>
+        <a:srgbClr val="467886"/>
+      </a:hlink>
+      <a:folHlink>
+        <a:srgbClr val="96607D"/>
+      </a:folHlink>
+    </a:clrScheme>
+    <a:fontScheme name="Office">
+      <a:majorFont>
+        <a:latin typeface="Calibri Light"/>
+        <a:ea typeface="Calibri Light"/>
+        <a:cs typeface="Calibri Light"/>
+      </a:majorFont>
+      <a:minorFont>
+        <a:latin typeface="Calibri"/>
+        <a:ea typeface="Calibri"/>
+        <a:cs typeface="Calibri"/>
+      </a:minorFont>
+    </a:fontScheme>
+    <a:fmtScheme name="ChatGPT">
+      <a:fillStyleLst>
+        <a:solidFill>
+          <a:schemeClr val="phClr"/>
+        </a:solidFill>
+        <a:gradFill>
+          <a:gsLst>
+            <a:gs pos="0">
+              <a:schemeClr val="phClr">
+                <a:tint val="67000"/>
+                <a:lumMod val="110000"/>
+                <a:satMod val="105000"/>
+              </a:schemeClr>
+            </a:gs>
+            <a:gs pos="50000">
+              <a:schemeClr val="phClr">
+                <a:tint val="73000"/>
+                <a:lumMod val="105000"/>
+                <a:satMod val="103000"/>
+              </a:schemeClr>
+            </a:gs>
+            <a:gs pos="100000">
+              <a:schemeClr val="phClr">
+                <a:tint val="81000"/>
+                <a:lumMod val="105000"/>
+                <a:satMod val="109000"/>
+              </a:schemeClr>
+            </a:gs>
+          </a:gsLst>
+          <a:lin ang="5400000" scaled="0"/>
+        </a:gradFill>
+        <a:gradFill>
+          <a:gsLst>
+            <a:gs pos="0">
+              <a:schemeClr val="phClr">
+                <a:tint val="94000"/>
+                <a:lumMod val="102000"/>
+                <a:satMod val="103000"/>
+              </a:schemeClr>
+            </a:gs>
+            <a:gs pos="50000">
+              <a:schemeClr val="phClr">
+                <a:shade val="100000"/>
+                <a:lumMod val="100000"/>
+                <a:satMod val="110000"/>
+              </a:schemeClr>
+            </a:gs>
+            <a:gs pos="100000">
+              <a:schemeClr val="phClr">
+                <a:shade val="78000"/>
+                <a:lumMod val="99000"/>
+                <a:satMod val="120000"/>
+              </a:schemeClr>
+            </a:gs>
+          </a:gsLst>
+          <a:lin ang="5400000" scaled="0"/>
+        </a:gradFill>
+      </a:fillStyleLst>
+      <a:lnStyleLst>
+        <a:ln w="12700">
+          <a:solidFill>
+            <a:schemeClr val="phClr"/>
+          </a:solidFill>
+          <a:prstDash val="solid"/>
+        </a:ln>
+        <a:ln w="19050">
+          <a:solidFill>
+            <a:schemeClr val="phClr"/>
+          </a:solidFill>
+          <a:prstDash val="solid"/>
+        </a:ln>
+        <a:ln w="25400">
+          <a:solidFill>
+            <a:schemeClr val="phClr"/>
+          </a:solidFill>
+          <a:prstDash val="solid"/>
+        </a:ln>
+      </a:lnStyleLst>
+      <a:effectStyleLst>
+        <a:effectStyle>
+          <a:effectLst/>
+        </a:effectStyle>
+        <a:effectStyle>
+          <a:effectLst/>
+        </a:effectStyle>
+        <a:effectStyle>
+          <a:effectLst>
+            <a:outerShdw blurRad="57150" dist="19050" dir="5400000">
+              <a:srgbClr val="000000">
+                <a:alpha val="16000"/>
+              </a:srgbClr>
+            </a:outerShdw>
+          </a:effectLst>
+        </a:effectStyle>
+        <a:effectStyle>
+          <a:effectLst>
+            <a:outerShdw blurRad="19050" dist="9525" dir="5400000">
+              <a:srgbClr val="000000">
+                <a:alpha val="6000"/>
+              </a:srgbClr>
+            </a:outerShdw>
+          </a:effectLst>
+        </a:effectStyle>
+        <a:effectStyle>
+          <a:effectLst>
+            <a:outerShdw blurRad="28575" dist="9525" dir="5400000">
+              <a:srgbClr val="000000">
+                <a:alpha val="8000"/>
+              </a:srgbClr>
+            </a:outerShdw>
+          </a:effectLst>
+        </a:effectStyle>
+        <a:effectStyle>
+          <a:effectLst>
+            <a:outerShdw blurRad="57150" dist="19050" dir="5400000">
+              <a:srgbClr val="000000">
+                <a:alpha val="10000"/>
+              </a:srgbClr>
+            </a:outerShdw>
+          </a:effectLst>
+        </a:effectStyle>
+        <a:effectStyle>
+          <a:effectLst>
+            <a:outerShdw blurRad="114300" dist="38100" dir="5400000">
+              <a:srgbClr val="000000">
+                <a:alpha val="12000"/>
+              </a:srgbClr>
+            </a:outerShdw>
+          </a:effectLst>
+        </a:effectStyle>
+        <a:effectStyle>
+          <a:effectLst>
+            <a:outerShdw blurRad="171450" dist="57150" dir="5400000">
+              <a:srgbClr val="000000">
+                <a:alpha val="16000"/>
+              </a:srgbClr>
+            </a:outerShdw>
+          </a:effectLst>
+        </a:effectStyle>
+        <a:effectStyle>
+          <a:effectLst>
+            <a:outerShdw blurRad="266700" dist="95250" dir="5400000">
+              <a:srgbClr val="000000">
+                <a:alpha val="24000"/>
+              </a:srgbClr>
+            </a:outerShdw>
+          </a:effectLst>
+        </a:effectStyle>
+      </a:effectStyleLst>
+      <a:bgFillStyleLst>
+        <a:solidFill>
+          <a:schemeClr val="phClr"/>
+        </a:solidFill>
+        <a:solidFill>
+          <a:schemeClr val="phClr">
+            <a:tint val="95000"/>
+            <a:satMod val="170000"/>
+          </a:schemeClr>
+        </a:solidFill>
+        <a:gradFill>
+          <a:gsLst>
+            <a:gs pos="0">
+              <a:schemeClr val="phClr">
+                <a:tint val="93000"/>
+                <a:shade val="98000"/>
+                <a:lumMod val="102000"/>
+                <a:satMod val="150000"/>
+              </a:schemeClr>
+            </a:gs>
+            <a:gs pos="50000">
+              <a:schemeClr val="phClr">
+                <a:tint val="98000"/>
+                <a:shade val="90000"/>
+                <a:lumMod val="103000"/>
+                <a:satMod val="130000"/>
+              </a:schemeClr>
+            </a:gs>
+            <a:gs pos="100000">
+              <a:schemeClr val="phClr">
+                <a:shade val="63000"/>
+                <a:satMod val="120000"/>
+              </a:schemeClr>
+            </a:gs>
+          </a:gsLst>
+          <a:lin ang="5400000" scaled="0"/>
+        </a:gradFill>
+      </a:bgFillStyleLst>
+    </a:fmtScheme>
+  </a:themeElements>
+  <a:objectDefaults/>
+  <a:extraClrSchemeLst/>
 </a:theme>
 </file>
--- a/schools-presentations/A Gymnasiou/A5.1 Μ3 - Εντοπισμός Πληροφοριών από το Διαδίκτυο.pptx
+++ b/schools-presentations/A Gymnasiou/A5.1 Μ3 - Εντοπισμός Πληροφοριών από το Διαδίκτυο.pptx
@@ -5,7 +5,7 @@
     <p:sldMasterId id="2147483648" r:id="rId1"/>
   </p:sldMasterIdLst>
   <p:notesMasterIdLst>
-    <p:notesMasterId r:id="rId8"/>
+    <p:notesMasterId r:id="rId7"/>
   </p:notesMasterIdLst>
   <p:sldIdLst>
     <p:sldId id="256" r:id="rId2"/>
@@ -13,7 +13,6 @@
     <p:sldId id="258" r:id="rId4"/>
     <p:sldId id="259" r:id="rId5"/>
     <p:sldId id="260" r:id="rId6"/>
-    <p:sldId id="261" r:id="rId7"/>
   </p:sldIdLst>
   <p:sldSz cx="12192000" cy="6858000"/>
   <p:notesSz cx="6858000" cy="9144000"/>
@@ -112,6 +111,11 @@
       </a:defRPr>
     </a:lvl9pPr>
   </p:defaultTextStyle>
+  <p:extLst>
+    <p:ext uri="{EFAFB233-063F-42B5-8137-9DF3F51BA10A}">
+      <p15:sldGuideLst xmlns:p15="http://schemas.microsoft.com/office/powerpoint/2012/main"/>
+    </p:ext>
+  </p:extLst>
 </p:presentation>
 </file>
 
@@ -119,8 +123,8 @@
 <pc:chgInfo xmlns:a="http://schemas.openxmlformats.org/drawingml/2006/main" xmlns:r="http://schemas.openxmlformats.org/officeDocument/2006/relationships" xmlns:ac="http://schemas.microsoft.com/office/drawing/2013/main/command" xmlns:pc="http://schemas.microsoft.com/office/powerpoint/2013/main/command">
   <pc:docChgLst>
     <pc:chgData name="Άριστος Αρέστη" userId="813aa191-2d4c-464f-9d05-0a7e494d859f" providerId="ADAL" clId="{49C7B61D-1ACF-4AFF-A04E-A3B433E32474}"/>
-    <pc:docChg chg="custSel modSld">
-      <pc:chgData name="Άριστος Αρέστη" userId="813aa191-2d4c-464f-9d05-0a7e494d859f" providerId="ADAL" clId="{49C7B61D-1ACF-4AFF-A04E-A3B433E32474}" dt="2026-10-03T06:46:25.149" v="13" actId="478"/>
+    <pc:docChg chg="custSel delSld modSld">
+      <pc:chgData name="Άριστος Αρέστη" userId="813aa191-2d4c-464f-9d05-0a7e494d859f" providerId="ADAL" clId="{49C7B61D-1ACF-4AFF-A04E-A3B433E32474}" dt="2026-10-13T12:14:34.354" v="14" actId="47"/>
       <pc:docMkLst>
         <pc:docMk/>
       </pc:docMkLst>
@@ -138,22 +142,6 @@
             <ac:spMk id="2" creationId="{B05E293B-CC71-4C59-AC6C-1AD3D5C69AD9}"/>
           </ac:spMkLst>
         </pc:spChg>
-        <pc:spChg chg="del">
-          <ac:chgData name="Άριστος Αρέστη" userId="813aa191-2d4c-464f-9d05-0a7e494d859f" providerId="ADAL" clId="{49C7B61D-1ACF-4AFF-A04E-A3B433E32474}" dt="2026-10-03T06:01:54.700" v="2" actId="478"/>
-          <ac:spMkLst>
-            <pc:docMk/>
-            <pc:sldMk cId="1751851059" sldId="260"/>
-            <ac:spMk id="4" creationId="{7D79C285-28C6-4B01-8D43-387F88432D71}"/>
-          </ac:spMkLst>
-        </pc:spChg>
-        <pc:spChg chg="del">
-          <ac:chgData name="Άριστος Αρέστη" userId="813aa191-2d4c-464f-9d05-0a7e494d859f" providerId="ADAL" clId="{49C7B61D-1ACF-4AFF-A04E-A3B433E32474}" dt="2026-10-03T06:01:57.401" v="3" actId="478"/>
-          <ac:spMkLst>
-            <pc:docMk/>
-            <pc:sldMk cId="1751851059" sldId="260"/>
-            <ac:spMk id="5" creationId="{194F3C58-D72A-4E22-8A6E-455918DC4055}"/>
-          </ac:spMkLst>
-        </pc:spChg>
         <pc:picChg chg="add mod">
           <ac:chgData name="Άριστος Αρέστη" userId="813aa191-2d4c-464f-9d05-0a7e494d859f" providerId="ADAL" clId="{49C7B61D-1ACF-4AFF-A04E-A3B433E32474}" dt="2026-10-03T06:02:22.192" v="11" actId="1076"/>
           <ac:picMkLst>
@@ -162,45 +150,13 @@
             <ac:picMk id="7" creationId="{4547B794-9E8B-DC10-F2EA-2213E6395F55}"/>
           </ac:picMkLst>
         </pc:picChg>
-        <pc:picChg chg="del">
-          <ac:chgData name="Άριστος Αρέστη" userId="813aa191-2d4c-464f-9d05-0a7e494d859f" providerId="ADAL" clId="{49C7B61D-1ACF-4AFF-A04E-A3B433E32474}" dt="2026-10-03T06:01:40.224" v="0" actId="478"/>
-          <ac:picMkLst>
-            <pc:docMk/>
-            <pc:sldMk cId="1751851059" sldId="260"/>
-            <ac:picMk id="15" creationId="{00000000-0000-0000-0000-000000000000}"/>
-          </ac:picMkLst>
-        </pc:picChg>
-        <pc:picChg chg="del">
-          <ac:chgData name="Άριστος Αρέστη" userId="813aa191-2d4c-464f-9d05-0a7e494d859f" providerId="ADAL" clId="{49C7B61D-1ACF-4AFF-A04E-A3B433E32474}" dt="2026-10-03T06:01:49.090" v="1" actId="478"/>
-          <ac:picMkLst>
-            <pc:docMk/>
-            <pc:sldMk cId="1751851059" sldId="260"/>
-            <ac:picMk id="16" creationId="{00000000-0000-0000-0000-000000000000}"/>
-          </ac:picMkLst>
-        </pc:picChg>
       </pc:sldChg>
-      <pc:sldChg chg="delSp mod">
-        <pc:chgData name="Άριστος Αρέστη" userId="813aa191-2d4c-464f-9d05-0a7e494d859f" providerId="ADAL" clId="{49C7B61D-1ACF-4AFF-A04E-A3B433E32474}" dt="2026-10-03T06:46:25.149" v="13" actId="478"/>
+      <pc:sldChg chg="delSp del mod">
+        <pc:chgData name="Άριστος Αρέστη" userId="813aa191-2d4c-464f-9d05-0a7e494d859f" providerId="ADAL" clId="{49C7B61D-1ACF-4AFF-A04E-A3B433E32474}" dt="2026-10-13T12:14:34.354" v="14" actId="47"/>
         <pc:sldMkLst>
           <pc:docMk/>
           <pc:sldMk cId="1154500895" sldId="261"/>
         </pc:sldMkLst>
-        <pc:picChg chg="del">
-          <ac:chgData name="Άριστος Αρέστη" userId="813aa191-2d4c-464f-9d05-0a7e494d859f" providerId="ADAL" clId="{49C7B61D-1ACF-4AFF-A04E-A3B433E32474}" dt="2026-10-03T06:46:22.264" v="12" actId="478"/>
-          <ac:picMkLst>
-            <pc:docMk/>
-            <pc:sldMk cId="1154500895" sldId="261"/>
-            <ac:picMk id="13" creationId="{00000000-0000-0000-0000-000000000000}"/>
-          </ac:picMkLst>
-        </pc:picChg>
-        <pc:picChg chg="del">
-          <ac:chgData name="Άριστος Αρέστη" userId="813aa191-2d4c-464f-9d05-0a7e494d859f" providerId="ADAL" clId="{49C7B61D-1ACF-4AFF-A04E-A3B433E32474}" dt="2026-10-03T06:46:25.149" v="13" actId="478"/>
-          <ac:picMkLst>
-            <pc:docMk/>
-            <pc:sldMk cId="1154500895" sldId="261"/>
-            <ac:picMk id="14" creationId="{00000000-0000-0000-0000-000000000000}"/>
-          </ac:picMkLst>
-        </pc:picChg>
       </pc:sldChg>
     </pc:docChg>
   </pc:docChgLst>
@@ -687,83 +643,6 @@
 </file>
 
 <file path=ppt/notesSlides/notesSlide5.xml><?xml version="1.0" encoding="utf-8"?>
-<p:notes xmlns:a="http://schemas.openxmlformats.org/drawingml/2006/main" xmlns:r="http://schemas.openxmlformats.org/officeDocument/2006/relationships" xmlns:p="http://schemas.openxmlformats.org/presentationml/2006/main">
-  <p:cSld>
-    <p:spTree>
-      <p:nvGrpSpPr>
-        <p:cNvPr id="1" name=""/>
-        <p:cNvGrpSpPr/>
-        <p:nvPr/>
-      </p:nvGrpSpPr>
-      <p:grpSpPr>
-        <a:xfrm>
-          <a:off x="0" y="0"/>
-          <a:ext cx="0" cy="0"/>
-          <a:chOff x="0" y="0"/>
-          <a:chExt cx="0" cy="0"/>
-        </a:xfrm>
-      </p:grpSpPr>
-      <p:sp>
-        <p:nvSpPr>
-          <p:cNvPr id="2" name="Slide Image Placeholder 1"/>
-          <p:cNvSpPr>
-            <a:spLocks noGrp="1" noRot="1" noChangeAspect="1"/>
-          </p:cNvSpPr>
-          <p:nvPr>
-            <p:ph type="sldImg"/>
-          </p:nvPr>
-        </p:nvSpPr>
-        <p:spPr/>
-      </p:sp>
-      <p:sp>
-        <p:nvSpPr>
-          <p:cNvPr id="3" name="Notes Placeholder 2"/>
-          <p:cNvSpPr>
-            <a:spLocks noGrp="1"/>
-          </p:cNvSpPr>
-          <p:nvPr>
-            <p:ph type="body" idx="1"/>
-          </p:nvPr>
-        </p:nvSpPr>
-        <p:spPr/>
-        <p:txBody>
-          <a:bodyPr/>
-          <a:lstStyle/>
-          <a:p>
-            <a:r>
-              <a:t>Πηγή: Σημειώσεις και Τετράδιο Εργασιών Πληροφορικής Α΄ Γυμνασίου, ενότητα Α.5.1.Μ3.</a:t>
-            </a:r>
-          </a:p>
-        </p:txBody>
-      </p:sp>
-      <p:sp>
-        <p:nvSpPr>
-          <p:cNvPr id="4" name="Slide Number Placeholder 3"/>
-          <p:cNvSpPr>
-            <a:spLocks noGrp="1"/>
-          </p:cNvSpPr>
-          <p:nvPr>
-            <p:ph type="sldNum" idx="5"/>
-          </p:nvPr>
-        </p:nvSpPr>
-        <p:spPr/>
-        <p:txBody>
-          <a:bodyPr/>
-          <a:lstStyle/>
-          <a:p>
-            <a:endParaRPr/>
-          </a:p>
-        </p:txBody>
-      </p:sp>
-    </p:spTree>
-  </p:cSld>
-  <p:clrMapOvr>
-    <a:masterClrMapping/>
-  </p:clrMapOvr>
-</p:notes>
-</file>
-
-<file path=ppt/notesSlides/notesSlide6.xml><?xml version="1.0" encoding="utf-8"?>
 <p:notes xmlns:a="http://schemas.openxmlformats.org/drawingml/2006/main" xmlns:r="http://schemas.openxmlformats.org/officeDocument/2006/relationships" xmlns:p="http://schemas.openxmlformats.org/presentationml/2006/main">
   <p:cSld>
     <p:spTree>
@@ -4476,384 +4355,6 @@
     <p:extLst>
       <p:ext uri="{BB962C8B-B14F-4D97-AF65-F5344CB8AC3E}">
         <p14:creationId xmlns:p14="http://schemas.microsoft.com/office/powerpoint/2010/main" val="1751851059"/>
-      </p:ext>
-    </p:extLst>
-  </p:cSld>
-  <p:clrMapOvr>
-    <a:masterClrMapping/>
-  </p:clrMapOvr>
-</p:sld>
-</file>
-
-<file path=ppt/slides/slide6.xml><?xml version="1.0" encoding="utf-8"?>
-<p:sld xmlns:a="http://schemas.openxmlformats.org/drawingml/2006/main" xmlns:r="http://schemas.openxmlformats.org/officeDocument/2006/relationships" xmlns:p="http://schemas.openxmlformats.org/presentationml/2006/main">
-  <p:cSld>
-    <p:bg>
-      <p:bgPr>
-        <a:solidFill>
-          <a:srgbClr val="FFFFFF"/>
-        </a:solidFill>
-        <a:effectLst/>
-      </p:bgPr>
-    </p:bg>
-    <p:spTree>
-      <p:nvGrpSpPr>
-        <p:cNvPr id="1" name=""/>
-        <p:cNvGrpSpPr/>
-        <p:nvPr/>
-      </p:nvGrpSpPr>
-      <p:grpSpPr>
-        <a:xfrm>
-          <a:off x="0" y="0"/>
-          <a:ext cx="0" cy="0"/>
-          <a:chOff x="0" y="0"/>
-          <a:chExt cx="0" cy="0"/>
-        </a:xfrm>
-      </p:grpSpPr>
-      <p:sp>
-        <p:nvSpPr>
-          <p:cNvPr id="9" name="Rectangle 8">
-            <a:extLst>
-              <a:ext uri="{FF2B5EF4-FFF2-40B4-BE49-F238E27FC236}">
-                <a16:creationId xmlns:a16="http://schemas.microsoft.com/office/drawing/2014/main" id="{2CE58635-C629-432F-B5B3-13530BF6144F}"/>
-              </a:ext>
-            </a:extLst>
-          </p:cNvPr>
-          <p:cNvSpPr>
-            <a:spLocks noGrp="1"/>
-          </p:cNvSpPr>
-          <p:nvPr/>
-        </p:nvSpPr>
-        <p:spPr>
-          <a:xfrm>
-            <a:off x="552450" y="333375"/>
-            <a:ext cx="11087100" cy="704850"/>
-          </a:xfrm>
-          <a:prstGeom prst="rect">
-            <a:avLst/>
-          </a:prstGeom>
-          <a:noFill/>
-          <a:ln w="0">
-            <a:noFill/>
-          </a:ln>
-        </p:spPr>
-        <p:txBody>
-          <a:bodyPr lIns="38100" tIns="19050" rIns="38100" bIns="19050" anchor="t">
-            <a:normAutofit/>
-          </a:bodyPr>
-          <a:lstStyle/>
-          <a:p>
-            <a:pPr algn="l">
-              <a:defRPr sz="2550" b="0">
-                <a:solidFill>
-                  <a:srgbClr val="111111"/>
-                </a:solidFill>
-                <a:latin typeface="Tahoma"/>
-                <a:ea typeface="Tahoma"/>
-                <a:cs typeface="Tahoma"/>
-              </a:defRPr>
-            </a:pPr>
-            <a:r>
-              <a:rPr sz="2550" b="0">
-                <a:solidFill>
-                  <a:srgbClr val="111111"/>
-                </a:solidFill>
-                <a:latin typeface="Tahoma"/>
-                <a:ea typeface="Tahoma"/>
-                <a:cs typeface="Tahoma"/>
-              </a:rPr>
-              <a:t>Ασκήσεις</a:t>
-            </a:r>
-          </a:p>
-        </p:txBody>
-      </p:sp>
-      <p:sp>
-        <p:nvSpPr>
-          <p:cNvPr id="2" name="Rectangle 1">
-            <a:extLst>
-              <a:ext uri="{FF2B5EF4-FFF2-40B4-BE49-F238E27FC236}">
-                <a16:creationId xmlns:a16="http://schemas.microsoft.com/office/drawing/2014/main" id="{BD4C00D0-6D84-4B19-8A99-6A1F36E007A8}"/>
-              </a:ext>
-            </a:extLst>
-          </p:cNvPr>
-          <p:cNvSpPr>
-            <a:spLocks noGrp="1"/>
-          </p:cNvSpPr>
-          <p:nvPr/>
-        </p:nvSpPr>
-        <p:spPr>
-          <a:xfrm>
-            <a:off x="619125" y="1200150"/>
-            <a:ext cx="1762125" cy="47625"/>
-          </a:xfrm>
-          <a:prstGeom prst="rect">
-            <a:avLst/>
-          </a:prstGeom>
-          <a:solidFill>
-            <a:srgbClr val="F57C24"/>
-          </a:solidFill>
-          <a:ln w="0">
-            <a:noFill/>
-          </a:ln>
-        </p:spPr>
-        <p:txBody>
-          <a:bodyPr/>
-          <a:lstStyle/>
-          <a:p>
-            <a:endParaRPr lang="en-GB"/>
-          </a:p>
-        </p:txBody>
-      </p:sp>
-      <p:sp>
-        <p:nvSpPr>
-          <p:cNvPr id="3" name="Rectangle 2">
-            <a:extLst>
-              <a:ext uri="{FF2B5EF4-FFF2-40B4-BE49-F238E27FC236}">
-                <a16:creationId xmlns:a16="http://schemas.microsoft.com/office/drawing/2014/main" id="{5BA15B3A-082B-44B5-838A-9C6CA61E866D}"/>
-              </a:ext>
-            </a:extLst>
-          </p:cNvPr>
-          <p:cNvSpPr>
-            <a:spLocks noGrp="1"/>
-          </p:cNvSpPr>
-          <p:nvPr/>
-        </p:nvSpPr>
-        <p:spPr>
-          <a:xfrm>
-            <a:off x="590550" y="1524000"/>
-            <a:ext cx="4095750" cy="1905000"/>
-          </a:xfrm>
-          <a:prstGeom prst="rect">
-            <a:avLst/>
-          </a:prstGeom>
-          <a:noFill/>
-          <a:ln w="0">
-            <a:noFill/>
-          </a:ln>
-        </p:spPr>
-        <p:txBody>
-          <a:bodyPr lIns="28575" tIns="19050" rIns="28575" bIns="19050" anchor="t">
-            <a:normAutofit/>
-          </a:bodyPr>
-          <a:lstStyle/>
-          <a:p>
-            <a:pPr marL="254000" indent="-152400" algn="l">
-              <a:spcAft>
-                <a:spcPts val="550"/>
-              </a:spcAft>
-              <a:buChar char="•"/>
-              <a:defRPr sz="1800" b="0">
-                <a:solidFill>
-                  <a:srgbClr val="111111"/>
-                </a:solidFill>
-                <a:latin typeface="Tahoma"/>
-                <a:ea typeface="Tahoma"/>
-                <a:cs typeface="Tahoma"/>
-              </a:defRPr>
-            </a:pPr>
-            <a:r>
-              <a:rPr sz="1800" b="0">
-                <a:solidFill>
-                  <a:srgbClr val="111111"/>
-                </a:solidFill>
-                <a:latin typeface="Tahoma"/>
-                <a:ea typeface="Tahoma"/>
-                <a:cs typeface="Tahoma"/>
-              </a:rPr>
-              <a:t>Σελίδες 127–128</a:t>
-            </a:r>
-          </a:p>
-          <a:p>
-            <a:pPr marL="254000" indent="-152400" algn="l">
-              <a:spcAft>
-                <a:spcPts val="550"/>
-              </a:spcAft>
-              <a:buChar char="•"/>
-              <a:defRPr sz="1800" b="0">
-                <a:solidFill>
-                  <a:srgbClr val="111111"/>
-                </a:solidFill>
-                <a:latin typeface="Tahoma"/>
-                <a:ea typeface="Tahoma"/>
-                <a:cs typeface="Tahoma"/>
-              </a:defRPr>
-            </a:pPr>
-            <a:r>
-              <a:rPr sz="1800" b="0">
-                <a:solidFill>
-                  <a:srgbClr val="111111"/>
-                </a:solidFill>
-                <a:latin typeface="Tahoma"/>
-                <a:ea typeface="Tahoma"/>
-                <a:cs typeface="Tahoma"/>
-              </a:rPr>
-              <a:t>Δραστηριότητες 1–16</a:t>
-            </a:r>
-          </a:p>
-          <a:p>
-            <a:pPr marL="254000" indent="-152400" algn="l">
-              <a:spcAft>
-                <a:spcPts val="550"/>
-              </a:spcAft>
-              <a:buChar char="•"/>
-              <a:defRPr sz="1800" b="0">
-                <a:solidFill>
-                  <a:srgbClr val="111111"/>
-                </a:solidFill>
-                <a:latin typeface="Tahoma"/>
-                <a:ea typeface="Tahoma"/>
-                <a:cs typeface="Tahoma"/>
-              </a:defRPr>
-            </a:pPr>
-            <a:r>
-              <a:rPr sz="1800" b="0">
-                <a:solidFill>
-                  <a:srgbClr val="111111"/>
-                </a:solidFill>
-                <a:latin typeface="Tahoma"/>
-                <a:ea typeface="Tahoma"/>
-                <a:cs typeface="Tahoma"/>
-              </a:rPr>
-              <a:t>Επιπρόσθετες: 17–20</a:t>
-            </a:r>
-          </a:p>
-        </p:txBody>
-      </p:sp>
-      <p:sp>
-        <p:nvSpPr>
-          <p:cNvPr id="4" name="Rectangle 3">
-            <a:extLst>
-              <a:ext uri="{FF2B5EF4-FFF2-40B4-BE49-F238E27FC236}">
-                <a16:creationId xmlns:a16="http://schemas.microsoft.com/office/drawing/2014/main" id="{FAE2A696-0DEE-4E26-B077-C41A10B1A31D}"/>
-              </a:ext>
-            </a:extLst>
-          </p:cNvPr>
-          <p:cNvSpPr>
-            <a:spLocks noGrp="1"/>
-          </p:cNvSpPr>
-          <p:nvPr/>
-        </p:nvSpPr>
-        <p:spPr>
-          <a:xfrm>
-            <a:off x="590550" y="3714750"/>
-            <a:ext cx="4095750" cy="1047750"/>
-          </a:xfrm>
-          <a:prstGeom prst="rect">
-            <a:avLst/>
-          </a:prstGeom>
-          <a:noFill/>
-          <a:ln w="0">
-            <a:noFill/>
-          </a:ln>
-        </p:spPr>
-        <p:txBody>
-          <a:bodyPr lIns="38100" tIns="19050" rIns="38100" bIns="19050" anchor="t">
-            <a:normAutofit/>
-          </a:bodyPr>
-          <a:lstStyle/>
-          <a:p>
-            <a:pPr algn="l">
-              <a:defRPr sz="1575" b="0">
-                <a:solidFill>
-                  <a:srgbClr val="444444"/>
-                </a:solidFill>
-                <a:latin typeface="Tahoma"/>
-                <a:ea typeface="Tahoma"/>
-                <a:cs typeface="Tahoma"/>
-              </a:defRPr>
-            </a:pPr>
-            <a:r>
-              <a:rPr sz="1575" b="0">
-                <a:solidFill>
-                  <a:srgbClr val="444444"/>
-                </a:solidFill>
-                <a:latin typeface="Tahoma"/>
-                <a:ea typeface="Tahoma"/>
-                <a:cs typeface="Tahoma"/>
-              </a:rPr>
-              <a:t>Εφαρμογή: αναζήτηση, αρχική σελίδα, Αγαπημένα και λήψη εικόνας.</a:t>
-            </a:r>
-          </a:p>
-        </p:txBody>
-      </p:sp>
-      <p:sp>
-        <p:nvSpPr>
-          <p:cNvPr id="7" name="Rectangle 6">
-            <a:extLst>
-              <a:ext uri="{FF2B5EF4-FFF2-40B4-BE49-F238E27FC236}">
-                <a16:creationId xmlns:a16="http://schemas.microsoft.com/office/drawing/2014/main" id="{0A81DD13-68D0-4A87-9085-573BE3294F21}"/>
-              </a:ext>
-            </a:extLst>
-          </p:cNvPr>
-          <p:cNvSpPr>
-            <a:spLocks noGrp="1"/>
-          </p:cNvSpPr>
-          <p:nvPr/>
-        </p:nvSpPr>
-        <p:spPr>
-          <a:xfrm>
-            <a:off x="552450" y="6429375"/>
-            <a:ext cx="11087100" cy="47625"/>
-          </a:xfrm>
-          <a:prstGeom prst="rect">
-            <a:avLst/>
-          </a:prstGeom>
-          <a:solidFill>
-            <a:srgbClr val="F57C24"/>
-          </a:solidFill>
-          <a:ln w="0">
-            <a:noFill/>
-          </a:ln>
-        </p:spPr>
-        <p:txBody>
-          <a:bodyPr/>
-          <a:lstStyle/>
-          <a:p>
-            <a:endParaRPr lang="en-GB"/>
-          </a:p>
-        </p:txBody>
-      </p:sp>
-      <p:sp>
-        <p:nvSpPr>
-          <p:cNvPr id="8" name="Rectangle 7">
-            <a:extLst>
-              <a:ext uri="{FF2B5EF4-FFF2-40B4-BE49-F238E27FC236}">
-                <a16:creationId xmlns:a16="http://schemas.microsoft.com/office/drawing/2014/main" id="{937C338C-AE99-4D7F-A888-E2436FF8029A}"/>
-              </a:ext>
-            </a:extLst>
-          </p:cNvPr>
-          <p:cNvSpPr>
-            <a:spLocks noGrp="1"/>
-          </p:cNvSpPr>
-          <p:nvPr/>
-        </p:nvSpPr>
-        <p:spPr>
-          <a:xfrm>
-            <a:off x="4286250" y="6429375"/>
-            <a:ext cx="7353300" cy="47625"/>
-          </a:xfrm>
-          <a:prstGeom prst="rect">
-            <a:avLst/>
-          </a:prstGeom>
-          <a:solidFill>
-            <a:srgbClr val="77A9D7"/>
-          </a:solidFill>
-          <a:ln w="0">
-            <a:noFill/>
-          </a:ln>
-        </p:spPr>
-        <p:txBody>
-          <a:bodyPr/>
-          <a:lstStyle/>
-          <a:p>
-            <a:endParaRPr lang="en-GB"/>
-          </a:p>
-        </p:txBody>
-      </p:sp>
-    </p:spTree>
-    <p:extLst>
-      <p:ext uri="{BB962C8B-B14F-4D97-AF65-F5344CB8AC3E}">
-        <p14:creationId xmlns:p14="http://schemas.microsoft.com/office/powerpoint/2010/main" val="1154500895"/>
       </p:ext>
     </p:extLst>
   </p:cSld>
